--- a/slides/TimeSeries.pptx
+++ b/slides/TimeSeries.pptx
@@ -6,29 +6,44 @@
   </p:sldMasterIdLst>
   <p:sldIdLst>
     <p:sldId id="296" r:id="rId2"/>
-    <p:sldId id="256" r:id="rId3"/>
-    <p:sldId id="270" r:id="rId4"/>
-    <p:sldId id="297" r:id="rId5"/>
-    <p:sldId id="288" r:id="rId6"/>
-    <p:sldId id="271" r:id="rId7"/>
-    <p:sldId id="272" r:id="rId8"/>
-    <p:sldId id="258" r:id="rId9"/>
-    <p:sldId id="261" r:id="rId10"/>
-    <p:sldId id="298" r:id="rId11"/>
-    <p:sldId id="299" r:id="rId12"/>
-    <p:sldId id="294" r:id="rId13"/>
-    <p:sldId id="262" r:id="rId14"/>
-    <p:sldId id="284" r:id="rId15"/>
-    <p:sldId id="300" r:id="rId16"/>
-    <p:sldId id="257" r:id="rId17"/>
-    <p:sldId id="290" r:id="rId18"/>
-    <p:sldId id="273" r:id="rId19"/>
-    <p:sldId id="274" r:id="rId20"/>
-    <p:sldId id="267" r:id="rId21"/>
-    <p:sldId id="301" r:id="rId22"/>
-    <p:sldId id="276" r:id="rId23"/>
-    <p:sldId id="278" r:id="rId24"/>
-    <p:sldId id="269" r:id="rId25"/>
+    <p:sldId id="315" r:id="rId3"/>
+    <p:sldId id="316" r:id="rId4"/>
+    <p:sldId id="256" r:id="rId5"/>
+    <p:sldId id="270" r:id="rId6"/>
+    <p:sldId id="297" r:id="rId7"/>
+    <p:sldId id="288" r:id="rId8"/>
+    <p:sldId id="271" r:id="rId9"/>
+    <p:sldId id="272" r:id="rId10"/>
+    <p:sldId id="258" r:id="rId11"/>
+    <p:sldId id="261" r:id="rId12"/>
+    <p:sldId id="298" r:id="rId13"/>
+    <p:sldId id="299" r:id="rId14"/>
+    <p:sldId id="294" r:id="rId15"/>
+    <p:sldId id="262" r:id="rId16"/>
+    <p:sldId id="284" r:id="rId17"/>
+    <p:sldId id="300" r:id="rId18"/>
+    <p:sldId id="257" r:id="rId19"/>
+    <p:sldId id="290" r:id="rId20"/>
+    <p:sldId id="273" r:id="rId21"/>
+    <p:sldId id="274" r:id="rId22"/>
+    <p:sldId id="267" r:id="rId23"/>
+    <p:sldId id="301" r:id="rId24"/>
+    <p:sldId id="276" r:id="rId25"/>
+    <p:sldId id="278" r:id="rId26"/>
+    <p:sldId id="269" r:id="rId27"/>
+    <p:sldId id="302" r:id="rId28"/>
+    <p:sldId id="308" r:id="rId29"/>
+    <p:sldId id="303" r:id="rId30"/>
+    <p:sldId id="305" r:id="rId31"/>
+    <p:sldId id="306" r:id="rId32"/>
+    <p:sldId id="307" r:id="rId33"/>
+    <p:sldId id="309" r:id="rId34"/>
+    <p:sldId id="310" r:id="rId35"/>
+    <p:sldId id="311" r:id="rId36"/>
+    <p:sldId id="312" r:id="rId37"/>
+    <p:sldId id="313" r:id="rId38"/>
+    <p:sldId id="314" r:id="rId39"/>
+    <p:sldId id="304" r:id="rId40"/>
   </p:sldIdLst>
   <p:sldSz cx="12192000" cy="6858000"/>
   <p:notesSz cx="6858000" cy="9144000"/>
@@ -274,7 +289,7 @@
           <a:p>
             <a:fld id="{7CAF7FD4-E345-3B4F-B408-1EAACE559263}" type="datetimeFigureOut">
               <a:rPr lang="en-US" smtClean="0"/>
-              <a:t>11/4/25</a:t>
+              <a:t>11/18/25</a:t>
             </a:fld>
             <a:endParaRPr lang="en-US"/>
           </a:p>
@@ -485,7 +500,7 @@
           <a:p>
             <a:fld id="{7CAF7FD4-E345-3B4F-B408-1EAACE559263}" type="datetimeFigureOut">
               <a:rPr lang="en-US" smtClean="0"/>
-              <a:t>11/4/25</a:t>
+              <a:t>11/18/25</a:t>
             </a:fld>
             <a:endParaRPr lang="en-US"/>
           </a:p>
@@ -700,7 +715,7 @@
           <a:p>
             <a:fld id="{7CAF7FD4-E345-3B4F-B408-1EAACE559263}" type="datetimeFigureOut">
               <a:rPr lang="en-US" smtClean="0"/>
-              <a:t>11/4/25</a:t>
+              <a:t>11/18/25</a:t>
             </a:fld>
             <a:endParaRPr lang="en-US"/>
           </a:p>
@@ -901,7 +916,7 @@
           <a:p>
             <a:fld id="{7CAF7FD4-E345-3B4F-B408-1EAACE559263}" type="datetimeFigureOut">
               <a:rPr lang="en-US" smtClean="0"/>
-              <a:t>11/4/25</a:t>
+              <a:t>11/18/25</a:t>
             </a:fld>
             <a:endParaRPr lang="en-US"/>
           </a:p>
@@ -1180,7 +1195,7 @@
           <a:p>
             <a:fld id="{7CAF7FD4-E345-3B4F-B408-1EAACE559263}" type="datetimeFigureOut">
               <a:rPr lang="en-US" smtClean="0"/>
-              <a:t>11/4/25</a:t>
+              <a:t>11/18/25</a:t>
             </a:fld>
             <a:endParaRPr lang="en-US"/>
           </a:p>
@@ -1448,7 +1463,7 @@
           <a:p>
             <a:fld id="{7CAF7FD4-E345-3B4F-B408-1EAACE559263}" type="datetimeFigureOut">
               <a:rPr lang="en-US" smtClean="0"/>
-              <a:t>11/4/25</a:t>
+              <a:t>11/18/25</a:t>
             </a:fld>
             <a:endParaRPr lang="en-US"/>
           </a:p>
@@ -1864,7 +1879,7 @@
           <a:p>
             <a:fld id="{7CAF7FD4-E345-3B4F-B408-1EAACE559263}" type="datetimeFigureOut">
               <a:rPr lang="en-US" smtClean="0"/>
-              <a:t>11/4/25</a:t>
+              <a:t>11/18/25</a:t>
             </a:fld>
             <a:endParaRPr lang="en-US"/>
           </a:p>
@@ -2013,7 +2028,7 @@
           <a:p>
             <a:fld id="{7CAF7FD4-E345-3B4F-B408-1EAACE559263}" type="datetimeFigureOut">
               <a:rPr lang="en-US" smtClean="0"/>
-              <a:t>11/4/25</a:t>
+              <a:t>11/18/25</a:t>
             </a:fld>
             <a:endParaRPr lang="en-US"/>
           </a:p>
@@ -2139,7 +2154,7 @@
           <a:p>
             <a:fld id="{7CAF7FD4-E345-3B4F-B408-1EAACE559263}" type="datetimeFigureOut">
               <a:rPr lang="en-US" smtClean="0"/>
-              <a:t>11/4/25</a:t>
+              <a:t>11/18/25</a:t>
             </a:fld>
             <a:endParaRPr lang="en-US"/>
           </a:p>
@@ -2390,7 +2405,7 @@
           <a:p>
             <a:fld id="{7CAF7FD4-E345-3B4F-B408-1EAACE559263}" type="datetimeFigureOut">
               <a:rPr lang="en-US" smtClean="0"/>
-              <a:t>11/4/25</a:t>
+              <a:t>11/18/25</a:t>
             </a:fld>
             <a:endParaRPr lang="en-US"/>
           </a:p>
@@ -2835,7 +2850,7 @@
           <a:p>
             <a:fld id="{7CAF7FD4-E345-3B4F-B408-1EAACE559263}" type="datetimeFigureOut">
               <a:rPr lang="en-US" smtClean="0"/>
-              <a:t>11/4/25</a:t>
+              <a:t>11/18/25</a:t>
             </a:fld>
             <a:endParaRPr lang="en-US"/>
           </a:p>
@@ -3169,7 +3184,7 @@
           <a:p>
             <a:fld id="{7CAF7FD4-E345-3B4F-B408-1EAACE559263}" type="datetimeFigureOut">
               <a:rPr lang="en-US" smtClean="0"/>
-              <a:t>11/4/25</a:t>
+              <a:t>11/18/25</a:t>
             </a:fld>
             <a:endParaRPr lang="en-US"/>
           </a:p>
@@ -3709,7 +3724,31 @@
           <a:bodyPr/>
           <a:lstStyle/>
           <a:p>
-            <a:endParaRPr lang="en-US" dirty="0"/>
+            <a:r>
+              <a:rPr lang="en-US" dirty="0"/>
+              <a:t>Predictive modelling in Tableau. </a:t>
+            </a:r>
+          </a:p>
+          <a:p>
+            <a:pPr lvl="1"/>
+            <a:r>
+              <a:rPr lang="en-US" dirty="0"/>
+              <a:t>Some details on some predictive modelling applications we can use in Tableau. </a:t>
+            </a:r>
+          </a:p>
+          <a:p>
+            <a:pPr lvl="1"/>
+            <a:r>
+              <a:rPr lang="en-US" dirty="0"/>
+              <a:t>Time series forecast, regression models. </a:t>
+            </a:r>
+          </a:p>
+          <a:p>
+            <a:pPr lvl="1"/>
+            <a:r>
+              <a:rPr lang="en-US" dirty="0"/>
+              <a:t>Depending on time, market baskets. </a:t>
+            </a:r>
           </a:p>
         </p:txBody>
       </p:sp>
@@ -3748,6 +3787,282 @@
           <p:cNvPr id="2" name="Title 1">
             <a:extLst>
               <a:ext uri="{FF2B5EF4-FFF2-40B4-BE49-F238E27FC236}">
+                <a16:creationId xmlns:a16="http://schemas.microsoft.com/office/drawing/2014/main" id="{5747E6BB-1E1D-AF4C-8CE0-6495F0739AD3}"/>
+              </a:ext>
+            </a:extLst>
+          </p:cNvPr>
+          <p:cNvSpPr>
+            <a:spLocks noGrp="1"/>
+          </p:cNvSpPr>
+          <p:nvPr>
+            <p:ph type="title"/>
+          </p:nvPr>
+        </p:nvSpPr>
+        <p:spPr/>
+        <p:txBody>
+          <a:bodyPr/>
+          <a:lstStyle/>
+          <a:p>
+            <a:r>
+              <a:rPr lang="en-US" dirty="0"/>
+              <a:t>Exponential Smoothing</a:t>
+            </a:r>
+          </a:p>
+        </p:txBody>
+      </p:sp>
+      <p:sp>
+        <p:nvSpPr>
+          <p:cNvPr id="3" name="Content Placeholder 2">
+            <a:extLst>
+              <a:ext uri="{FF2B5EF4-FFF2-40B4-BE49-F238E27FC236}">
+                <a16:creationId xmlns:a16="http://schemas.microsoft.com/office/drawing/2014/main" id="{92510E4B-B5AE-7445-AA7F-16491623F112}"/>
+              </a:ext>
+            </a:extLst>
+          </p:cNvPr>
+          <p:cNvSpPr>
+            <a:spLocks noGrp="1"/>
+          </p:cNvSpPr>
+          <p:nvPr>
+            <p:ph idx="1"/>
+          </p:nvPr>
+        </p:nvSpPr>
+        <p:spPr>
+          <a:xfrm>
+            <a:off x="1451579" y="2015732"/>
+            <a:ext cx="9603275" cy="4037749"/>
+          </a:xfrm>
+        </p:spPr>
+        <p:txBody>
+          <a:bodyPr>
+            <a:normAutofit/>
+          </a:bodyPr>
+          <a:lstStyle/>
+          <a:p>
+            <a:r>
+              <a:rPr lang="en-US" dirty="0"/>
+              <a:t>Exponential smoothing is one of the simplest forms of time series forecasts. </a:t>
+            </a:r>
+          </a:p>
+          <a:p>
+            <a:r>
+              <a:rPr lang="en-US" dirty="0"/>
+              <a:t>Weighted averaging with a smoothing term. </a:t>
+            </a:r>
+          </a:p>
+          <a:p>
+            <a:r>
+              <a:rPr lang="en-US" dirty="0"/>
+              <a:t>Can also incorporate:</a:t>
+            </a:r>
+          </a:p>
+          <a:p>
+            <a:pPr lvl="1"/>
+            <a:r>
+              <a:rPr lang="en-US" dirty="0"/>
+              <a:t>Trends – are we moving up or down over time. </a:t>
+            </a:r>
+          </a:p>
+          <a:p>
+            <a:pPr lvl="1"/>
+            <a:r>
+              <a:rPr lang="en-US" dirty="0"/>
+              <a:t>Cyclicality – are there seasonal patterns. </a:t>
+            </a:r>
+          </a:p>
+          <a:p>
+            <a:r>
+              <a:rPr lang="en-US" dirty="0"/>
+              <a:t>Trends and seasonality can be either Additive or Multiplicative:</a:t>
+            </a:r>
+          </a:p>
+          <a:p>
+            <a:pPr lvl="1"/>
+            <a:r>
+              <a:rPr lang="en-CA" dirty="0"/>
+              <a:t>If every December we sell 10,000 more apartments than we do in November, the seasonality is </a:t>
+            </a:r>
+            <a:r>
+              <a:rPr lang="en-CA" i="1" dirty="0"/>
+              <a:t>additive</a:t>
+            </a:r>
+            <a:r>
+              <a:rPr lang="en-CA" dirty="0"/>
+              <a:t> in nature. However, if we sell 10% more apartments in the summer months than we do in the winter months the seasonality is </a:t>
+            </a:r>
+            <a:r>
+              <a:rPr lang="en-CA" i="1" dirty="0"/>
+              <a:t>multiplicative</a:t>
+            </a:r>
+            <a:r>
+              <a:rPr lang="en-CA" dirty="0"/>
+              <a:t> in nature.</a:t>
+            </a:r>
+            <a:endParaRPr lang="en-US" dirty="0"/>
+          </a:p>
+        </p:txBody>
+      </p:sp>
+    </p:spTree>
+    <p:extLst>
+      <p:ext uri="{BB962C8B-B14F-4D97-AF65-F5344CB8AC3E}">
+        <p14:creationId xmlns:p14="http://schemas.microsoft.com/office/powerpoint/2010/main" val="1578221522"/>
+      </p:ext>
+    </p:extLst>
+  </p:cSld>
+  <p:clrMapOvr>
+    <a:masterClrMapping/>
+  </p:clrMapOvr>
+</p:sld>
+</file>
+
+<file path=ppt/slides/slide11.xml><?xml version="1.0" encoding="utf-8"?>
+<p:sld xmlns:a="http://schemas.openxmlformats.org/drawingml/2006/main" xmlns:r="http://schemas.openxmlformats.org/officeDocument/2006/relationships" xmlns:p="http://schemas.openxmlformats.org/presentationml/2006/main">
+  <p:cSld>
+    <p:spTree>
+      <p:nvGrpSpPr>
+        <p:cNvPr id="1" name=""/>
+        <p:cNvGrpSpPr/>
+        <p:nvPr/>
+      </p:nvGrpSpPr>
+      <p:grpSpPr>
+        <a:xfrm>
+          <a:off x="0" y="0"/>
+          <a:ext cx="0" cy="0"/>
+          <a:chOff x="0" y="0"/>
+          <a:chExt cx="0" cy="0"/>
+        </a:xfrm>
+      </p:grpSpPr>
+      <p:sp>
+        <p:nvSpPr>
+          <p:cNvPr id="2" name="Title 1">
+            <a:extLst>
+              <a:ext uri="{FF2B5EF4-FFF2-40B4-BE49-F238E27FC236}">
+                <a16:creationId xmlns:a16="http://schemas.microsoft.com/office/drawing/2014/main" id="{38C00E31-AF1D-2147-A243-C6D0E066B0F9}"/>
+              </a:ext>
+            </a:extLst>
+          </p:cNvPr>
+          <p:cNvSpPr>
+            <a:spLocks noGrp="1"/>
+          </p:cNvSpPr>
+          <p:nvPr>
+            <p:ph type="title"/>
+          </p:nvPr>
+        </p:nvSpPr>
+        <p:spPr/>
+        <p:txBody>
+          <a:bodyPr/>
+          <a:lstStyle/>
+          <a:p>
+            <a:endParaRPr lang="en-US"/>
+          </a:p>
+        </p:txBody>
+      </p:sp>
+      <p:sp>
+        <p:nvSpPr>
+          <p:cNvPr id="3" name="Content Placeholder 2">
+            <a:extLst>
+              <a:ext uri="{FF2B5EF4-FFF2-40B4-BE49-F238E27FC236}">
+                <a16:creationId xmlns:a16="http://schemas.microsoft.com/office/drawing/2014/main" id="{E1474FC8-4E41-6541-BD02-76EBFABE63CC}"/>
+              </a:ext>
+            </a:extLst>
+          </p:cNvPr>
+          <p:cNvSpPr>
+            <a:spLocks noGrp="1"/>
+          </p:cNvSpPr>
+          <p:nvPr>
+            <p:ph idx="1"/>
+          </p:nvPr>
+        </p:nvSpPr>
+        <p:spPr/>
+        <p:txBody>
+          <a:bodyPr/>
+          <a:lstStyle/>
+          <a:p>
+            <a:endParaRPr lang="en-US"/>
+          </a:p>
+        </p:txBody>
+      </p:sp>
+      <p:pic>
+        <p:nvPicPr>
+          <p:cNvPr id="1026" name="Picture 2" descr="Trend, Seasonality, Moving Average, Auto Regressive Model : My Journey to  Time Series Data with Interactive Code | by Jae Duk Seo | Towards Data  Science">
+            <a:extLst>
+              <a:ext uri="{FF2B5EF4-FFF2-40B4-BE49-F238E27FC236}">
+                <a16:creationId xmlns:a16="http://schemas.microsoft.com/office/drawing/2014/main" id="{81836D80-3AD8-7448-BD2F-386344D86380}"/>
+              </a:ext>
+            </a:extLst>
+          </p:cNvPr>
+          <p:cNvPicPr>
+            <a:picLocks noChangeAspect="1" noChangeArrowheads="1"/>
+          </p:cNvPicPr>
+          <p:nvPr/>
+        </p:nvPicPr>
+        <p:blipFill>
+          <a:blip r:embed="rId2">
+            <a:extLst>
+              <a:ext uri="{28A0092B-C50C-407E-A947-70E740481C1C}">
+                <a14:useLocalDpi xmlns:a14="http://schemas.microsoft.com/office/drawing/2010/main" val="0"/>
+              </a:ext>
+            </a:extLst>
+          </a:blip>
+          <a:srcRect/>
+          <a:stretch>
+            <a:fillRect/>
+          </a:stretch>
+        </p:blipFill>
+        <p:spPr bwMode="auto">
+          <a:xfrm>
+            <a:off x="2473325" y="0"/>
+            <a:ext cx="7245350" cy="6858000"/>
+          </a:xfrm>
+          <a:prstGeom prst="rect">
+            <a:avLst/>
+          </a:prstGeom>
+          <a:noFill/>
+          <a:extLst>
+            <a:ext uri="{909E8E84-426E-40DD-AFC4-6F175D3DCCD1}">
+              <a14:hiddenFill xmlns:a14="http://schemas.microsoft.com/office/drawing/2010/main">
+                <a:solidFill>
+                  <a:srgbClr val="FFFFFF"/>
+                </a:solidFill>
+              </a14:hiddenFill>
+            </a:ext>
+          </a:extLst>
+        </p:spPr>
+      </p:pic>
+    </p:spTree>
+    <p:extLst>
+      <p:ext uri="{BB962C8B-B14F-4D97-AF65-F5344CB8AC3E}">
+        <p14:creationId xmlns:p14="http://schemas.microsoft.com/office/powerpoint/2010/main" val="184144261"/>
+      </p:ext>
+    </p:extLst>
+  </p:cSld>
+  <p:clrMapOvr>
+    <a:masterClrMapping/>
+  </p:clrMapOvr>
+</p:sld>
+</file>
+
+<file path=ppt/slides/slide12.xml><?xml version="1.0" encoding="utf-8"?>
+<p:sld xmlns:a="http://schemas.openxmlformats.org/drawingml/2006/main" xmlns:r="http://schemas.openxmlformats.org/officeDocument/2006/relationships" xmlns:p="http://schemas.openxmlformats.org/presentationml/2006/main">
+  <p:cSld>
+    <p:spTree>
+      <p:nvGrpSpPr>
+        <p:cNvPr id="1" name=""/>
+        <p:cNvGrpSpPr/>
+        <p:nvPr/>
+      </p:nvGrpSpPr>
+      <p:grpSpPr>
+        <a:xfrm>
+          <a:off x="0" y="0"/>
+          <a:ext cx="0" cy="0"/>
+          <a:chOff x="0" y="0"/>
+          <a:chExt cx="0" cy="0"/>
+        </a:xfrm>
+      </p:grpSpPr>
+      <p:sp>
+        <p:nvSpPr>
+          <p:cNvPr id="2" name="Title 1">
+            <a:extLst>
+              <a:ext uri="{FF2B5EF4-FFF2-40B4-BE49-F238E27FC236}">
                 <a16:creationId xmlns:a16="http://schemas.microsoft.com/office/drawing/2014/main" id="{DCA56D47-500B-563F-3954-DD705ACAA23C}"/>
               </a:ext>
             </a:extLst>
@@ -3872,7 +4187,7 @@
 </p:sld>
 </file>
 
-<file path=ppt/slides/slide11.xml><?xml version="1.0" encoding="utf-8"?>
+<file path=ppt/slides/slide13.xml><?xml version="1.0" encoding="utf-8"?>
 <p:sld xmlns:a="http://schemas.openxmlformats.org/drawingml/2006/main" xmlns:r="http://schemas.openxmlformats.org/officeDocument/2006/relationships" xmlns:p="http://schemas.openxmlformats.org/presentationml/2006/main">
   <p:cSld>
     <p:spTree>
@@ -4101,7 +4416,7 @@
 </p:sld>
 </file>
 
-<file path=ppt/slides/slide12.xml><?xml version="1.0" encoding="utf-8"?>
+<file path=ppt/slides/slide14.xml><?xml version="1.0" encoding="utf-8"?>
 <p:sld xmlns:a="http://schemas.openxmlformats.org/drawingml/2006/main" xmlns:r="http://schemas.openxmlformats.org/officeDocument/2006/relationships" xmlns:p="http://schemas.openxmlformats.org/presentationml/2006/main">
   <p:cSld>
     <p:spTree>
@@ -4280,7 +4595,7 @@
 </p:sld>
 </file>
 
-<file path=ppt/slides/slide13.xml><?xml version="1.0" encoding="utf-8"?>
+<file path=ppt/slides/slide15.xml><?xml version="1.0" encoding="utf-8"?>
 <p:sld xmlns:a="http://schemas.openxmlformats.org/drawingml/2006/main" xmlns:r="http://schemas.openxmlformats.org/officeDocument/2006/relationships" xmlns:p="http://schemas.openxmlformats.org/presentationml/2006/main">
   <p:cSld>
     <p:bg>
@@ -4724,7 +5039,7 @@
 </p:sld>
 </file>
 
-<file path=ppt/slides/slide14.xml><?xml version="1.0" encoding="utf-8"?>
+<file path=ppt/slides/slide16.xml><?xml version="1.0" encoding="utf-8"?>
 <p:sld xmlns:a="http://schemas.openxmlformats.org/drawingml/2006/main" xmlns:r="http://schemas.openxmlformats.org/officeDocument/2006/relationships" xmlns:p="http://schemas.openxmlformats.org/presentationml/2006/main">
   <p:cSld>
     <p:spTree>
@@ -4876,7 +5191,7 @@
 </p:sld>
 </file>
 
-<file path=ppt/slides/slide15.xml><?xml version="1.0" encoding="utf-8"?>
+<file path=ppt/slides/slide17.xml><?xml version="1.0" encoding="utf-8"?>
 <p:sld xmlns:a="http://schemas.openxmlformats.org/drawingml/2006/main" xmlns:r="http://schemas.openxmlformats.org/officeDocument/2006/relationships" xmlns:p="http://schemas.openxmlformats.org/presentationml/2006/main">
   <p:cSld>
     <p:spTree>
@@ -4962,7 +5277,7 @@
 </p:sld>
 </file>
 
-<file path=ppt/slides/slide16.xml><?xml version="1.0" encoding="utf-8"?>
+<file path=ppt/slides/slide18.xml><?xml version="1.0" encoding="utf-8"?>
 <p:sld xmlns:a="http://schemas.openxmlformats.org/drawingml/2006/main" xmlns:r="http://schemas.openxmlformats.org/officeDocument/2006/relationships" xmlns:p="http://schemas.openxmlformats.org/presentationml/2006/main">
   <p:cSld>
     <p:spTree>
@@ -5115,7 +5430,7 @@
 </p:sld>
 </file>
 
-<file path=ppt/slides/slide17.xml><?xml version="1.0" encoding="utf-8"?>
+<file path=ppt/slides/slide19.xml><?xml version="1.0" encoding="utf-8"?>
 <p:sld xmlns:a="http://schemas.openxmlformats.org/drawingml/2006/main" xmlns:r="http://schemas.openxmlformats.org/officeDocument/2006/relationships" xmlns:p="http://schemas.openxmlformats.org/presentationml/2006/main">
   <p:cSld>
     <p:bg>
@@ -5285,263 +5600,6 @@
 </p:sld>
 </file>
 
-<file path=ppt/slides/slide18.xml><?xml version="1.0" encoding="utf-8"?>
-<p:sld xmlns:a="http://schemas.openxmlformats.org/drawingml/2006/main" xmlns:r="http://schemas.openxmlformats.org/officeDocument/2006/relationships" xmlns:p="http://schemas.openxmlformats.org/presentationml/2006/main">
-  <p:cSld>
-    <p:spTree>
-      <p:nvGrpSpPr>
-        <p:cNvPr id="1" name=""/>
-        <p:cNvGrpSpPr/>
-        <p:nvPr/>
-      </p:nvGrpSpPr>
-      <p:grpSpPr>
-        <a:xfrm>
-          <a:off x="0" y="0"/>
-          <a:ext cx="0" cy="0"/>
-          <a:chOff x="0" y="0"/>
-          <a:chExt cx="0" cy="0"/>
-        </a:xfrm>
-      </p:grpSpPr>
-      <p:sp>
-        <p:nvSpPr>
-          <p:cNvPr id="2" name="Title 1">
-            <a:extLst>
-              <a:ext uri="{FF2B5EF4-FFF2-40B4-BE49-F238E27FC236}">
-                <a16:creationId xmlns:a16="http://schemas.microsoft.com/office/drawing/2014/main" id="{7918DD57-685F-9106-A246-52DA83E487AF}"/>
-              </a:ext>
-            </a:extLst>
-          </p:cNvPr>
-          <p:cNvSpPr>
-            <a:spLocks noGrp="1"/>
-          </p:cNvSpPr>
-          <p:nvPr>
-            <p:ph type="title"/>
-          </p:nvPr>
-        </p:nvSpPr>
-        <p:spPr/>
-        <p:txBody>
-          <a:bodyPr/>
-          <a:lstStyle/>
-          <a:p>
-            <a:r>
-              <a:rPr lang="en-US" dirty="0"/>
-              <a:t>ARIMA-d Up</a:t>
-            </a:r>
-          </a:p>
-        </p:txBody>
-      </p:sp>
-      <p:sp>
-        <p:nvSpPr>
-          <p:cNvPr id="3" name="Content Placeholder 2">
-            <a:extLst>
-              <a:ext uri="{FF2B5EF4-FFF2-40B4-BE49-F238E27FC236}">
-                <a16:creationId xmlns:a16="http://schemas.microsoft.com/office/drawing/2014/main" id="{5DFC05F1-1780-38C0-3A3E-8D342C5F1611}"/>
-              </a:ext>
-            </a:extLst>
-          </p:cNvPr>
-          <p:cNvSpPr>
-            <a:spLocks noGrp="1"/>
-          </p:cNvSpPr>
-          <p:nvPr>
-            <p:ph idx="1"/>
-          </p:nvPr>
-        </p:nvSpPr>
-        <p:spPr>
-          <a:xfrm>
-            <a:off x="1451579" y="1853753"/>
-            <a:ext cx="9603275" cy="4199727"/>
-          </a:xfrm>
-        </p:spPr>
-        <p:txBody>
-          <a:bodyPr>
-            <a:normAutofit/>
-          </a:bodyPr>
-          <a:lstStyle/>
-          <a:p>
-            <a:r>
-              <a:rPr lang="en-US" dirty="0"/>
-              <a:t>The ARIMA model type is a ‘basic’ one – a more elaborate moving average. </a:t>
-            </a:r>
-          </a:p>
-          <a:p>
-            <a:r>
-              <a:rPr lang="en-US" dirty="0"/>
-              <a:t>Pros:</a:t>
-            </a:r>
-          </a:p>
-          <a:p>
-            <a:pPr lvl="1"/>
-            <a:r>
-              <a:rPr lang="en-US" dirty="0"/>
-              <a:t>Simple, transparent.</a:t>
-            </a:r>
-          </a:p>
-          <a:p>
-            <a:r>
-              <a:rPr lang="en-US" dirty="0"/>
-              <a:t>Cons:</a:t>
-            </a:r>
-          </a:p>
-          <a:p>
-            <a:pPr lvl="1"/>
-            <a:r>
-              <a:rPr lang="en-US" dirty="0"/>
-              <a:t>Potentially too simple, not adaptable to complicated scenarios. </a:t>
-            </a:r>
-          </a:p>
-          <a:p>
-            <a:r>
-              <a:rPr lang="en-US" dirty="0"/>
-              <a:t>Note – these simpler models with more bias error may perform best, the future is hard to predict accurately. Too much ability of the model to adjust predictions may harm us. </a:t>
-            </a:r>
-          </a:p>
-        </p:txBody>
-      </p:sp>
-    </p:spTree>
-    <p:extLst>
-      <p:ext uri="{BB962C8B-B14F-4D97-AF65-F5344CB8AC3E}">
-        <p14:creationId xmlns:p14="http://schemas.microsoft.com/office/powerpoint/2010/main" val="2830739107"/>
-      </p:ext>
-    </p:extLst>
-  </p:cSld>
-  <p:clrMapOvr>
-    <a:masterClrMapping/>
-  </p:clrMapOvr>
-</p:sld>
-</file>
-
-<file path=ppt/slides/slide19.xml><?xml version="1.0" encoding="utf-8"?>
-<p:sld xmlns:a="http://schemas.openxmlformats.org/drawingml/2006/main" xmlns:r="http://schemas.openxmlformats.org/officeDocument/2006/relationships" xmlns:p="http://schemas.openxmlformats.org/presentationml/2006/main">
-  <p:cSld>
-    <p:spTree>
-      <p:nvGrpSpPr>
-        <p:cNvPr id="1" name=""/>
-        <p:cNvGrpSpPr/>
-        <p:nvPr/>
-      </p:nvGrpSpPr>
-      <p:grpSpPr>
-        <a:xfrm>
-          <a:off x="0" y="0"/>
-          <a:ext cx="0" cy="0"/>
-          <a:chOff x="0" y="0"/>
-          <a:chExt cx="0" cy="0"/>
-        </a:xfrm>
-      </p:grpSpPr>
-      <p:sp>
-        <p:nvSpPr>
-          <p:cNvPr id="2" name="Title 1">
-            <a:extLst>
-              <a:ext uri="{FF2B5EF4-FFF2-40B4-BE49-F238E27FC236}">
-                <a16:creationId xmlns:a16="http://schemas.microsoft.com/office/drawing/2014/main" id="{DA5678F7-635A-D40C-AD90-AAADEA13E967}"/>
-              </a:ext>
-            </a:extLst>
-          </p:cNvPr>
-          <p:cNvSpPr>
-            <a:spLocks noGrp="1"/>
-          </p:cNvSpPr>
-          <p:nvPr>
-            <p:ph type="title"/>
-          </p:nvPr>
-        </p:nvSpPr>
-        <p:spPr/>
-        <p:txBody>
-          <a:bodyPr/>
-          <a:lstStyle/>
-          <a:p>
-            <a:r>
-              <a:rPr lang="en-US" dirty="0"/>
-              <a:t>Smarter Time Models</a:t>
-            </a:r>
-          </a:p>
-        </p:txBody>
-      </p:sp>
-      <p:sp>
-        <p:nvSpPr>
-          <p:cNvPr id="3" name="Content Placeholder 2">
-            <a:extLst>
-              <a:ext uri="{FF2B5EF4-FFF2-40B4-BE49-F238E27FC236}">
-                <a16:creationId xmlns:a16="http://schemas.microsoft.com/office/drawing/2014/main" id="{F23B1FF3-C207-9615-B32A-D907854A0D2F}"/>
-              </a:ext>
-            </a:extLst>
-          </p:cNvPr>
-          <p:cNvSpPr>
-            <a:spLocks noGrp="1"/>
-          </p:cNvSpPr>
-          <p:nvPr>
-            <p:ph idx="1"/>
-          </p:nvPr>
-        </p:nvSpPr>
-        <p:spPr>
-          <a:xfrm>
-            <a:off x="1137146" y="1853754"/>
-            <a:ext cx="10723927" cy="4199727"/>
-          </a:xfrm>
-        </p:spPr>
-        <p:txBody>
-          <a:bodyPr/>
-          <a:lstStyle/>
-          <a:p>
-            <a:r>
-              <a:rPr lang="en-US" dirty="0"/>
-              <a:t>Modern models have much more capability than a simple ARIMA one. </a:t>
-            </a:r>
-          </a:p>
-          <a:p>
-            <a:r>
-              <a:rPr lang="en-US" dirty="0"/>
-              <a:t>Their capacity to learn is much larger - they have more parameters, can learn complex patterns. </a:t>
-            </a:r>
-          </a:p>
-          <a:p>
-            <a:pPr lvl="1"/>
-            <a:r>
-              <a:rPr lang="en-US" dirty="0"/>
-              <a:t>In ds the number of parameters roughly tells us how complicated of a thing can be predicted. </a:t>
-            </a:r>
-          </a:p>
-          <a:p>
-            <a:pPr lvl="1"/>
-            <a:r>
-              <a:rPr lang="en-US" dirty="0"/>
-              <a:t>E.g. image recognition is more complex than predicting the number of each shoe size needed for NIKE. </a:t>
-            </a:r>
-          </a:p>
-          <a:p>
-            <a:pPr lvl="1"/>
-            <a:r>
-              <a:rPr lang="en-US" dirty="0"/>
-              <a:t>“Regular” simple machine learning models may have 5-100 parameters. </a:t>
-            </a:r>
-          </a:p>
-          <a:p>
-            <a:pPr lvl="1"/>
-            <a:r>
-              <a:rPr lang="en-US" dirty="0"/>
-              <a:t>Neural networks (the models that are ‘AI’) will have millions or more. </a:t>
-            </a:r>
-          </a:p>
-          <a:p>
-            <a:pPr lvl="1"/>
-            <a:r>
-              <a:rPr lang="en-US" dirty="0"/>
-              <a:t>Very smart models like ChatGPT have tens or hundreds of billions, rapidly growing. </a:t>
-            </a:r>
-          </a:p>
-        </p:txBody>
-      </p:sp>
-    </p:spTree>
-    <p:extLst>
-      <p:ext uri="{BB962C8B-B14F-4D97-AF65-F5344CB8AC3E}">
-        <p14:creationId xmlns:p14="http://schemas.microsoft.com/office/powerpoint/2010/main" val="2969086212"/>
-      </p:ext>
-    </p:extLst>
-  </p:cSld>
-  <p:clrMapOvr>
-    <a:masterClrMapping/>
-  </p:clrMapOvr>
-</p:sld>
-</file>
-
 <file path=ppt/slides/slide2.xml><?xml version="1.0" encoding="utf-8"?>
 <p:sld xmlns:a="http://schemas.openxmlformats.org/drawingml/2006/main" xmlns:r="http://schemas.openxmlformats.org/officeDocument/2006/relationships" xmlns:p="http://schemas.openxmlformats.org/presentationml/2006/main">
   <p:cSld>
@@ -5564,7 +5622,7 @@
           <p:cNvPr id="2" name="Title 1">
             <a:extLst>
               <a:ext uri="{FF2B5EF4-FFF2-40B4-BE49-F238E27FC236}">
-                <a16:creationId xmlns:a16="http://schemas.microsoft.com/office/drawing/2014/main" id="{AD0A358F-3029-3B46-8F88-5B7AAD9B2E72}"/>
+                <a16:creationId xmlns:a16="http://schemas.microsoft.com/office/drawing/2014/main" id="{7AB2EAB8-6A98-25C7-636D-951FD7BDA693}"/>
               </a:ext>
             </a:extLst>
           </p:cNvPr>
@@ -5572,7 +5630,7 @@
             <a:spLocks noGrp="1"/>
           </p:cNvSpPr>
           <p:nvPr>
-            <p:ph type="ctrTitle"/>
+            <p:ph type="title"/>
           </p:nvPr>
         </p:nvSpPr>
         <p:spPr/>
@@ -5582,17 +5640,17 @@
           <a:p>
             <a:r>
               <a:rPr lang="en-US" dirty="0"/>
-              <a:t>Time Series Forecasting</a:t>
-            </a:r>
-          </a:p>
-        </p:txBody>
-      </p:sp>
-      <p:sp>
-        <p:nvSpPr>
-          <p:cNvPr id="3" name="Subtitle 2">
+              <a:t>Proposal</a:t>
+            </a:r>
+          </a:p>
+        </p:txBody>
+      </p:sp>
+      <p:sp>
+        <p:nvSpPr>
+          <p:cNvPr id="3" name="Content Placeholder 2">
             <a:extLst>
               <a:ext uri="{FF2B5EF4-FFF2-40B4-BE49-F238E27FC236}">
-                <a16:creationId xmlns:a16="http://schemas.microsoft.com/office/drawing/2014/main" id="{BA00FEBA-B494-5046-9CD2-12082358FE92}"/>
+                <a16:creationId xmlns:a16="http://schemas.microsoft.com/office/drawing/2014/main" id="{BF8ADB35-727C-FA84-D081-FB1BC3236E9C}"/>
               </a:ext>
             </a:extLst>
           </p:cNvPr>
@@ -5600,22 +5658,76 @@
             <a:spLocks noGrp="1"/>
           </p:cNvSpPr>
           <p:nvPr>
-            <p:ph type="subTitle" idx="1"/>
-          </p:nvPr>
-        </p:nvSpPr>
-        <p:spPr/>
-        <p:txBody>
-          <a:bodyPr/>
-          <a:lstStyle/>
-          <a:p>
-            <a:endParaRPr lang="en-US"/>
+            <p:ph idx="1"/>
+          </p:nvPr>
+        </p:nvSpPr>
+        <p:spPr>
+          <a:xfrm>
+            <a:off x="1451579" y="1853754"/>
+            <a:ext cx="9603275" cy="4199727"/>
+          </a:xfrm>
+        </p:spPr>
+        <p:txBody>
+          <a:bodyPr/>
+          <a:lstStyle/>
+          <a:p>
+            <a:r>
+              <a:rPr lang="en-US" dirty="0"/>
+              <a:t>The project proposal is simple, almost free marks, and important. </a:t>
+            </a:r>
+          </a:p>
+          <a:p>
+            <a:r>
+              <a:rPr lang="en-US" dirty="0"/>
+              <a:t>You need to write your plan to do the project. </a:t>
+            </a:r>
+          </a:p>
+          <a:p>
+            <a:pPr lvl="1"/>
+            <a:r>
+              <a:rPr lang="en-US" dirty="0"/>
+              <a:t>I’ll look at it to see if it sounds reasonable and doable – I’m mostly checking to raise concerns on what might not work out going forward.</a:t>
+            </a:r>
+          </a:p>
+          <a:p>
+            <a:pPr lvl="1"/>
+            <a:r>
+              <a:rPr lang="en-US" dirty="0"/>
+              <a:t>Much more importantly, you all need to sketch out and agree on a plan. </a:t>
+            </a:r>
+          </a:p>
+          <a:p>
+            <a:r>
+              <a:rPr lang="en-US" dirty="0"/>
+              <a:t>Consider backup for anything you don’t know works. </a:t>
+            </a:r>
+          </a:p>
+          <a:p>
+            <a:pPr lvl="1"/>
+            <a:r>
+              <a:rPr lang="en-US" dirty="0"/>
+              <a:t>If you plan on making/showing X, make sure you can with the data before settling. </a:t>
+            </a:r>
+          </a:p>
+          <a:p>
+            <a:pPr lvl="1"/>
+            <a:r>
+              <a:rPr lang="en-US" dirty="0"/>
+              <a:t>There may be issues with granularity, data types, etc.. That may require work to solve. </a:t>
+            </a:r>
+          </a:p>
+          <a:p>
+            <a:r>
+              <a:rPr lang="en-US" dirty="0"/>
+              <a:t>Better to start with something that’s a bit too broad and trim if everything works. </a:t>
+            </a:r>
           </a:p>
         </p:txBody>
       </p:sp>
     </p:spTree>
     <p:extLst>
       <p:ext uri="{BB962C8B-B14F-4D97-AF65-F5344CB8AC3E}">
-        <p14:creationId xmlns:p14="http://schemas.microsoft.com/office/powerpoint/2010/main" val="3614949151"/>
+        <p14:creationId xmlns:p14="http://schemas.microsoft.com/office/powerpoint/2010/main" val="3325367046"/>
       </p:ext>
     </p:extLst>
   </p:cSld>
@@ -5647,7 +5759,7 @@
           <p:cNvPr id="2" name="Title 1">
             <a:extLst>
               <a:ext uri="{FF2B5EF4-FFF2-40B4-BE49-F238E27FC236}">
-                <a16:creationId xmlns:a16="http://schemas.microsoft.com/office/drawing/2014/main" id="{19192875-568E-E27F-EF8C-0E63853062C2}"/>
+                <a16:creationId xmlns:a16="http://schemas.microsoft.com/office/drawing/2014/main" id="{7918DD57-685F-9106-A246-52DA83E487AF}"/>
               </a:ext>
             </a:extLst>
           </p:cNvPr>
@@ -5665,7 +5777,7 @@
           <a:p>
             <a:r>
               <a:rPr lang="en-US" dirty="0"/>
-              <a:t>Facebook Prophet</a:t>
+              <a:t>ARIMA-d Up</a:t>
             </a:r>
           </a:p>
         </p:txBody>
@@ -5675,7 +5787,7 @@
           <p:cNvPr id="3" name="Content Placeholder 2">
             <a:extLst>
               <a:ext uri="{FF2B5EF4-FFF2-40B4-BE49-F238E27FC236}">
-                <a16:creationId xmlns:a16="http://schemas.microsoft.com/office/drawing/2014/main" id="{BBD86F92-A329-D6B9-24F3-6095A7021DE0}"/>
+                <a16:creationId xmlns:a16="http://schemas.microsoft.com/office/drawing/2014/main" id="{5DFC05F1-1780-38C0-3A3E-8D342C5F1611}"/>
               </a:ext>
             </a:extLst>
           </p:cNvPr>
@@ -5688,8 +5800,8 @@
         </p:nvSpPr>
         <p:spPr>
           <a:xfrm>
-            <a:off x="1451579" y="2015732"/>
-            <a:ext cx="9603275" cy="4037749"/>
+            <a:off x="1451579" y="1853753"/>
+            <a:ext cx="9603275" cy="4199727"/>
           </a:xfrm>
         </p:spPr>
         <p:txBody>
@@ -5700,56 +5812,39 @@
           <a:p>
             <a:r>
               <a:rPr lang="en-US" dirty="0"/>
-              <a:t>Facebook Prophet is a library that is well setup to handle common time-series problems:</a:t>
-            </a:r>
-          </a:p>
-          <a:p>
-            <a:pPr lvl="1"/>
-            <a:r>
-              <a:rPr lang="en-US" dirty="0"/>
-              <a:t>Handles events such as holidays, including custom lists. </a:t>
-            </a:r>
-          </a:p>
-          <a:p>
-            <a:pPr lvl="1"/>
-            <a:r>
-              <a:rPr lang="en-US" dirty="0"/>
-              <a:t>Can be set to anticipate change points, e.g. product launches. </a:t>
-            </a:r>
-          </a:p>
-          <a:p>
-            <a:pPr lvl="1"/>
-            <a:r>
-              <a:rPr lang="en-US" dirty="0"/>
-              <a:t>Provides useful things like plotting and cross validation. </a:t>
-            </a:r>
-          </a:p>
-          <a:p>
-            <a:pPr lvl="1"/>
-            <a:r>
-              <a:rPr lang="en-US" dirty="0"/>
-              <a:t>Can handle additional regressors – more variables. </a:t>
-            </a:r>
-          </a:p>
-          <a:p>
-            <a:pPr lvl="2"/>
-            <a:r>
-              <a:rPr lang="en-US" dirty="0"/>
-              <a:t>E.g. can we predict tomorrows gas price with the past prices, as well as temperature, economic metrics, trade numbers, </a:t>
-            </a:r>
-            <a:r>
-              <a:rPr lang="en-US" dirty="0" err="1"/>
-              <a:t>etc</a:t>
-            </a:r>
-            <a:r>
-              <a:rPr lang="en-US" dirty="0"/>
-              <a:t>…</a:t>
-            </a:r>
-          </a:p>
-          <a:p>
-            <a:r>
-              <a:rPr lang="en-US" dirty="0"/>
-              <a:t>Uses a neural network internally to be very smart and able to capture patterns. </a:t>
+              <a:t>The ARIMA model type is a ‘basic’ one – a more elaborate moving average. </a:t>
+            </a:r>
+          </a:p>
+          <a:p>
+            <a:r>
+              <a:rPr lang="en-US" dirty="0"/>
+              <a:t>Pros:</a:t>
+            </a:r>
+          </a:p>
+          <a:p>
+            <a:pPr lvl="1"/>
+            <a:r>
+              <a:rPr lang="en-US" dirty="0"/>
+              <a:t>Simple, transparent.</a:t>
+            </a:r>
+          </a:p>
+          <a:p>
+            <a:r>
+              <a:rPr lang="en-US" dirty="0"/>
+              <a:t>Cons:</a:t>
+            </a:r>
+          </a:p>
+          <a:p>
+            <a:pPr lvl="1"/>
+            <a:r>
+              <a:rPr lang="en-US" dirty="0"/>
+              <a:t>Potentially too simple, not adaptable to complicated scenarios. </a:t>
+            </a:r>
+          </a:p>
+          <a:p>
+            <a:r>
+              <a:rPr lang="en-US" dirty="0"/>
+              <a:t>Note – these simpler models with more bias error may perform best, the future is hard to predict accurately. Too much ability of the model to adjust predictions may harm us. </a:t>
             </a:r>
           </a:p>
         </p:txBody>
@@ -5757,7 +5852,7 @@
     </p:spTree>
     <p:extLst>
       <p:ext uri="{BB962C8B-B14F-4D97-AF65-F5344CB8AC3E}">
-        <p14:creationId xmlns:p14="http://schemas.microsoft.com/office/powerpoint/2010/main" val="910616763"/>
+        <p14:creationId xmlns:p14="http://schemas.microsoft.com/office/powerpoint/2010/main" val="2830739107"/>
       </p:ext>
     </p:extLst>
   </p:cSld>
@@ -5789,6 +5884,280 @@
           <p:cNvPr id="2" name="Title 1">
             <a:extLst>
               <a:ext uri="{FF2B5EF4-FFF2-40B4-BE49-F238E27FC236}">
+                <a16:creationId xmlns:a16="http://schemas.microsoft.com/office/drawing/2014/main" id="{DA5678F7-635A-D40C-AD90-AAADEA13E967}"/>
+              </a:ext>
+            </a:extLst>
+          </p:cNvPr>
+          <p:cNvSpPr>
+            <a:spLocks noGrp="1"/>
+          </p:cNvSpPr>
+          <p:nvPr>
+            <p:ph type="title"/>
+          </p:nvPr>
+        </p:nvSpPr>
+        <p:spPr/>
+        <p:txBody>
+          <a:bodyPr/>
+          <a:lstStyle/>
+          <a:p>
+            <a:r>
+              <a:rPr lang="en-US" dirty="0"/>
+              <a:t>Smarter Time Models</a:t>
+            </a:r>
+          </a:p>
+        </p:txBody>
+      </p:sp>
+      <p:sp>
+        <p:nvSpPr>
+          <p:cNvPr id="3" name="Content Placeholder 2">
+            <a:extLst>
+              <a:ext uri="{FF2B5EF4-FFF2-40B4-BE49-F238E27FC236}">
+                <a16:creationId xmlns:a16="http://schemas.microsoft.com/office/drawing/2014/main" id="{F23B1FF3-C207-9615-B32A-D907854A0D2F}"/>
+              </a:ext>
+            </a:extLst>
+          </p:cNvPr>
+          <p:cNvSpPr>
+            <a:spLocks noGrp="1"/>
+          </p:cNvSpPr>
+          <p:nvPr>
+            <p:ph idx="1"/>
+          </p:nvPr>
+        </p:nvSpPr>
+        <p:spPr>
+          <a:xfrm>
+            <a:off x="1137146" y="1853754"/>
+            <a:ext cx="10723927" cy="4199727"/>
+          </a:xfrm>
+        </p:spPr>
+        <p:txBody>
+          <a:bodyPr/>
+          <a:lstStyle/>
+          <a:p>
+            <a:r>
+              <a:rPr lang="en-US" dirty="0"/>
+              <a:t>Modern models have much more capability than a simple ARIMA one. </a:t>
+            </a:r>
+          </a:p>
+          <a:p>
+            <a:r>
+              <a:rPr lang="en-US" dirty="0"/>
+              <a:t>Their capacity to learn is much larger - they have more parameters, can learn complex patterns. </a:t>
+            </a:r>
+          </a:p>
+          <a:p>
+            <a:pPr lvl="1"/>
+            <a:r>
+              <a:rPr lang="en-US" dirty="0"/>
+              <a:t>In ds the number of parameters roughly tells us how complicated of a thing can be predicted. </a:t>
+            </a:r>
+          </a:p>
+          <a:p>
+            <a:pPr lvl="1"/>
+            <a:r>
+              <a:rPr lang="en-US" dirty="0"/>
+              <a:t>E.g. image recognition is more complex than predicting the number of each shoe size needed for NIKE. </a:t>
+            </a:r>
+          </a:p>
+          <a:p>
+            <a:pPr lvl="1"/>
+            <a:r>
+              <a:rPr lang="en-US" dirty="0"/>
+              <a:t>“Regular” simple machine learning models may have 5-100 parameters. </a:t>
+            </a:r>
+          </a:p>
+          <a:p>
+            <a:pPr lvl="1"/>
+            <a:r>
+              <a:rPr lang="en-US" dirty="0"/>
+              <a:t>Neural networks (the models that are ‘AI’) will have millions or more. </a:t>
+            </a:r>
+          </a:p>
+          <a:p>
+            <a:pPr lvl="1"/>
+            <a:r>
+              <a:rPr lang="en-US" dirty="0"/>
+              <a:t>Very smart models like ChatGPT have tens or hundreds of billions, rapidly growing. </a:t>
+            </a:r>
+          </a:p>
+        </p:txBody>
+      </p:sp>
+    </p:spTree>
+    <p:extLst>
+      <p:ext uri="{BB962C8B-B14F-4D97-AF65-F5344CB8AC3E}">
+        <p14:creationId xmlns:p14="http://schemas.microsoft.com/office/powerpoint/2010/main" val="2969086212"/>
+      </p:ext>
+    </p:extLst>
+  </p:cSld>
+  <p:clrMapOvr>
+    <a:masterClrMapping/>
+  </p:clrMapOvr>
+</p:sld>
+</file>
+
+<file path=ppt/slides/slide22.xml><?xml version="1.0" encoding="utf-8"?>
+<p:sld xmlns:a="http://schemas.openxmlformats.org/drawingml/2006/main" xmlns:r="http://schemas.openxmlformats.org/officeDocument/2006/relationships" xmlns:p="http://schemas.openxmlformats.org/presentationml/2006/main">
+  <p:cSld>
+    <p:spTree>
+      <p:nvGrpSpPr>
+        <p:cNvPr id="1" name=""/>
+        <p:cNvGrpSpPr/>
+        <p:nvPr/>
+      </p:nvGrpSpPr>
+      <p:grpSpPr>
+        <a:xfrm>
+          <a:off x="0" y="0"/>
+          <a:ext cx="0" cy="0"/>
+          <a:chOff x="0" y="0"/>
+          <a:chExt cx="0" cy="0"/>
+        </a:xfrm>
+      </p:grpSpPr>
+      <p:sp>
+        <p:nvSpPr>
+          <p:cNvPr id="2" name="Title 1">
+            <a:extLst>
+              <a:ext uri="{FF2B5EF4-FFF2-40B4-BE49-F238E27FC236}">
+                <a16:creationId xmlns:a16="http://schemas.microsoft.com/office/drawing/2014/main" id="{19192875-568E-E27F-EF8C-0E63853062C2}"/>
+              </a:ext>
+            </a:extLst>
+          </p:cNvPr>
+          <p:cNvSpPr>
+            <a:spLocks noGrp="1"/>
+          </p:cNvSpPr>
+          <p:nvPr>
+            <p:ph type="title"/>
+          </p:nvPr>
+        </p:nvSpPr>
+        <p:spPr/>
+        <p:txBody>
+          <a:bodyPr/>
+          <a:lstStyle/>
+          <a:p>
+            <a:r>
+              <a:rPr lang="en-US" dirty="0"/>
+              <a:t>Facebook Prophet</a:t>
+            </a:r>
+          </a:p>
+        </p:txBody>
+      </p:sp>
+      <p:sp>
+        <p:nvSpPr>
+          <p:cNvPr id="3" name="Content Placeholder 2">
+            <a:extLst>
+              <a:ext uri="{FF2B5EF4-FFF2-40B4-BE49-F238E27FC236}">
+                <a16:creationId xmlns:a16="http://schemas.microsoft.com/office/drawing/2014/main" id="{BBD86F92-A329-D6B9-24F3-6095A7021DE0}"/>
+              </a:ext>
+            </a:extLst>
+          </p:cNvPr>
+          <p:cNvSpPr>
+            <a:spLocks noGrp="1"/>
+          </p:cNvSpPr>
+          <p:nvPr>
+            <p:ph idx="1"/>
+          </p:nvPr>
+        </p:nvSpPr>
+        <p:spPr>
+          <a:xfrm>
+            <a:off x="1451579" y="2015732"/>
+            <a:ext cx="9603275" cy="4037749"/>
+          </a:xfrm>
+        </p:spPr>
+        <p:txBody>
+          <a:bodyPr>
+            <a:normAutofit/>
+          </a:bodyPr>
+          <a:lstStyle/>
+          <a:p>
+            <a:r>
+              <a:rPr lang="en-US" dirty="0"/>
+              <a:t>Facebook Prophet is a library that is well setup to handle common time-series problems:</a:t>
+            </a:r>
+          </a:p>
+          <a:p>
+            <a:pPr lvl="1"/>
+            <a:r>
+              <a:rPr lang="en-US" dirty="0"/>
+              <a:t>Handles events such as holidays, including custom lists. </a:t>
+            </a:r>
+          </a:p>
+          <a:p>
+            <a:pPr lvl="1"/>
+            <a:r>
+              <a:rPr lang="en-US" dirty="0"/>
+              <a:t>Can be set to anticipate change points, e.g. product launches. </a:t>
+            </a:r>
+          </a:p>
+          <a:p>
+            <a:pPr lvl="1"/>
+            <a:r>
+              <a:rPr lang="en-US" dirty="0"/>
+              <a:t>Provides useful things like plotting and cross validation. </a:t>
+            </a:r>
+          </a:p>
+          <a:p>
+            <a:pPr lvl="1"/>
+            <a:r>
+              <a:rPr lang="en-US" dirty="0"/>
+              <a:t>Can handle additional regressors – more variables. </a:t>
+            </a:r>
+          </a:p>
+          <a:p>
+            <a:pPr lvl="2"/>
+            <a:r>
+              <a:rPr lang="en-US" dirty="0"/>
+              <a:t>E.g. can we predict tomorrows gas price with the past prices, as well as temperature, economic metrics, trade numbers, </a:t>
+            </a:r>
+            <a:r>
+              <a:rPr lang="en-US" dirty="0" err="1"/>
+              <a:t>etc</a:t>
+            </a:r>
+            <a:r>
+              <a:rPr lang="en-US" dirty="0"/>
+              <a:t>…</a:t>
+            </a:r>
+          </a:p>
+          <a:p>
+            <a:r>
+              <a:rPr lang="en-US" dirty="0"/>
+              <a:t>Uses a neural network internally to be very smart and able to capture patterns. </a:t>
+            </a:r>
+          </a:p>
+        </p:txBody>
+      </p:sp>
+    </p:spTree>
+    <p:extLst>
+      <p:ext uri="{BB962C8B-B14F-4D97-AF65-F5344CB8AC3E}">
+        <p14:creationId xmlns:p14="http://schemas.microsoft.com/office/powerpoint/2010/main" val="910616763"/>
+      </p:ext>
+    </p:extLst>
+  </p:cSld>
+  <p:clrMapOvr>
+    <a:masterClrMapping/>
+  </p:clrMapOvr>
+</p:sld>
+</file>
+
+<file path=ppt/slides/slide23.xml><?xml version="1.0" encoding="utf-8"?>
+<p:sld xmlns:a="http://schemas.openxmlformats.org/drawingml/2006/main" xmlns:r="http://schemas.openxmlformats.org/officeDocument/2006/relationships" xmlns:p="http://schemas.openxmlformats.org/presentationml/2006/main">
+  <p:cSld>
+    <p:spTree>
+      <p:nvGrpSpPr>
+        <p:cNvPr id="1" name=""/>
+        <p:cNvGrpSpPr/>
+        <p:nvPr/>
+      </p:nvGrpSpPr>
+      <p:grpSpPr>
+        <a:xfrm>
+          <a:off x="0" y="0"/>
+          <a:ext cx="0" cy="0"/>
+          <a:chOff x="0" y="0"/>
+          <a:chExt cx="0" cy="0"/>
+        </a:xfrm>
+      </p:grpSpPr>
+      <p:sp>
+        <p:nvSpPr>
+          <p:cNvPr id="2" name="Title 1">
+            <a:extLst>
+              <a:ext uri="{FF2B5EF4-FFF2-40B4-BE49-F238E27FC236}">
                 <a16:creationId xmlns:a16="http://schemas.microsoft.com/office/drawing/2014/main" id="{99F908CA-F618-69BD-549B-825B06113F81}"/>
               </a:ext>
             </a:extLst>
@@ -5868,7 +6237,7 @@
 </p:sld>
 </file>
 
-<file path=ppt/slides/slide22.xml><?xml version="1.0" encoding="utf-8"?>
+<file path=ppt/slides/slide24.xml><?xml version="1.0" encoding="utf-8"?>
 <p:sld xmlns:a="http://schemas.openxmlformats.org/drawingml/2006/main" xmlns:r="http://schemas.openxmlformats.org/officeDocument/2006/relationships" xmlns:p="http://schemas.openxmlformats.org/presentationml/2006/main">
   <p:cSld>
     <p:bg>
@@ -6095,7 +6464,7 @@
 </p:sld>
 </file>
 
-<file path=ppt/slides/slide23.xml><?xml version="1.0" encoding="utf-8"?>
+<file path=ppt/slides/slide25.xml><?xml version="1.0" encoding="utf-8"?>
 <p:sld xmlns:a="http://schemas.openxmlformats.org/drawingml/2006/main" xmlns:r="http://schemas.openxmlformats.org/officeDocument/2006/relationships" xmlns:p="http://schemas.openxmlformats.org/presentationml/2006/main">
   <p:cSld>
     <p:spTree>
@@ -6222,7 +6591,7 @@
 </p:sld>
 </file>
 
-<file path=ppt/slides/slide24.xml><?xml version="1.0" encoding="utf-8"?>
+<file path=ppt/slides/slide26.xml><?xml version="1.0" encoding="utf-8"?>
 <p:sld xmlns:a="http://schemas.openxmlformats.org/drawingml/2006/main" xmlns:r="http://schemas.openxmlformats.org/officeDocument/2006/relationships" xmlns:p="http://schemas.openxmlformats.org/presentationml/2006/main">
   <p:cSld>
     <p:spTree>
@@ -6350,6 +6719,479 @@
     <p:extLst>
       <p:ext uri="{BB962C8B-B14F-4D97-AF65-F5344CB8AC3E}">
         <p14:creationId xmlns:p14="http://schemas.microsoft.com/office/powerpoint/2010/main" val="164357066"/>
+      </p:ext>
+    </p:extLst>
+  </p:cSld>
+  <p:clrMapOvr>
+    <a:masterClrMapping/>
+  </p:clrMapOvr>
+</p:sld>
+</file>
+
+<file path=ppt/slides/slide27.xml><?xml version="1.0" encoding="utf-8"?>
+<p:sld xmlns:a="http://schemas.openxmlformats.org/drawingml/2006/main" xmlns:r="http://schemas.openxmlformats.org/officeDocument/2006/relationships" xmlns:p="http://schemas.openxmlformats.org/presentationml/2006/main">
+  <p:cSld>
+    <p:spTree>
+      <p:nvGrpSpPr>
+        <p:cNvPr id="1" name=""/>
+        <p:cNvGrpSpPr/>
+        <p:nvPr/>
+      </p:nvGrpSpPr>
+      <p:grpSpPr>
+        <a:xfrm>
+          <a:off x="0" y="0"/>
+          <a:ext cx="0" cy="0"/>
+          <a:chOff x="0" y="0"/>
+          <a:chExt cx="0" cy="0"/>
+        </a:xfrm>
+      </p:grpSpPr>
+      <p:sp>
+        <p:nvSpPr>
+          <p:cNvPr id="2" name="Title 1">
+            <a:extLst>
+              <a:ext uri="{FF2B5EF4-FFF2-40B4-BE49-F238E27FC236}">
+                <a16:creationId xmlns:a16="http://schemas.microsoft.com/office/drawing/2014/main" id="{421C2F85-D865-4762-C073-D95F5BD52750}"/>
+              </a:ext>
+            </a:extLst>
+          </p:cNvPr>
+          <p:cNvSpPr>
+            <a:spLocks noGrp="1"/>
+          </p:cNvSpPr>
+          <p:nvPr>
+            <p:ph type="title"/>
+          </p:nvPr>
+        </p:nvSpPr>
+        <p:spPr/>
+        <p:txBody>
+          <a:bodyPr/>
+          <a:lstStyle/>
+          <a:p>
+            <a:r>
+              <a:rPr lang="en-US" dirty="0"/>
+              <a:t>Regression</a:t>
+            </a:r>
+          </a:p>
+        </p:txBody>
+      </p:sp>
+      <p:sp>
+        <p:nvSpPr>
+          <p:cNvPr id="3" name="Content Placeholder 2">
+            <a:extLst>
+              <a:ext uri="{FF2B5EF4-FFF2-40B4-BE49-F238E27FC236}">
+                <a16:creationId xmlns:a16="http://schemas.microsoft.com/office/drawing/2014/main" id="{E53ADF10-EA74-AC60-940E-2D988E9A4378}"/>
+              </a:ext>
+            </a:extLst>
+          </p:cNvPr>
+          <p:cNvSpPr>
+            <a:spLocks noGrp="1"/>
+          </p:cNvSpPr>
+          <p:nvPr>
+            <p:ph idx="1"/>
+          </p:nvPr>
+        </p:nvSpPr>
+        <p:spPr/>
+        <p:txBody>
+          <a:bodyPr/>
+          <a:lstStyle/>
+          <a:p>
+            <a:endParaRPr lang="en-US"/>
+          </a:p>
+        </p:txBody>
+      </p:sp>
+    </p:spTree>
+    <p:extLst>
+      <p:ext uri="{BB962C8B-B14F-4D97-AF65-F5344CB8AC3E}">
+        <p14:creationId xmlns:p14="http://schemas.microsoft.com/office/powerpoint/2010/main" val="3094388612"/>
+      </p:ext>
+    </p:extLst>
+  </p:cSld>
+  <p:clrMapOvr>
+    <a:masterClrMapping/>
+  </p:clrMapOvr>
+</p:sld>
+</file>
+
+<file path=ppt/slides/slide28.xml><?xml version="1.0" encoding="utf-8"?>
+<p:sld xmlns:a="http://schemas.openxmlformats.org/drawingml/2006/main" xmlns:r="http://schemas.openxmlformats.org/officeDocument/2006/relationships" xmlns:p="http://schemas.openxmlformats.org/presentationml/2006/main">
+  <p:cSld>
+    <p:spTree>
+      <p:nvGrpSpPr>
+        <p:cNvPr id="1" name=""/>
+        <p:cNvGrpSpPr/>
+        <p:nvPr/>
+      </p:nvGrpSpPr>
+      <p:grpSpPr>
+        <a:xfrm>
+          <a:off x="0" y="0"/>
+          <a:ext cx="0" cy="0"/>
+          <a:chOff x="0" y="0"/>
+          <a:chExt cx="0" cy="0"/>
+        </a:xfrm>
+      </p:grpSpPr>
+      <p:sp>
+        <p:nvSpPr>
+          <p:cNvPr id="2" name="Title 1">
+            <a:extLst>
+              <a:ext uri="{FF2B5EF4-FFF2-40B4-BE49-F238E27FC236}">
+                <a16:creationId xmlns:a16="http://schemas.microsoft.com/office/drawing/2014/main" id="{7C5F4B7F-83E0-B689-9BD9-2744E83CE42E}"/>
+              </a:ext>
+            </a:extLst>
+          </p:cNvPr>
+          <p:cNvSpPr>
+            <a:spLocks noGrp="1"/>
+          </p:cNvSpPr>
+          <p:nvPr>
+            <p:ph type="title"/>
+          </p:nvPr>
+        </p:nvSpPr>
+        <p:spPr/>
+        <p:txBody>
+          <a:bodyPr/>
+          <a:lstStyle/>
+          <a:p>
+            <a:r>
+              <a:rPr lang="en-US" dirty="0"/>
+              <a:t>Prelude – Predictive Model Types</a:t>
+            </a:r>
+          </a:p>
+        </p:txBody>
+      </p:sp>
+      <p:sp>
+        <p:nvSpPr>
+          <p:cNvPr id="3" name="Content Placeholder 2">
+            <a:extLst>
+              <a:ext uri="{FF2B5EF4-FFF2-40B4-BE49-F238E27FC236}">
+                <a16:creationId xmlns:a16="http://schemas.microsoft.com/office/drawing/2014/main" id="{6D63B125-9F59-36CD-4576-CEEBD2B88C68}"/>
+              </a:ext>
+            </a:extLst>
+          </p:cNvPr>
+          <p:cNvSpPr>
+            <a:spLocks noGrp="1"/>
+          </p:cNvSpPr>
+          <p:nvPr>
+            <p:ph idx="1"/>
+          </p:nvPr>
+        </p:nvSpPr>
+        <p:spPr>
+          <a:xfrm>
+            <a:off x="1451579" y="1853754"/>
+            <a:ext cx="9603275" cy="3013294"/>
+          </a:xfrm>
+        </p:spPr>
+        <p:txBody>
+          <a:bodyPr/>
+          <a:lstStyle/>
+          <a:p>
+            <a:r>
+              <a:rPr lang="en-US" dirty="0"/>
+              <a:t>Prior to looking at regression models we much clarify a bit on model types. </a:t>
+            </a:r>
+          </a:p>
+          <a:p>
+            <a:r>
+              <a:rPr lang="en-US" dirty="0"/>
+              <a:t>There are several categories of predictive models, the most common are:</a:t>
+            </a:r>
+          </a:p>
+          <a:p>
+            <a:pPr lvl="1"/>
+            <a:r>
+              <a:rPr lang="en-US" dirty="0"/>
+              <a:t>Regression – predicting a value. </a:t>
+            </a:r>
+          </a:p>
+          <a:p>
+            <a:pPr lvl="1"/>
+            <a:r>
+              <a:rPr lang="en-US" dirty="0"/>
+              <a:t>Classification – predicting a class (like True/False). </a:t>
+            </a:r>
+          </a:p>
+          <a:p>
+            <a:r>
+              <a:rPr lang="en-US" dirty="0"/>
+              <a:t>Our tableau stuff does regression. </a:t>
+            </a:r>
+          </a:p>
+          <a:p>
+            <a:r>
+              <a:rPr lang="en-US" dirty="0"/>
+              <a:t>Classification is almost identical from our perspective, only result is different. </a:t>
+            </a:r>
+          </a:p>
+        </p:txBody>
+      </p:sp>
+      <p:pic>
+        <p:nvPicPr>
+          <p:cNvPr id="3074" name="Picture 2" descr="Regression vs Classification in Machine Learning: What's the Difference? |  by TheDataScientistKiran | Python in Plain English">
+            <a:extLst>
+              <a:ext uri="{FF2B5EF4-FFF2-40B4-BE49-F238E27FC236}">
+                <a16:creationId xmlns:a16="http://schemas.microsoft.com/office/drawing/2014/main" id="{6BA1CEAB-1C3A-5CAE-8D3E-01C30049A694}"/>
+              </a:ext>
+            </a:extLst>
+          </p:cNvPr>
+          <p:cNvPicPr>
+            <a:picLocks noChangeAspect="1" noChangeArrowheads="1"/>
+          </p:cNvPicPr>
+          <p:nvPr/>
+        </p:nvPicPr>
+        <p:blipFill>
+          <a:blip r:embed="rId2">
+            <a:extLst>
+              <a:ext uri="{28A0092B-C50C-407E-A947-70E740481C1C}">
+                <a14:useLocalDpi xmlns:a14="http://schemas.microsoft.com/office/drawing/2010/main" val="0"/>
+              </a:ext>
+            </a:extLst>
+          </a:blip>
+          <a:srcRect/>
+          <a:stretch>
+            <a:fillRect/>
+          </a:stretch>
+        </p:blipFill>
+        <p:spPr bwMode="auto">
+          <a:xfrm>
+            <a:off x="3175734" y="4867048"/>
+            <a:ext cx="5840531" cy="1990952"/>
+          </a:xfrm>
+          <a:prstGeom prst="rect">
+            <a:avLst/>
+          </a:prstGeom>
+          <a:noFill/>
+          <a:extLst>
+            <a:ext uri="{909E8E84-426E-40DD-AFC4-6F175D3DCCD1}">
+              <a14:hiddenFill xmlns:a14="http://schemas.microsoft.com/office/drawing/2010/main">
+                <a:solidFill>
+                  <a:srgbClr val="FFFFFF"/>
+                </a:solidFill>
+              </a14:hiddenFill>
+            </a:ext>
+          </a:extLst>
+        </p:spPr>
+      </p:pic>
+    </p:spTree>
+    <p:extLst>
+      <p:ext uri="{BB962C8B-B14F-4D97-AF65-F5344CB8AC3E}">
+        <p14:creationId xmlns:p14="http://schemas.microsoft.com/office/powerpoint/2010/main" val="2972796336"/>
+      </p:ext>
+    </p:extLst>
+  </p:cSld>
+  <p:clrMapOvr>
+    <a:masterClrMapping/>
+  </p:clrMapOvr>
+</p:sld>
+</file>
+
+<file path=ppt/slides/slide29.xml><?xml version="1.0" encoding="utf-8"?>
+<p:sld xmlns:a="http://schemas.openxmlformats.org/drawingml/2006/main" xmlns:r="http://schemas.openxmlformats.org/officeDocument/2006/relationships" xmlns:p="http://schemas.openxmlformats.org/presentationml/2006/main">
+  <p:cSld>
+    <p:spTree>
+      <p:nvGrpSpPr>
+        <p:cNvPr id="1" name=""/>
+        <p:cNvGrpSpPr/>
+        <p:nvPr/>
+      </p:nvGrpSpPr>
+      <p:grpSpPr>
+        <a:xfrm>
+          <a:off x="0" y="0"/>
+          <a:ext cx="0" cy="0"/>
+          <a:chOff x="0" y="0"/>
+          <a:chExt cx="0" cy="0"/>
+        </a:xfrm>
+      </p:grpSpPr>
+      <p:sp>
+        <p:nvSpPr>
+          <p:cNvPr id="2" name="Title 1">
+            <a:extLst>
+              <a:ext uri="{FF2B5EF4-FFF2-40B4-BE49-F238E27FC236}">
+                <a16:creationId xmlns:a16="http://schemas.microsoft.com/office/drawing/2014/main" id="{726241CB-23C4-DD04-DAFB-6EA582DBDB11}"/>
+              </a:ext>
+            </a:extLst>
+          </p:cNvPr>
+          <p:cNvSpPr>
+            <a:spLocks noGrp="1"/>
+          </p:cNvSpPr>
+          <p:nvPr>
+            <p:ph type="title"/>
+          </p:nvPr>
+        </p:nvSpPr>
+        <p:spPr/>
+        <p:txBody>
+          <a:bodyPr/>
+          <a:lstStyle/>
+          <a:p>
+            <a:r>
+              <a:rPr lang="en-US" dirty="0"/>
+              <a:t>Regression Models</a:t>
+            </a:r>
+          </a:p>
+        </p:txBody>
+      </p:sp>
+      <p:sp>
+        <p:nvSpPr>
+          <p:cNvPr id="3" name="Content Placeholder 2">
+            <a:extLst>
+              <a:ext uri="{FF2B5EF4-FFF2-40B4-BE49-F238E27FC236}">
+                <a16:creationId xmlns:a16="http://schemas.microsoft.com/office/drawing/2014/main" id="{F11DB32E-9528-38D5-7890-6A8EAC9B65C1}"/>
+              </a:ext>
+            </a:extLst>
+          </p:cNvPr>
+          <p:cNvSpPr>
+            <a:spLocks noGrp="1"/>
+          </p:cNvSpPr>
+          <p:nvPr>
+            <p:ph idx="1"/>
+          </p:nvPr>
+        </p:nvSpPr>
+        <p:spPr>
+          <a:xfrm>
+            <a:off x="424543" y="1853754"/>
+            <a:ext cx="5671457" cy="4199727"/>
+          </a:xfrm>
+        </p:spPr>
+        <p:txBody>
+          <a:bodyPr/>
+          <a:lstStyle/>
+          <a:p>
+            <a:r>
+              <a:rPr lang="en-US" dirty="0"/>
+              <a:t>Regression models are something you’ve seen before – lines of best fit. </a:t>
+            </a:r>
+          </a:p>
+          <a:p>
+            <a:r>
+              <a:rPr lang="en-US" dirty="0"/>
+              <a:t>A regression model:</a:t>
+            </a:r>
+          </a:p>
+          <a:p>
+            <a:pPr lvl="1"/>
+            <a:r>
+              <a:rPr lang="en-US" dirty="0"/>
+              <a:t>Allows us to predict Y given X(s). </a:t>
+            </a:r>
+          </a:p>
+          <a:p>
+            <a:pPr lvl="1"/>
+            <a:r>
+              <a:rPr lang="en-US" dirty="0"/>
+              <a:t>Is a linear equation – y = </a:t>
+            </a:r>
+            <a:r>
+              <a:rPr lang="en-US" dirty="0" err="1"/>
+              <a:t>mx+b</a:t>
+            </a:r>
+            <a:r>
+              <a:rPr lang="en-US" dirty="0"/>
+              <a:t>. </a:t>
+            </a:r>
+          </a:p>
+          <a:p>
+            <a:pPr lvl="1"/>
+            <a:r>
+              <a:rPr lang="en-US" dirty="0"/>
+              <a:t>The line is down the ‘middle’ of the data.</a:t>
+            </a:r>
+          </a:p>
+          <a:p>
+            <a:r>
+              <a:rPr lang="en-US" dirty="0"/>
+              <a:t>The ML model </a:t>
+            </a:r>
+            <a:r>
+              <a:rPr lang="en-US" i="1" dirty="0"/>
+              <a:t>is</a:t>
+            </a:r>
+            <a:r>
+              <a:rPr lang="en-US" dirty="0"/>
+              <a:t> the equation.  </a:t>
+            </a:r>
+          </a:p>
+          <a:p>
+            <a:pPr lvl="1"/>
+            <a:r>
+              <a:rPr lang="en-US" dirty="0"/>
+              <a:t>M and b are learned by the algorithm.</a:t>
+            </a:r>
+          </a:p>
+          <a:p>
+            <a:pPr lvl="1"/>
+            <a:r>
+              <a:rPr lang="en-US" dirty="0"/>
+              <a:t>We can insert any x ang get predicted y.</a:t>
+            </a:r>
+          </a:p>
+          <a:p>
+            <a:pPr lvl="1"/>
+            <a:r>
+              <a:rPr lang="en-US" dirty="0"/>
+              <a:t>We can have many </a:t>
+            </a:r>
+            <a:r>
+              <a:rPr lang="en-US" dirty="0" err="1"/>
+              <a:t>Xs</a:t>
+            </a:r>
+            <a:r>
+              <a:rPr lang="en-US" dirty="0"/>
+              <a:t>, add more terms. </a:t>
+            </a:r>
+          </a:p>
+          <a:p>
+            <a:pPr lvl="1"/>
+            <a:endParaRPr lang="en-US" dirty="0"/>
+          </a:p>
+        </p:txBody>
+      </p:sp>
+      <p:pic>
+        <p:nvPicPr>
+          <p:cNvPr id="1026" name="Picture 2" descr="What Is Linear Regression in Machine Learning? | Grammarly">
+            <a:extLst>
+              <a:ext uri="{FF2B5EF4-FFF2-40B4-BE49-F238E27FC236}">
+                <a16:creationId xmlns:a16="http://schemas.microsoft.com/office/drawing/2014/main" id="{4A4EB581-5301-7555-FEBE-647AB305C099}"/>
+              </a:ext>
+            </a:extLst>
+          </p:cNvPr>
+          <p:cNvPicPr>
+            <a:picLocks noChangeAspect="1" noChangeArrowheads="1"/>
+          </p:cNvPicPr>
+          <p:nvPr/>
+        </p:nvPicPr>
+        <p:blipFill rotWithShape="1">
+          <a:blip r:embed="rId2">
+            <a:extLst>
+              <a:ext uri="{28A0092B-C50C-407E-A947-70E740481C1C}">
+                <a14:useLocalDpi xmlns:a14="http://schemas.microsoft.com/office/drawing/2010/main" val="0"/>
+              </a:ext>
+            </a:extLst>
+          </a:blip>
+          <a:srcRect l="8036" t="13006" r="8482" b="12143"/>
+          <a:stretch>
+            <a:fillRect/>
+          </a:stretch>
+        </p:blipFill>
+        <p:spPr bwMode="auto">
+          <a:xfrm>
+            <a:off x="6096000" y="2283866"/>
+            <a:ext cx="6096000" cy="2914344"/>
+          </a:xfrm>
+          <a:prstGeom prst="rect">
+            <a:avLst/>
+          </a:prstGeom>
+          <a:noFill/>
+          <a:extLst>
+            <a:ext uri="{909E8E84-426E-40DD-AFC4-6F175D3DCCD1}">
+              <a14:hiddenFill xmlns:a14="http://schemas.microsoft.com/office/drawing/2010/main">
+                <a:solidFill>
+                  <a:srgbClr val="FFFFFF"/>
+                </a:solidFill>
+              </a14:hiddenFill>
+            </a:ext>
+          </a:extLst>
+        </p:spPr>
+      </p:pic>
+    </p:spTree>
+    <p:extLst>
+      <p:ext uri="{BB962C8B-B14F-4D97-AF65-F5344CB8AC3E}">
+        <p14:creationId xmlns:p14="http://schemas.microsoft.com/office/powerpoint/2010/main" val="2728998920"/>
       </p:ext>
     </p:extLst>
   </p:cSld>
@@ -6381,6 +7223,1994 @@
           <p:cNvPr id="2" name="Title 1">
             <a:extLst>
               <a:ext uri="{FF2B5EF4-FFF2-40B4-BE49-F238E27FC236}">
+                <a16:creationId xmlns:a16="http://schemas.microsoft.com/office/drawing/2014/main" id="{AF1403F0-2E6F-69D3-4864-A86EF4E42364}"/>
+              </a:ext>
+            </a:extLst>
+          </p:cNvPr>
+          <p:cNvSpPr>
+            <a:spLocks noGrp="1"/>
+          </p:cNvSpPr>
+          <p:nvPr>
+            <p:ph type="title"/>
+          </p:nvPr>
+        </p:nvSpPr>
+        <p:spPr/>
+        <p:txBody>
+          <a:bodyPr/>
+          <a:lstStyle/>
+          <a:p>
+            <a:r>
+              <a:rPr lang="en-US" dirty="0"/>
+              <a:t>More Project Details</a:t>
+            </a:r>
+          </a:p>
+        </p:txBody>
+      </p:sp>
+      <p:sp>
+        <p:nvSpPr>
+          <p:cNvPr id="3" name="Content Placeholder 2">
+            <a:extLst>
+              <a:ext uri="{FF2B5EF4-FFF2-40B4-BE49-F238E27FC236}">
+                <a16:creationId xmlns:a16="http://schemas.microsoft.com/office/drawing/2014/main" id="{7C2E0A1A-65EE-AC03-68D1-349619DDCB80}"/>
+              </a:ext>
+            </a:extLst>
+          </p:cNvPr>
+          <p:cNvSpPr>
+            <a:spLocks noGrp="1"/>
+          </p:cNvSpPr>
+          <p:nvPr>
+            <p:ph idx="1"/>
+          </p:nvPr>
+        </p:nvSpPr>
+        <p:spPr>
+          <a:xfrm>
+            <a:off x="1451579" y="1853754"/>
+            <a:ext cx="9603275" cy="4272726"/>
+          </a:xfrm>
+        </p:spPr>
+        <p:txBody>
+          <a:bodyPr>
+            <a:normAutofit lnSpcReduction="10000"/>
+          </a:bodyPr>
+          <a:lstStyle/>
+          <a:p>
+            <a:r>
+              <a:rPr lang="en-US" dirty="0"/>
+              <a:t>There’s a document on Brightspace with some tips on sharing work. </a:t>
+            </a:r>
+          </a:p>
+          <a:p>
+            <a:pPr lvl="1"/>
+            <a:r>
+              <a:rPr lang="en-US" dirty="0"/>
+              <a:t>It isn’t as simple as a google doc or something. </a:t>
+            </a:r>
+          </a:p>
+          <a:p>
+            <a:pPr lvl="1"/>
+            <a:r>
+              <a:rPr lang="en-US" dirty="0"/>
+              <a:t>Easiest is to setup a starting point with all data added, then each person builds their own sheets from that shared starting point. </a:t>
+            </a:r>
+          </a:p>
+          <a:p>
+            <a:pPr lvl="1"/>
+            <a:r>
+              <a:rPr lang="en-US" dirty="0"/>
+              <a:t>At the end someone will need to manually combine the workbooks into one, not super hard, but takes a bit of time as you’ll need to do final layout and such. </a:t>
+            </a:r>
+          </a:p>
+          <a:p>
+            <a:r>
+              <a:rPr lang="en-US" dirty="0"/>
+              <a:t>I can’t ever emphasize how much easier this is if you do stuff early. </a:t>
+            </a:r>
+          </a:p>
+          <a:p>
+            <a:r>
+              <a:rPr lang="en-US" dirty="0"/>
+              <a:t>Remember, you need to communicate something with this visualization. </a:t>
+            </a:r>
+          </a:p>
+          <a:p>
+            <a:pPr lvl="1"/>
+            <a:r>
+              <a:rPr lang="en-US" dirty="0"/>
+              <a:t>There should be some thesis like statement – this story shows/explains this stuff….</a:t>
+            </a:r>
+          </a:p>
+          <a:p>
+            <a:pPr lvl="1"/>
+            <a:r>
+              <a:rPr lang="en-US" dirty="0"/>
+              <a:t>There are multiple aspects that you’ll need to cover, that takes time to organize. </a:t>
+            </a:r>
+          </a:p>
+          <a:p>
+            <a:pPr lvl="1"/>
+            <a:r>
+              <a:rPr lang="en-US" dirty="0"/>
+              <a:t>Refer to the storytelling techniques and visual vocabulary for starting points. </a:t>
+            </a:r>
+          </a:p>
+        </p:txBody>
+      </p:sp>
+    </p:spTree>
+    <p:extLst>
+      <p:ext uri="{BB962C8B-B14F-4D97-AF65-F5344CB8AC3E}">
+        <p14:creationId xmlns:p14="http://schemas.microsoft.com/office/powerpoint/2010/main" val="2334346036"/>
+      </p:ext>
+    </p:extLst>
+  </p:cSld>
+  <p:clrMapOvr>
+    <a:masterClrMapping/>
+  </p:clrMapOvr>
+</p:sld>
+</file>
+
+<file path=ppt/slides/slide30.xml><?xml version="1.0" encoding="utf-8"?>
+<p:sld xmlns:a="http://schemas.openxmlformats.org/drawingml/2006/main" xmlns:r="http://schemas.openxmlformats.org/officeDocument/2006/relationships" xmlns:p="http://schemas.openxmlformats.org/presentationml/2006/main">
+  <p:cSld>
+    <p:spTree>
+      <p:nvGrpSpPr>
+        <p:cNvPr id="1" name=""/>
+        <p:cNvGrpSpPr/>
+        <p:nvPr/>
+      </p:nvGrpSpPr>
+      <p:grpSpPr>
+        <a:xfrm>
+          <a:off x="0" y="0"/>
+          <a:ext cx="0" cy="0"/>
+          <a:chOff x="0" y="0"/>
+          <a:chExt cx="0" cy="0"/>
+        </a:xfrm>
+      </p:grpSpPr>
+      <p:sp>
+        <p:nvSpPr>
+          <p:cNvPr id="2" name="Title 1">
+            <a:extLst>
+              <a:ext uri="{FF2B5EF4-FFF2-40B4-BE49-F238E27FC236}">
+                <a16:creationId xmlns:a16="http://schemas.microsoft.com/office/drawing/2014/main" id="{5C6FDBFD-6657-3E66-0096-79B58109883D}"/>
+              </a:ext>
+            </a:extLst>
+          </p:cNvPr>
+          <p:cNvSpPr>
+            <a:spLocks noGrp="1"/>
+          </p:cNvSpPr>
+          <p:nvPr>
+            <p:ph type="title"/>
+          </p:nvPr>
+        </p:nvSpPr>
+        <p:spPr>
+          <a:xfrm>
+            <a:off x="1" y="804519"/>
+            <a:ext cx="11054854" cy="1049235"/>
+          </a:xfrm>
+        </p:spPr>
+        <p:txBody>
+          <a:bodyPr/>
+          <a:lstStyle/>
+          <a:p>
+            <a:r>
+              <a:rPr lang="en-US" dirty="0"/>
+              <a:t>How is a Regression Model Made</a:t>
+            </a:r>
+          </a:p>
+        </p:txBody>
+      </p:sp>
+      <p:sp>
+        <p:nvSpPr>
+          <p:cNvPr id="3" name="Content Placeholder 2">
+            <a:extLst>
+              <a:ext uri="{FF2B5EF4-FFF2-40B4-BE49-F238E27FC236}">
+                <a16:creationId xmlns:a16="http://schemas.microsoft.com/office/drawing/2014/main" id="{446FE12C-7E1A-56DD-899E-0176F539C03C}"/>
+              </a:ext>
+            </a:extLst>
+          </p:cNvPr>
+          <p:cNvSpPr>
+            <a:spLocks noGrp="1"/>
+          </p:cNvSpPr>
+          <p:nvPr>
+            <p:ph idx="1"/>
+          </p:nvPr>
+        </p:nvSpPr>
+        <p:spPr>
+          <a:xfrm>
+            <a:off x="1451579" y="2015732"/>
+            <a:ext cx="9603275" cy="4037749"/>
+          </a:xfrm>
+        </p:spPr>
+        <p:txBody>
+          <a:bodyPr/>
+          <a:lstStyle/>
+          <a:p>
+            <a:r>
+              <a:rPr lang="en-US" dirty="0"/>
+              <a:t>Regression models are computed for us by the machine. </a:t>
+            </a:r>
+          </a:p>
+          <a:p>
+            <a:pPr lvl="1"/>
+            <a:r>
+              <a:rPr lang="en-US" dirty="0"/>
+              <a:t>We provide old data, the computer uses that to learn the pattern. </a:t>
+            </a:r>
+          </a:p>
+          <a:p>
+            <a:pPr lvl="1"/>
+            <a:r>
+              <a:rPr lang="en-US" dirty="0"/>
+              <a:t>In linear regression, the slope and intercept are calculated. </a:t>
+            </a:r>
+          </a:p>
+          <a:p>
+            <a:pPr lvl="1"/>
+            <a:r>
+              <a:rPr lang="en-US" dirty="0"/>
+              <a:t>Different types of models do the same thing, with different math. </a:t>
+            </a:r>
+          </a:p>
+          <a:p>
+            <a:r>
+              <a:rPr lang="en-US" dirty="0"/>
+              <a:t>The model is just a thing that transforms input to output. </a:t>
+            </a:r>
+          </a:p>
+          <a:p>
+            <a:pPr lvl="1"/>
+            <a:r>
+              <a:rPr lang="en-US" dirty="0"/>
+              <a:t>We can make different models and compare them to decide which is best. </a:t>
+            </a:r>
+          </a:p>
+          <a:p>
+            <a:r>
+              <a:rPr lang="en-US" dirty="0"/>
+              <a:t>Key – we don’t tell the computer how to predict Y from X, it finds it. </a:t>
+            </a:r>
+          </a:p>
+          <a:p>
+            <a:pPr lvl="1"/>
+            <a:r>
+              <a:rPr lang="en-US" dirty="0"/>
+              <a:t>Computers are able to pick up on very subtle patterns. </a:t>
+            </a:r>
+          </a:p>
+          <a:p>
+            <a:pPr lvl="1"/>
+            <a:r>
+              <a:rPr lang="en-US" dirty="0"/>
+              <a:t>If we have lots of data, this can be quite smart and accurate. </a:t>
+            </a:r>
+          </a:p>
+          <a:p>
+            <a:pPr lvl="1"/>
+            <a:endParaRPr lang="en-US" dirty="0"/>
+          </a:p>
+        </p:txBody>
+      </p:sp>
+      <p:pic>
+        <p:nvPicPr>
+          <p:cNvPr id="2050" name="Picture 2" descr="Black Box Testing - Software Engineering - GeeksforGeeks">
+            <a:extLst>
+              <a:ext uri="{FF2B5EF4-FFF2-40B4-BE49-F238E27FC236}">
+                <a16:creationId xmlns:a16="http://schemas.microsoft.com/office/drawing/2014/main" id="{72929DF0-2B9F-1DD5-C17A-26C96D0A540E}"/>
+              </a:ext>
+            </a:extLst>
+          </p:cNvPr>
+          <p:cNvPicPr>
+            <a:picLocks noChangeAspect="1" noChangeArrowheads="1"/>
+          </p:cNvPicPr>
+          <p:nvPr/>
+        </p:nvPicPr>
+        <p:blipFill rotWithShape="1">
+          <a:blip r:embed="rId2">
+            <a:extLst>
+              <a:ext uri="{28A0092B-C50C-407E-A947-70E740481C1C}">
+                <a14:useLocalDpi xmlns:a14="http://schemas.microsoft.com/office/drawing/2010/main" val="0"/>
+              </a:ext>
+            </a:extLst>
+          </a:blip>
+          <a:srcRect l="6509" t="31410" r="6179" b="16960"/>
+          <a:stretch>
+            <a:fillRect/>
+          </a:stretch>
+        </p:blipFill>
+        <p:spPr bwMode="auto">
+          <a:xfrm>
+            <a:off x="7039154" y="421481"/>
+            <a:ext cx="5152845" cy="1432273"/>
+          </a:xfrm>
+          <a:prstGeom prst="rect">
+            <a:avLst/>
+          </a:prstGeom>
+          <a:noFill/>
+          <a:extLst>
+            <a:ext uri="{909E8E84-426E-40DD-AFC4-6F175D3DCCD1}">
+              <a14:hiddenFill xmlns:a14="http://schemas.microsoft.com/office/drawing/2010/main">
+                <a:solidFill>
+                  <a:srgbClr val="FFFFFF"/>
+                </a:solidFill>
+              </a14:hiddenFill>
+            </a:ext>
+          </a:extLst>
+        </p:spPr>
+      </p:pic>
+    </p:spTree>
+    <p:extLst>
+      <p:ext uri="{BB962C8B-B14F-4D97-AF65-F5344CB8AC3E}">
+        <p14:creationId xmlns:p14="http://schemas.microsoft.com/office/powerpoint/2010/main" val="161210730"/>
+      </p:ext>
+    </p:extLst>
+  </p:cSld>
+  <p:clrMapOvr>
+    <a:masterClrMapping/>
+  </p:clrMapOvr>
+</p:sld>
+</file>
+
+<file path=ppt/slides/slide31.xml><?xml version="1.0" encoding="utf-8"?>
+<p:sld xmlns:a="http://schemas.openxmlformats.org/drawingml/2006/main" xmlns:r="http://schemas.openxmlformats.org/officeDocument/2006/relationships" xmlns:p="http://schemas.openxmlformats.org/presentationml/2006/main">
+  <p:cSld>
+    <p:spTree>
+      <p:nvGrpSpPr>
+        <p:cNvPr id="1" name=""/>
+        <p:cNvGrpSpPr/>
+        <p:nvPr/>
+      </p:nvGrpSpPr>
+      <p:grpSpPr>
+        <a:xfrm>
+          <a:off x="0" y="0"/>
+          <a:ext cx="0" cy="0"/>
+          <a:chOff x="0" y="0"/>
+          <a:chExt cx="0" cy="0"/>
+        </a:xfrm>
+      </p:grpSpPr>
+      <p:sp>
+        <p:nvSpPr>
+          <p:cNvPr id="2" name="Title 1">
+            <a:extLst>
+              <a:ext uri="{FF2B5EF4-FFF2-40B4-BE49-F238E27FC236}">
+                <a16:creationId xmlns:a16="http://schemas.microsoft.com/office/drawing/2014/main" id="{29939436-0B9B-9E51-A316-C02EF3D3F4E0}"/>
+              </a:ext>
+            </a:extLst>
+          </p:cNvPr>
+          <p:cNvSpPr>
+            <a:spLocks noGrp="1"/>
+          </p:cNvSpPr>
+          <p:nvPr>
+            <p:ph type="title"/>
+          </p:nvPr>
+        </p:nvSpPr>
+        <p:spPr/>
+        <p:txBody>
+          <a:bodyPr/>
+          <a:lstStyle/>
+          <a:p>
+            <a:r>
+              <a:rPr lang="en-US" dirty="0"/>
+              <a:t>Real Life example – Bank Loans. </a:t>
+            </a:r>
+          </a:p>
+        </p:txBody>
+      </p:sp>
+      <p:sp>
+        <p:nvSpPr>
+          <p:cNvPr id="3" name="Content Placeholder 2">
+            <a:extLst>
+              <a:ext uri="{FF2B5EF4-FFF2-40B4-BE49-F238E27FC236}">
+                <a16:creationId xmlns:a16="http://schemas.microsoft.com/office/drawing/2014/main" id="{44A91243-65A2-B7DE-611F-D1E424943027}"/>
+              </a:ext>
+            </a:extLst>
+          </p:cNvPr>
+          <p:cNvSpPr>
+            <a:spLocks noGrp="1"/>
+          </p:cNvSpPr>
+          <p:nvPr>
+            <p:ph idx="1"/>
+          </p:nvPr>
+        </p:nvSpPr>
+        <p:spPr>
+          <a:xfrm>
+            <a:off x="1451579" y="1853754"/>
+            <a:ext cx="9780013" cy="4271001"/>
+          </a:xfrm>
+        </p:spPr>
+        <p:txBody>
+          <a:bodyPr/>
+          <a:lstStyle/>
+          <a:p>
+            <a:r>
+              <a:rPr lang="en-US" dirty="0"/>
+              <a:t>To get a loan at a bank you fill out information (income, age, job, loan amt </a:t>
+            </a:r>
+            <a:r>
+              <a:rPr lang="en-US" dirty="0" err="1"/>
+              <a:t>etc</a:t>
+            </a:r>
+            <a:r>
+              <a:rPr lang="en-US" dirty="0"/>
+              <a:t>…), more info (e.g. credit score) is gathered by the bank, and these are the inputs to decide. </a:t>
+            </a:r>
+          </a:p>
+          <a:p>
+            <a:r>
+              <a:rPr lang="en-US" dirty="0"/>
+              <a:t>Traditionally, this goes to an underwriter (person who evaluates loan risk). </a:t>
+            </a:r>
+          </a:p>
+          <a:p>
+            <a:pPr lvl="1"/>
+            <a:r>
+              <a:rPr lang="en-US" dirty="0"/>
+              <a:t>They make a decision on approval and/or interest rate based on many rules. </a:t>
+            </a:r>
+          </a:p>
+          <a:p>
+            <a:pPr lvl="1"/>
+            <a:r>
+              <a:rPr lang="en-US" dirty="0"/>
+              <a:t>If income is +/-, credit score is +/-, savings amounts….</a:t>
+            </a:r>
+          </a:p>
+          <a:p>
+            <a:pPr lvl="1"/>
+            <a:r>
+              <a:rPr lang="en-US" dirty="0"/>
+              <a:t>It is basically a flow chart of decisions to slot you into a category – how risky are you. </a:t>
+            </a:r>
+          </a:p>
+          <a:p>
+            <a:r>
+              <a:rPr lang="en-US" dirty="0"/>
+              <a:t>The rules used to decide are made by experts, based on experience. </a:t>
+            </a:r>
+          </a:p>
+          <a:p>
+            <a:pPr lvl="1"/>
+            <a:r>
+              <a:rPr lang="en-US" dirty="0"/>
+              <a:t>From all the past loans we gave, what happened? Who paid, who defaulted, what are their stats.</a:t>
+            </a:r>
+          </a:p>
+          <a:p>
+            <a:pPr lvl="1"/>
+            <a:r>
+              <a:rPr lang="en-US" dirty="0"/>
+              <a:t>Experts basically translate history and expectations into a model – inputs to output. </a:t>
+            </a:r>
+          </a:p>
+          <a:p>
+            <a:pPr lvl="1"/>
+            <a:r>
+              <a:rPr lang="en-US" dirty="0"/>
+              <a:t>They need to know/identify what’s associated with good/bad loans. </a:t>
+            </a:r>
+          </a:p>
+        </p:txBody>
+      </p:sp>
+    </p:spTree>
+    <p:extLst>
+      <p:ext uri="{BB962C8B-B14F-4D97-AF65-F5344CB8AC3E}">
+        <p14:creationId xmlns:p14="http://schemas.microsoft.com/office/powerpoint/2010/main" val="1485589604"/>
+      </p:ext>
+    </p:extLst>
+  </p:cSld>
+  <p:clrMapOvr>
+    <a:masterClrMapping/>
+  </p:clrMapOvr>
+</p:sld>
+</file>
+
+<file path=ppt/slides/slide32.xml><?xml version="1.0" encoding="utf-8"?>
+<p:sld xmlns:a="http://schemas.openxmlformats.org/drawingml/2006/main" xmlns:r="http://schemas.openxmlformats.org/officeDocument/2006/relationships" xmlns:p="http://schemas.openxmlformats.org/presentationml/2006/main">
+  <p:cSld>
+    <p:spTree>
+      <p:nvGrpSpPr>
+        <p:cNvPr id="1" name=""/>
+        <p:cNvGrpSpPr/>
+        <p:nvPr/>
+      </p:nvGrpSpPr>
+      <p:grpSpPr>
+        <a:xfrm>
+          <a:off x="0" y="0"/>
+          <a:ext cx="0" cy="0"/>
+          <a:chOff x="0" y="0"/>
+          <a:chExt cx="0" cy="0"/>
+        </a:xfrm>
+      </p:grpSpPr>
+      <p:sp>
+        <p:nvSpPr>
+          <p:cNvPr id="2" name="Title 1">
+            <a:extLst>
+              <a:ext uri="{FF2B5EF4-FFF2-40B4-BE49-F238E27FC236}">
+                <a16:creationId xmlns:a16="http://schemas.microsoft.com/office/drawing/2014/main" id="{EEB6481B-7DAE-6FF7-16A5-4FEB89D47E1E}"/>
+              </a:ext>
+            </a:extLst>
+          </p:cNvPr>
+          <p:cNvSpPr>
+            <a:spLocks noGrp="1"/>
+          </p:cNvSpPr>
+          <p:nvPr>
+            <p:ph type="title"/>
+          </p:nvPr>
+        </p:nvSpPr>
+        <p:spPr/>
+        <p:txBody>
+          <a:bodyPr/>
+          <a:lstStyle/>
+          <a:p>
+            <a:r>
+              <a:rPr lang="en-US" dirty="0"/>
+              <a:t>But What if A machine Could do that? </a:t>
+            </a:r>
+          </a:p>
+        </p:txBody>
+      </p:sp>
+      <p:sp>
+        <p:nvSpPr>
+          <p:cNvPr id="3" name="Content Placeholder 2">
+            <a:extLst>
+              <a:ext uri="{FF2B5EF4-FFF2-40B4-BE49-F238E27FC236}">
+                <a16:creationId xmlns:a16="http://schemas.microsoft.com/office/drawing/2014/main" id="{8FC26969-26CE-A982-54F2-C5633C7F1FD6}"/>
+              </a:ext>
+            </a:extLst>
+          </p:cNvPr>
+          <p:cNvSpPr>
+            <a:spLocks noGrp="1"/>
+          </p:cNvSpPr>
+          <p:nvPr>
+            <p:ph idx="1"/>
+          </p:nvPr>
+        </p:nvSpPr>
+        <p:spPr>
+          <a:xfrm>
+            <a:off x="1451579" y="1853754"/>
+            <a:ext cx="9603275" cy="4199727"/>
+          </a:xfrm>
+        </p:spPr>
+        <p:txBody>
+          <a:bodyPr>
+            <a:normAutofit lnSpcReduction="10000"/>
+          </a:bodyPr>
+          <a:lstStyle/>
+          <a:p>
+            <a:r>
+              <a:rPr lang="en-US" dirty="0"/>
+              <a:t>I was part of a project to replace the banking system with one that (can) automate that. </a:t>
+            </a:r>
+          </a:p>
+          <a:p>
+            <a:pPr lvl="1"/>
+            <a:r>
+              <a:rPr lang="en-US" dirty="0"/>
+              <a:t>Overall decision is identical – take in financial inputs, predict if we loan. </a:t>
+            </a:r>
+          </a:p>
+          <a:p>
+            <a:r>
+              <a:rPr lang="en-US" dirty="0"/>
+              <a:t>Start with same inputs (or more similar ones) – financial info, loan details, </a:t>
+            </a:r>
+            <a:r>
+              <a:rPr lang="en-US" dirty="0" err="1"/>
+              <a:t>etc</a:t>
+            </a:r>
+            <a:r>
+              <a:rPr lang="en-US" dirty="0"/>
+              <a:t>…</a:t>
+            </a:r>
+          </a:p>
+          <a:p>
+            <a:r>
+              <a:rPr lang="en-US" dirty="0"/>
+              <a:t>Instead of people making rules, the machine makes a model. </a:t>
+            </a:r>
+          </a:p>
+          <a:p>
+            <a:pPr lvl="1"/>
+            <a:r>
+              <a:rPr lang="en-US" dirty="0"/>
+              <a:t>Provide old loan data: target of did they pay it back, inputs of the financials. </a:t>
+            </a:r>
+          </a:p>
+          <a:p>
+            <a:pPr lvl="1"/>
+            <a:r>
+              <a:rPr lang="en-US" dirty="0"/>
+              <a:t>We don’t provide how to predict target from inputs, just give examples. </a:t>
+            </a:r>
+          </a:p>
+          <a:p>
+            <a:r>
+              <a:rPr lang="en-US" dirty="0"/>
+              <a:t>The learning process (where m and b are calculated) will find an optimal solution. </a:t>
+            </a:r>
+          </a:p>
+          <a:p>
+            <a:pPr lvl="1"/>
+            <a:r>
+              <a:rPr lang="en-US" dirty="0"/>
+              <a:t>Machine can spot patterns and trends in what indicates loan quality far better than us. </a:t>
+            </a:r>
+          </a:p>
+          <a:p>
+            <a:pPr lvl="1"/>
+            <a:r>
+              <a:rPr lang="en-US" dirty="0"/>
+              <a:t>If we have lots of data, this can be quite accurate. </a:t>
+            </a:r>
+          </a:p>
+          <a:p>
+            <a:pPr lvl="1"/>
+            <a:r>
+              <a:rPr lang="en-US" dirty="0"/>
+              <a:t>Real banks sometimes use this (with large amounts most/all involve human approval). </a:t>
+            </a:r>
+          </a:p>
+        </p:txBody>
+      </p:sp>
+    </p:spTree>
+    <p:extLst>
+      <p:ext uri="{BB962C8B-B14F-4D97-AF65-F5344CB8AC3E}">
+        <p14:creationId xmlns:p14="http://schemas.microsoft.com/office/powerpoint/2010/main" val="2792573433"/>
+      </p:ext>
+    </p:extLst>
+  </p:cSld>
+  <p:clrMapOvr>
+    <a:masterClrMapping/>
+  </p:clrMapOvr>
+</p:sld>
+</file>
+
+<file path=ppt/slides/slide33.xml><?xml version="1.0" encoding="utf-8"?>
+<p:sld xmlns:a="http://schemas.openxmlformats.org/drawingml/2006/main" xmlns:r="http://schemas.openxmlformats.org/officeDocument/2006/relationships" xmlns:p="http://schemas.openxmlformats.org/presentationml/2006/main">
+  <p:cSld>
+    <p:spTree>
+      <p:nvGrpSpPr>
+        <p:cNvPr id="1" name=""/>
+        <p:cNvGrpSpPr/>
+        <p:nvPr/>
+      </p:nvGrpSpPr>
+      <p:grpSpPr>
+        <a:xfrm>
+          <a:off x="0" y="0"/>
+          <a:ext cx="0" cy="0"/>
+          <a:chOff x="0" y="0"/>
+          <a:chExt cx="0" cy="0"/>
+        </a:xfrm>
+      </p:grpSpPr>
+      <p:sp>
+        <p:nvSpPr>
+          <p:cNvPr id="2" name="Title 1">
+            <a:extLst>
+              <a:ext uri="{FF2B5EF4-FFF2-40B4-BE49-F238E27FC236}">
+                <a16:creationId xmlns:a16="http://schemas.microsoft.com/office/drawing/2014/main" id="{FBBFBDE1-AEEB-6AEC-27CD-3DFF7A95A20E}"/>
+              </a:ext>
+            </a:extLst>
+          </p:cNvPr>
+          <p:cNvSpPr>
+            <a:spLocks noGrp="1"/>
+          </p:cNvSpPr>
+          <p:nvPr>
+            <p:ph type="title"/>
+          </p:nvPr>
+        </p:nvSpPr>
+        <p:spPr/>
+        <p:txBody>
+          <a:bodyPr/>
+          <a:lstStyle/>
+          <a:p>
+            <a:r>
+              <a:rPr lang="en-US" dirty="0"/>
+              <a:t>Result of Multiple regression</a:t>
+            </a:r>
+          </a:p>
+        </p:txBody>
+      </p:sp>
+      <p:sp>
+        <p:nvSpPr>
+          <p:cNvPr id="3" name="Content Placeholder 2">
+            <a:extLst>
+              <a:ext uri="{FF2B5EF4-FFF2-40B4-BE49-F238E27FC236}">
+                <a16:creationId xmlns:a16="http://schemas.microsoft.com/office/drawing/2014/main" id="{97024F14-839B-5499-98DD-0C59C792467B}"/>
+              </a:ext>
+            </a:extLst>
+          </p:cNvPr>
+          <p:cNvSpPr>
+            <a:spLocks noGrp="1"/>
+          </p:cNvSpPr>
+          <p:nvPr>
+            <p:ph idx="1"/>
+          </p:nvPr>
+        </p:nvSpPr>
+        <p:spPr>
+          <a:xfrm>
+            <a:off x="5712047" y="2015732"/>
+            <a:ext cx="6371096" cy="4037749"/>
+          </a:xfrm>
+        </p:spPr>
+        <p:txBody>
+          <a:bodyPr/>
+          <a:lstStyle/>
+          <a:p>
+            <a:r>
+              <a:rPr lang="en-US" dirty="0"/>
+              <a:t>The output of the training process is a model – something that predicts output given input. </a:t>
+            </a:r>
+          </a:p>
+          <a:p>
+            <a:r>
+              <a:rPr lang="en-US" dirty="0"/>
+              <a:t>Model can predict Y if we give a set of inputs, </a:t>
+            </a:r>
+            <a:r>
+              <a:rPr lang="en-US" dirty="0" err="1"/>
+              <a:t>Xs</a:t>
+            </a:r>
+            <a:r>
+              <a:rPr lang="en-US" dirty="0"/>
+              <a:t>. </a:t>
+            </a:r>
+          </a:p>
+          <a:p>
+            <a:r>
+              <a:rPr lang="en-US" dirty="0"/>
+              <a:t>Prediction is effectively a weighted average of the inputs:</a:t>
+            </a:r>
+          </a:p>
+          <a:p>
+            <a:pPr lvl="1"/>
+            <a:r>
+              <a:rPr lang="en-US" dirty="0"/>
+              <a:t>Each x is a real metric (income, age, job, </a:t>
+            </a:r>
+            <a:r>
+              <a:rPr lang="en-US" dirty="0" err="1"/>
+              <a:t>etc</a:t>
+            </a:r>
+            <a:r>
+              <a:rPr lang="en-US" dirty="0"/>
+              <a:t>…)</a:t>
+            </a:r>
+          </a:p>
+          <a:p>
+            <a:pPr lvl="1"/>
+            <a:r>
+              <a:rPr lang="en-US" dirty="0"/>
+              <a:t>Each coefficient (m, slope) weights it’s importance. </a:t>
+            </a:r>
+          </a:p>
+          <a:p>
+            <a:r>
+              <a:rPr lang="en-US" dirty="0"/>
+              <a:t>Each new prediction takes new </a:t>
+            </a:r>
+            <a:r>
+              <a:rPr lang="en-US" dirty="0" err="1"/>
+              <a:t>xs</a:t>
+            </a:r>
+            <a:r>
+              <a:rPr lang="en-US" dirty="0"/>
+              <a:t>, balances them by their weight, combines them all, that’s the predicted y. </a:t>
+            </a:r>
+          </a:p>
+        </p:txBody>
+      </p:sp>
+      <p:pic>
+        <p:nvPicPr>
+          <p:cNvPr id="4098" name="Picture 2" descr="What Is Multiple Linear Regression (MLR)?">
+            <a:extLst>
+              <a:ext uri="{FF2B5EF4-FFF2-40B4-BE49-F238E27FC236}">
+                <a16:creationId xmlns:a16="http://schemas.microsoft.com/office/drawing/2014/main" id="{D5CFC21F-B76C-9054-7389-6AF2CA95FC45}"/>
+              </a:ext>
+            </a:extLst>
+          </p:cNvPr>
+          <p:cNvPicPr>
+            <a:picLocks noChangeAspect="1" noChangeArrowheads="1"/>
+          </p:cNvPicPr>
+          <p:nvPr/>
+        </p:nvPicPr>
+        <p:blipFill rotWithShape="1">
+          <a:blip r:embed="rId2">
+            <a:extLst>
+              <a:ext uri="{28A0092B-C50C-407E-A947-70E740481C1C}">
+                <a14:useLocalDpi xmlns:a14="http://schemas.microsoft.com/office/drawing/2010/main" val="0"/>
+              </a:ext>
+            </a:extLst>
+          </a:blip>
+          <a:srcRect r="21312"/>
+          <a:stretch>
+            <a:fillRect/>
+          </a:stretch>
+        </p:blipFill>
+        <p:spPr bwMode="auto">
+          <a:xfrm>
+            <a:off x="0" y="2286226"/>
+            <a:ext cx="5712047" cy="3069545"/>
+          </a:xfrm>
+          <a:prstGeom prst="rect">
+            <a:avLst/>
+          </a:prstGeom>
+          <a:noFill/>
+          <a:extLst>
+            <a:ext uri="{909E8E84-426E-40DD-AFC4-6F175D3DCCD1}">
+              <a14:hiddenFill xmlns:a14="http://schemas.microsoft.com/office/drawing/2010/main">
+                <a:solidFill>
+                  <a:srgbClr val="FFFFFF"/>
+                </a:solidFill>
+              </a14:hiddenFill>
+            </a:ext>
+          </a:extLst>
+        </p:spPr>
+      </p:pic>
+    </p:spTree>
+    <p:extLst>
+      <p:ext uri="{BB962C8B-B14F-4D97-AF65-F5344CB8AC3E}">
+        <p14:creationId xmlns:p14="http://schemas.microsoft.com/office/powerpoint/2010/main" val="2406884731"/>
+      </p:ext>
+    </p:extLst>
+  </p:cSld>
+  <p:clrMapOvr>
+    <a:masterClrMapping/>
+  </p:clrMapOvr>
+</p:sld>
+</file>
+
+<file path=ppt/slides/slide34.xml><?xml version="1.0" encoding="utf-8"?>
+<p:sld xmlns:a="http://schemas.openxmlformats.org/drawingml/2006/main" xmlns:r="http://schemas.openxmlformats.org/officeDocument/2006/relationships" xmlns:p="http://schemas.openxmlformats.org/presentationml/2006/main">
+  <p:cSld>
+    <p:spTree>
+      <p:nvGrpSpPr>
+        <p:cNvPr id="1" name=""/>
+        <p:cNvGrpSpPr/>
+        <p:nvPr/>
+      </p:nvGrpSpPr>
+      <p:grpSpPr>
+        <a:xfrm>
+          <a:off x="0" y="0"/>
+          <a:ext cx="0" cy="0"/>
+          <a:chOff x="0" y="0"/>
+          <a:chExt cx="0" cy="0"/>
+        </a:xfrm>
+      </p:grpSpPr>
+      <p:sp>
+        <p:nvSpPr>
+          <p:cNvPr id="2" name="Title 1">
+            <a:extLst>
+              <a:ext uri="{FF2B5EF4-FFF2-40B4-BE49-F238E27FC236}">
+                <a16:creationId xmlns:a16="http://schemas.microsoft.com/office/drawing/2014/main" id="{2AC31E3B-E8CE-158B-01F7-95DDDB8BB2C1}"/>
+              </a:ext>
+            </a:extLst>
+          </p:cNvPr>
+          <p:cNvSpPr>
+            <a:spLocks noGrp="1"/>
+          </p:cNvSpPr>
+          <p:nvPr>
+            <p:ph type="title"/>
+          </p:nvPr>
+        </p:nvSpPr>
+        <p:spPr/>
+        <p:txBody>
+          <a:bodyPr/>
+          <a:lstStyle/>
+          <a:p>
+            <a:r>
+              <a:rPr lang="en-US" dirty="0"/>
+              <a:t>How accurate are those Predictions?</a:t>
+            </a:r>
+          </a:p>
+        </p:txBody>
+      </p:sp>
+      <p:sp>
+        <p:nvSpPr>
+          <p:cNvPr id="3" name="Content Placeholder 2">
+            <a:extLst>
+              <a:ext uri="{FF2B5EF4-FFF2-40B4-BE49-F238E27FC236}">
+                <a16:creationId xmlns:a16="http://schemas.microsoft.com/office/drawing/2014/main" id="{DC23F1F9-826B-A284-AE34-3D89F5953686}"/>
+              </a:ext>
+            </a:extLst>
+          </p:cNvPr>
+          <p:cNvSpPr>
+            <a:spLocks noGrp="1"/>
+          </p:cNvSpPr>
+          <p:nvPr>
+            <p:ph idx="1"/>
+          </p:nvPr>
+        </p:nvSpPr>
+        <p:spPr>
+          <a:xfrm>
+            <a:off x="156755" y="2015732"/>
+            <a:ext cx="7107646" cy="4084622"/>
+          </a:xfrm>
+        </p:spPr>
+        <p:txBody>
+          <a:bodyPr>
+            <a:normAutofit lnSpcReduction="10000"/>
+          </a:bodyPr>
+          <a:lstStyle/>
+          <a:p>
+            <a:r>
+              <a:rPr lang="en-US" dirty="0"/>
+              <a:t>The predicted values for the target are just that, predictions. </a:t>
+            </a:r>
+          </a:p>
+          <a:p>
+            <a:pPr lvl="1"/>
+            <a:r>
+              <a:rPr lang="en-US" dirty="0"/>
+              <a:t>These predictions aren’t perfect, we hope that they are close. </a:t>
+            </a:r>
+          </a:p>
+          <a:p>
+            <a:r>
+              <a:rPr lang="en-US" dirty="0"/>
+              <a:t>We can evaluate a model for its quality in a few ways, based on the residuals. </a:t>
+            </a:r>
+          </a:p>
+          <a:p>
+            <a:r>
+              <a:rPr lang="en-US" dirty="0"/>
+              <a:t>The residual is the error for an individual prediction. </a:t>
+            </a:r>
+          </a:p>
+          <a:p>
+            <a:pPr lvl="1"/>
+            <a:r>
+              <a:rPr lang="en-US" dirty="0"/>
+              <a:t>We can make a prediction from our model, compare to real value. </a:t>
+            </a:r>
+          </a:p>
+          <a:p>
+            <a:pPr lvl="1"/>
+            <a:r>
+              <a:rPr lang="en-US" dirty="0"/>
+              <a:t>E.g. the stock price in reality is $37.45, our prediction is $37.50, the residual is .05. </a:t>
+            </a:r>
+          </a:p>
+          <a:p>
+            <a:r>
+              <a:rPr lang="en-US" dirty="0"/>
+              <a:t>We usually square and average these – the MSE. </a:t>
+            </a:r>
+          </a:p>
+          <a:p>
+            <a:r>
+              <a:rPr lang="en-US" dirty="0"/>
+              <a:t>The root of that is RMSE, on the same scale as our original data.</a:t>
+            </a:r>
+          </a:p>
+        </p:txBody>
+      </p:sp>
+      <p:pic>
+        <p:nvPicPr>
+          <p:cNvPr id="5122" name="Picture 2" descr="Statistics from A to Z -- Confusing Concepts Clarified Blog - STATISTICS  FROM A TO Z-- CONFUSING CONCEPTS CLARIFIED">
+            <a:extLst>
+              <a:ext uri="{FF2B5EF4-FFF2-40B4-BE49-F238E27FC236}">
+                <a16:creationId xmlns:a16="http://schemas.microsoft.com/office/drawing/2014/main" id="{8526C99D-8BD3-353B-C71D-4A4F23B6B80A}"/>
+              </a:ext>
+            </a:extLst>
+          </p:cNvPr>
+          <p:cNvPicPr>
+            <a:picLocks noChangeAspect="1" noChangeArrowheads="1"/>
+          </p:cNvPicPr>
+          <p:nvPr/>
+        </p:nvPicPr>
+        <p:blipFill>
+          <a:blip r:embed="rId2">
+            <a:extLst>
+              <a:ext uri="{28A0092B-C50C-407E-A947-70E740481C1C}">
+                <a14:useLocalDpi xmlns:a14="http://schemas.microsoft.com/office/drawing/2010/main" val="0"/>
+              </a:ext>
+            </a:extLst>
+          </a:blip>
+          <a:srcRect/>
+          <a:stretch>
+            <a:fillRect/>
+          </a:stretch>
+        </p:blipFill>
+        <p:spPr bwMode="auto">
+          <a:xfrm>
+            <a:off x="7264400" y="2155553"/>
+            <a:ext cx="4927600" cy="2298700"/>
+          </a:xfrm>
+          <a:prstGeom prst="rect">
+            <a:avLst/>
+          </a:prstGeom>
+          <a:noFill/>
+          <a:extLst>
+            <a:ext uri="{909E8E84-426E-40DD-AFC4-6F175D3DCCD1}">
+              <a14:hiddenFill xmlns:a14="http://schemas.microsoft.com/office/drawing/2010/main">
+                <a:solidFill>
+                  <a:srgbClr val="FFFFFF"/>
+                </a:solidFill>
+              </a14:hiddenFill>
+            </a:ext>
+          </a:extLst>
+        </p:spPr>
+      </p:pic>
+    </p:spTree>
+    <p:extLst>
+      <p:ext uri="{BB962C8B-B14F-4D97-AF65-F5344CB8AC3E}">
+        <p14:creationId xmlns:p14="http://schemas.microsoft.com/office/powerpoint/2010/main" val="3782082051"/>
+      </p:ext>
+    </p:extLst>
+  </p:cSld>
+  <p:clrMapOvr>
+    <a:masterClrMapping/>
+  </p:clrMapOvr>
+</p:sld>
+</file>
+
+<file path=ppt/slides/slide35.xml><?xml version="1.0" encoding="utf-8"?>
+<p:sld xmlns:a="http://schemas.openxmlformats.org/drawingml/2006/main" xmlns:r="http://schemas.openxmlformats.org/officeDocument/2006/relationships" xmlns:p="http://schemas.openxmlformats.org/presentationml/2006/main">
+  <p:cSld>
+    <p:spTree>
+      <p:nvGrpSpPr>
+        <p:cNvPr id="1" name=""/>
+        <p:cNvGrpSpPr/>
+        <p:nvPr/>
+      </p:nvGrpSpPr>
+      <p:grpSpPr>
+        <a:xfrm>
+          <a:off x="0" y="0"/>
+          <a:ext cx="0" cy="0"/>
+          <a:chOff x="0" y="0"/>
+          <a:chExt cx="0" cy="0"/>
+        </a:xfrm>
+      </p:grpSpPr>
+      <p:sp>
+        <p:nvSpPr>
+          <p:cNvPr id="2" name="Title 1">
+            <a:extLst>
+              <a:ext uri="{FF2B5EF4-FFF2-40B4-BE49-F238E27FC236}">
+                <a16:creationId xmlns:a16="http://schemas.microsoft.com/office/drawing/2014/main" id="{F6E7BB36-81AA-6380-D596-4E7A47C5F11B}"/>
+              </a:ext>
+            </a:extLst>
+          </p:cNvPr>
+          <p:cNvSpPr>
+            <a:spLocks noGrp="1"/>
+          </p:cNvSpPr>
+          <p:nvPr>
+            <p:ph type="title"/>
+          </p:nvPr>
+        </p:nvSpPr>
+        <p:spPr/>
+        <p:txBody>
+          <a:bodyPr/>
+          <a:lstStyle/>
+          <a:p>
+            <a:r>
+              <a:rPr lang="en-US" dirty="0"/>
+              <a:t>Association</a:t>
+            </a:r>
+          </a:p>
+        </p:txBody>
+      </p:sp>
+      <p:sp>
+        <p:nvSpPr>
+          <p:cNvPr id="3" name="Content Placeholder 2">
+            <a:extLst>
+              <a:ext uri="{FF2B5EF4-FFF2-40B4-BE49-F238E27FC236}">
+                <a16:creationId xmlns:a16="http://schemas.microsoft.com/office/drawing/2014/main" id="{E3F8DE03-5F1A-A941-95BF-B22FD5D64A0A}"/>
+              </a:ext>
+            </a:extLst>
+          </p:cNvPr>
+          <p:cNvSpPr>
+            <a:spLocks noGrp="1"/>
+          </p:cNvSpPr>
+          <p:nvPr>
+            <p:ph idx="1"/>
+          </p:nvPr>
+        </p:nvSpPr>
+        <p:spPr>
+          <a:xfrm>
+            <a:off x="1451579" y="2015732"/>
+            <a:ext cx="9603275" cy="4037749"/>
+          </a:xfrm>
+        </p:spPr>
+        <p:txBody>
+          <a:bodyPr/>
+          <a:lstStyle/>
+          <a:p>
+            <a:r>
+              <a:rPr lang="en-US" dirty="0"/>
+              <a:t>One other type of analysis we can do is association analysis. </a:t>
+            </a:r>
+          </a:p>
+          <a:p>
+            <a:pPr lvl="1"/>
+            <a:r>
+              <a:rPr lang="en-US" dirty="0"/>
+              <a:t>Which things are tied/connected to each other? </a:t>
+            </a:r>
+          </a:p>
+          <a:p>
+            <a:r>
+              <a:rPr lang="en-US" dirty="0"/>
+              <a:t>Commonly used to find preferences. </a:t>
+            </a:r>
+          </a:p>
+          <a:p>
+            <a:pPr lvl="1"/>
+            <a:r>
+              <a:rPr lang="en-US" dirty="0"/>
+              <a:t>If people who listen to artists A or B usually listen to both, suggest one to the rest. </a:t>
+            </a:r>
+          </a:p>
+          <a:p>
+            <a:pPr lvl="1"/>
+            <a:r>
+              <a:rPr lang="en-US" dirty="0"/>
+              <a:t>If someone buys certain products, what else are they likely to buy. </a:t>
+            </a:r>
+          </a:p>
+          <a:p>
+            <a:r>
+              <a:rPr lang="en-US" dirty="0"/>
+              <a:t>Market basket analysis – look at patterns in a purchase to target actions. </a:t>
+            </a:r>
+          </a:p>
+          <a:p>
+            <a:pPr lvl="1"/>
+            <a:r>
+              <a:rPr lang="en-US" dirty="0"/>
+              <a:t>Measure how ‘connected’ certain items are – if someone buys one, do they get the other. </a:t>
+            </a:r>
+          </a:p>
+          <a:p>
+            <a:pPr lvl="1"/>
+            <a:r>
+              <a:rPr lang="en-US" dirty="0"/>
+              <a:t>E.g. how many laptop buyers get a new mouse or extra power adapter. </a:t>
+            </a:r>
+          </a:p>
+          <a:p>
+            <a:pPr lvl="1"/>
+            <a:r>
+              <a:rPr lang="en-US" dirty="0"/>
+              <a:t>If someone fits the patten that they’re likely to get something else, target them. </a:t>
+            </a:r>
+          </a:p>
+        </p:txBody>
+      </p:sp>
+    </p:spTree>
+    <p:extLst>
+      <p:ext uri="{BB962C8B-B14F-4D97-AF65-F5344CB8AC3E}">
+        <p14:creationId xmlns:p14="http://schemas.microsoft.com/office/powerpoint/2010/main" val="3920259858"/>
+      </p:ext>
+    </p:extLst>
+  </p:cSld>
+  <p:clrMapOvr>
+    <a:masterClrMapping/>
+  </p:clrMapOvr>
+</p:sld>
+</file>
+
+<file path=ppt/slides/slide36.xml><?xml version="1.0" encoding="utf-8"?>
+<p:sld xmlns:a="http://schemas.openxmlformats.org/drawingml/2006/main" xmlns:r="http://schemas.openxmlformats.org/officeDocument/2006/relationships" xmlns:p="http://schemas.openxmlformats.org/presentationml/2006/main">
+  <p:cSld>
+    <p:spTree>
+      <p:nvGrpSpPr>
+        <p:cNvPr id="1" name=""/>
+        <p:cNvGrpSpPr/>
+        <p:nvPr/>
+      </p:nvGrpSpPr>
+      <p:grpSpPr>
+        <a:xfrm>
+          <a:off x="0" y="0"/>
+          <a:ext cx="0" cy="0"/>
+          <a:chOff x="0" y="0"/>
+          <a:chExt cx="0" cy="0"/>
+        </a:xfrm>
+      </p:grpSpPr>
+      <p:sp>
+        <p:nvSpPr>
+          <p:cNvPr id="2" name="Title 1">
+            <a:extLst>
+              <a:ext uri="{FF2B5EF4-FFF2-40B4-BE49-F238E27FC236}">
+                <a16:creationId xmlns:a16="http://schemas.microsoft.com/office/drawing/2014/main" id="{13CF0EDD-C409-0AC4-1E22-8E0ED1CC6775}"/>
+              </a:ext>
+            </a:extLst>
+          </p:cNvPr>
+          <p:cNvSpPr>
+            <a:spLocks noGrp="1"/>
+          </p:cNvSpPr>
+          <p:nvPr>
+            <p:ph type="title"/>
+          </p:nvPr>
+        </p:nvSpPr>
+        <p:spPr/>
+        <p:txBody>
+          <a:bodyPr/>
+          <a:lstStyle/>
+          <a:p>
+            <a:r>
+              <a:rPr lang="en-US" dirty="0"/>
+              <a:t>Famously… Target</a:t>
+            </a:r>
+          </a:p>
+        </p:txBody>
+      </p:sp>
+      <p:pic>
+        <p:nvPicPr>
+          <p:cNvPr id="4" name="Online Media 3" descr="&quot;Target knew teen was pregnant before her dad&quot; - Fox News">
+            <a:hlinkClick r:id="" action="ppaction://media"/>
+            <a:extLst>
+              <a:ext uri="{FF2B5EF4-FFF2-40B4-BE49-F238E27FC236}">
+                <a16:creationId xmlns:a16="http://schemas.microsoft.com/office/drawing/2014/main" id="{642D49F8-06F5-88AD-DBB8-E071EF323CD9}"/>
+              </a:ext>
+            </a:extLst>
+          </p:cNvPr>
+          <p:cNvPicPr>
+            <a:picLocks noGrp="1" noRot="1" noChangeAspect="1"/>
+          </p:cNvPicPr>
+          <p:nvPr>
+            <p:ph idx="1"/>
+            <a:videoFile r:link="rId1"/>
+          </p:nvPr>
+        </p:nvPicPr>
+        <p:blipFill>
+          <a:blip r:embed="rId3"/>
+          <a:stretch>
+            <a:fillRect/>
+          </a:stretch>
+        </p:blipFill>
+        <p:spPr>
+          <a:xfrm>
+            <a:off x="1524527" y="0"/>
+            <a:ext cx="9142946" cy="6858000"/>
+          </a:xfrm>
+          <a:prstGeom prst="rect">
+            <a:avLst/>
+          </a:prstGeom>
+        </p:spPr>
+      </p:pic>
+    </p:spTree>
+    <p:extLst>
+      <p:ext uri="{BB962C8B-B14F-4D97-AF65-F5344CB8AC3E}">
+        <p14:creationId xmlns:p14="http://schemas.microsoft.com/office/powerpoint/2010/main" val="3494571438"/>
+      </p:ext>
+    </p:extLst>
+  </p:cSld>
+  <p:clrMapOvr>
+    <a:masterClrMapping/>
+  </p:clrMapOvr>
+  <p:timing>
+    <p:tnLst>
+      <p:par>
+        <p:cTn id="1" dur="indefinite" restart="never" nodeType="tmRoot">
+          <p:childTnLst>
+            <p:seq concurrent="1" nextAc="seek">
+              <p:cTn id="2" dur="indefinite" nodeType="mainSeq">
+                <p:childTnLst>
+                  <p:par>
+                    <p:cTn id="3" fill="hold">
+                      <p:stCondLst>
+                        <p:cond delay="indefinite"/>
+                      </p:stCondLst>
+                      <p:childTnLst>
+                        <p:par>
+                          <p:cTn id="4" fill="hold">
+                            <p:stCondLst>
+                              <p:cond delay="0"/>
+                            </p:stCondLst>
+                            <p:childTnLst>
+                              <p:par>
+                                <p:cTn id="5" presetID="1" presetClass="mediacall" presetSubtype="0" fill="hold" nodeType="clickEffect">
+                                  <p:stCondLst>
+                                    <p:cond delay="0"/>
+                                  </p:stCondLst>
+                                  <p:childTnLst>
+                                    <p:cmd type="call" cmd="playFrom(0.0)">
+                                      <p:cBhvr>
+                                        <p:cTn id="6" dur="1" fill="hold"/>
+                                        <p:tgtEl>
+                                          <p:spTgt spid="4"/>
+                                        </p:tgtEl>
+                                      </p:cBhvr>
+                                    </p:cmd>
+                                  </p:childTnLst>
+                                </p:cTn>
+                              </p:par>
+                            </p:childTnLst>
+                          </p:cTn>
+                        </p:par>
+                      </p:childTnLst>
+                    </p:cTn>
+                  </p:par>
+                </p:childTnLst>
+              </p:cTn>
+              <p:prevCondLst>
+                <p:cond evt="onPrev" delay="0">
+                  <p:tgtEl>
+                    <p:sldTgt/>
+                  </p:tgtEl>
+                </p:cond>
+              </p:prevCondLst>
+              <p:nextCondLst>
+                <p:cond evt="onNext" delay="0">
+                  <p:tgtEl>
+                    <p:sldTgt/>
+                  </p:tgtEl>
+                </p:cond>
+              </p:nextCondLst>
+            </p:seq>
+            <p:video>
+              <p:cMediaNode vol="80000">
+                <p:cTn id="7" fill="hold" display="0">
+                  <p:stCondLst>
+                    <p:cond delay="indefinite"/>
+                  </p:stCondLst>
+                </p:cTn>
+                <p:tgtEl>
+                  <p:spTgt spid="4"/>
+                </p:tgtEl>
+              </p:cMediaNode>
+            </p:video>
+            <p:seq concurrent="1" nextAc="seek">
+              <p:cTn id="8" restart="whenNotActive" fill="hold" evtFilter="cancelBubble" nodeType="interactiveSeq">
+                <p:stCondLst>
+                  <p:cond evt="onClick" delay="0">
+                    <p:tgtEl>
+                      <p:spTgt spid="4"/>
+                    </p:tgtEl>
+                  </p:cond>
+                </p:stCondLst>
+                <p:endSync evt="end" delay="0">
+                  <p:rtn val="all"/>
+                </p:endSync>
+                <p:childTnLst>
+                  <p:par>
+                    <p:cTn id="9" fill="hold">
+                      <p:stCondLst>
+                        <p:cond delay="0"/>
+                      </p:stCondLst>
+                      <p:childTnLst>
+                        <p:par>
+                          <p:cTn id="10" fill="hold">
+                            <p:stCondLst>
+                              <p:cond delay="0"/>
+                            </p:stCondLst>
+                            <p:childTnLst>
+                              <p:par>
+                                <p:cTn id="11" presetID="2" presetClass="mediacall" presetSubtype="0" fill="hold" nodeType="clickEffect">
+                                  <p:stCondLst>
+                                    <p:cond delay="0"/>
+                                  </p:stCondLst>
+                                  <p:childTnLst>
+                                    <p:cmd type="call" cmd="togglePause">
+                                      <p:cBhvr>
+                                        <p:cTn id="12" dur="1" fill="hold"/>
+                                        <p:tgtEl>
+                                          <p:spTgt spid="4"/>
+                                        </p:tgtEl>
+                                      </p:cBhvr>
+                                    </p:cmd>
+                                  </p:childTnLst>
+                                </p:cTn>
+                              </p:par>
+                            </p:childTnLst>
+                          </p:cTn>
+                        </p:par>
+                      </p:childTnLst>
+                    </p:cTn>
+                  </p:par>
+                </p:childTnLst>
+              </p:cTn>
+              <p:nextCondLst>
+                <p:cond evt="onClick" delay="0">
+                  <p:tgtEl>
+                    <p:spTgt spid="4"/>
+                  </p:tgtEl>
+                </p:cond>
+              </p:nextCondLst>
+            </p:seq>
+          </p:childTnLst>
+        </p:cTn>
+      </p:par>
+    </p:tnLst>
+  </p:timing>
+</p:sld>
+</file>
+
+<file path=ppt/slides/slide37.xml><?xml version="1.0" encoding="utf-8"?>
+<p:sld xmlns:a="http://schemas.openxmlformats.org/drawingml/2006/main" xmlns:r="http://schemas.openxmlformats.org/officeDocument/2006/relationships" xmlns:p="http://schemas.openxmlformats.org/presentationml/2006/main">
+  <p:cSld>
+    <p:spTree>
+      <p:nvGrpSpPr>
+        <p:cNvPr id="1" name=""/>
+        <p:cNvGrpSpPr/>
+        <p:nvPr/>
+      </p:nvGrpSpPr>
+      <p:grpSpPr>
+        <a:xfrm>
+          <a:off x="0" y="0"/>
+          <a:ext cx="0" cy="0"/>
+          <a:chOff x="0" y="0"/>
+          <a:chExt cx="0" cy="0"/>
+        </a:xfrm>
+      </p:grpSpPr>
+      <p:sp>
+        <p:nvSpPr>
+          <p:cNvPr id="2" name="Title 1">
+            <a:extLst>
+              <a:ext uri="{FF2B5EF4-FFF2-40B4-BE49-F238E27FC236}">
+                <a16:creationId xmlns:a16="http://schemas.microsoft.com/office/drawing/2014/main" id="{19D1E654-CA14-5013-4B39-6B8353A6F706}"/>
+              </a:ext>
+            </a:extLst>
+          </p:cNvPr>
+          <p:cNvSpPr>
+            <a:spLocks noGrp="1"/>
+          </p:cNvSpPr>
+          <p:nvPr>
+            <p:ph type="title"/>
+          </p:nvPr>
+        </p:nvSpPr>
+        <p:spPr/>
+        <p:txBody>
+          <a:bodyPr/>
+          <a:lstStyle/>
+          <a:p>
+            <a:r>
+              <a:rPr lang="en-US" dirty="0"/>
+              <a:t>Target was too Targeted</a:t>
+            </a:r>
+          </a:p>
+        </p:txBody>
+      </p:sp>
+      <p:sp>
+        <p:nvSpPr>
+          <p:cNvPr id="3" name="Content Placeholder 2">
+            <a:extLst>
+              <a:ext uri="{FF2B5EF4-FFF2-40B4-BE49-F238E27FC236}">
+                <a16:creationId xmlns:a16="http://schemas.microsoft.com/office/drawing/2014/main" id="{FB5F910F-BF85-A251-73BC-62DC7BF4C677}"/>
+              </a:ext>
+            </a:extLst>
+          </p:cNvPr>
+          <p:cNvSpPr>
+            <a:spLocks noGrp="1"/>
+          </p:cNvSpPr>
+          <p:nvPr>
+            <p:ph idx="1"/>
+          </p:nvPr>
+        </p:nvSpPr>
+        <p:spPr>
+          <a:xfrm>
+            <a:off x="1267097" y="1853754"/>
+            <a:ext cx="9787757" cy="4259663"/>
+          </a:xfrm>
+        </p:spPr>
+        <p:txBody>
+          <a:bodyPr>
+            <a:normAutofit/>
+          </a:bodyPr>
+          <a:lstStyle/>
+          <a:p>
+            <a:r>
+              <a:rPr lang="en-US" dirty="0"/>
+              <a:t>Target made a system to score customers for ‘pregnancy score’. </a:t>
+            </a:r>
+          </a:p>
+          <a:p>
+            <a:r>
+              <a:rPr lang="en-US" dirty="0"/>
+              <a:t>Patterns were found by looking at people on the baby registry. </a:t>
+            </a:r>
+          </a:p>
+          <a:p>
+            <a:pPr lvl="1"/>
+            <a:r>
+              <a:rPr lang="en-US" dirty="0"/>
+              <a:t>Females on baby registry can be assumed to be pregnant. </a:t>
+            </a:r>
+          </a:p>
+          <a:p>
+            <a:pPr lvl="1"/>
+            <a:r>
+              <a:rPr lang="en-US" dirty="0"/>
+              <a:t>Due to loyalty cards (or cc, or other ways) we can identify this person always. </a:t>
+            </a:r>
+          </a:p>
+          <a:p>
+            <a:pPr lvl="1"/>
+            <a:r>
+              <a:rPr lang="en-US" dirty="0"/>
+              <a:t>People on the baby registry changed their shopping patterns somewhat. </a:t>
+            </a:r>
+          </a:p>
+          <a:p>
+            <a:pPr lvl="2"/>
+            <a:r>
+              <a:rPr lang="en-US" dirty="0"/>
+              <a:t>E.g. more lotion, vitamins, less smokes, </a:t>
+            </a:r>
+            <a:r>
+              <a:rPr lang="en-US" dirty="0" err="1"/>
+              <a:t>etc</a:t>
+            </a:r>
+            <a:r>
+              <a:rPr lang="en-US" dirty="0"/>
+              <a:t>…</a:t>
+            </a:r>
+          </a:p>
+          <a:p>
+            <a:r>
+              <a:rPr lang="en-US" dirty="0"/>
+              <a:t>Pregnancy score looks at each person’s purchases, and measures similarity to </a:t>
+            </a:r>
+            <a:r>
+              <a:rPr lang="en-US" dirty="0" err="1"/>
+              <a:t>preggos</a:t>
+            </a:r>
+            <a:r>
+              <a:rPr lang="en-US" dirty="0"/>
+              <a:t>.</a:t>
+            </a:r>
+          </a:p>
+          <a:p>
+            <a:pPr lvl="1"/>
+            <a:r>
+              <a:rPr lang="en-US" dirty="0"/>
+              <a:t>If what you buy is very similar to registry people, you are likely pregnant. </a:t>
+            </a:r>
+          </a:p>
+          <a:p>
+            <a:pPr lvl="1"/>
+            <a:r>
+              <a:rPr lang="en-US" dirty="0"/>
+              <a:t>Target targeted adds for strollers, cribs, </a:t>
+            </a:r>
+            <a:r>
+              <a:rPr lang="en-US" dirty="0" err="1"/>
+              <a:t>etc</a:t>
+            </a:r>
+            <a:r>
+              <a:rPr lang="en-US" dirty="0"/>
+              <a:t>… to these people as </a:t>
+            </a:r>
+            <a:r>
+              <a:rPr lang="en-US" dirty="0" err="1"/>
+              <a:t>valuabe</a:t>
+            </a:r>
+            <a:r>
+              <a:rPr lang="en-US" dirty="0"/>
+              <a:t> customers. </a:t>
+            </a:r>
+          </a:p>
+          <a:p>
+            <a:r>
+              <a:rPr lang="en-US" dirty="0"/>
+              <a:t>Some data got really mad, yelled at the manager for them calling his kid pregnant – she was. </a:t>
+            </a:r>
+          </a:p>
+        </p:txBody>
+      </p:sp>
+    </p:spTree>
+    <p:extLst>
+      <p:ext uri="{BB962C8B-B14F-4D97-AF65-F5344CB8AC3E}">
+        <p14:creationId xmlns:p14="http://schemas.microsoft.com/office/powerpoint/2010/main" val="1376915727"/>
+      </p:ext>
+    </p:extLst>
+  </p:cSld>
+  <p:clrMapOvr>
+    <a:masterClrMapping/>
+  </p:clrMapOvr>
+</p:sld>
+</file>
+
+<file path=ppt/slides/slide38.xml><?xml version="1.0" encoding="utf-8"?>
+<p:sld xmlns:a="http://schemas.openxmlformats.org/drawingml/2006/main" xmlns:r="http://schemas.openxmlformats.org/officeDocument/2006/relationships" xmlns:p="http://schemas.openxmlformats.org/presentationml/2006/main">
+  <p:cSld>
+    <p:spTree>
+      <p:nvGrpSpPr>
+        <p:cNvPr id="1" name=""/>
+        <p:cNvGrpSpPr/>
+        <p:nvPr/>
+      </p:nvGrpSpPr>
+      <p:grpSpPr>
+        <a:xfrm>
+          <a:off x="0" y="0"/>
+          <a:ext cx="0" cy="0"/>
+          <a:chOff x="0" y="0"/>
+          <a:chExt cx="0" cy="0"/>
+        </a:xfrm>
+      </p:grpSpPr>
+      <p:sp>
+        <p:nvSpPr>
+          <p:cNvPr id="2" name="Title 1">
+            <a:extLst>
+              <a:ext uri="{FF2B5EF4-FFF2-40B4-BE49-F238E27FC236}">
+                <a16:creationId xmlns:a16="http://schemas.microsoft.com/office/drawing/2014/main" id="{8E7590C7-89BD-D743-33A4-95166838F7FF}"/>
+              </a:ext>
+            </a:extLst>
+          </p:cNvPr>
+          <p:cNvSpPr>
+            <a:spLocks noGrp="1"/>
+          </p:cNvSpPr>
+          <p:nvPr>
+            <p:ph type="title"/>
+          </p:nvPr>
+        </p:nvSpPr>
+        <p:spPr/>
+        <p:txBody>
+          <a:bodyPr/>
+          <a:lstStyle/>
+          <a:p>
+            <a:r>
+              <a:rPr lang="en-US" dirty="0"/>
+              <a:t>In Tableau</a:t>
+            </a:r>
+          </a:p>
+        </p:txBody>
+      </p:sp>
+      <p:sp>
+        <p:nvSpPr>
+          <p:cNvPr id="3" name="Content Placeholder 2">
+            <a:extLst>
+              <a:ext uri="{FF2B5EF4-FFF2-40B4-BE49-F238E27FC236}">
+                <a16:creationId xmlns:a16="http://schemas.microsoft.com/office/drawing/2014/main" id="{13DEC56E-8A37-394C-1D2E-973FB6F3841F}"/>
+              </a:ext>
+            </a:extLst>
+          </p:cNvPr>
+          <p:cNvSpPr>
+            <a:spLocks noGrp="1"/>
+          </p:cNvSpPr>
+          <p:nvPr>
+            <p:ph idx="1"/>
+          </p:nvPr>
+        </p:nvSpPr>
+        <p:spPr>
+          <a:xfrm>
+            <a:off x="6862920" y="2015732"/>
+            <a:ext cx="4906714" cy="3740649"/>
+          </a:xfrm>
+        </p:spPr>
+        <p:txBody>
+          <a:bodyPr/>
+          <a:lstStyle/>
+          <a:p>
+            <a:r>
+              <a:rPr lang="en-US" dirty="0"/>
+              <a:t>We can do market basket analysis. </a:t>
+            </a:r>
+          </a:p>
+          <a:p>
+            <a:r>
+              <a:rPr lang="en-US" dirty="0"/>
+              <a:t>The values measure how frequently these items are bought together. </a:t>
+            </a:r>
+          </a:p>
+          <a:p>
+            <a:r>
+              <a:rPr lang="en-US" dirty="0"/>
+              <a:t>For many associations, this works. </a:t>
+            </a:r>
+          </a:p>
+          <a:p>
+            <a:pPr lvl="1"/>
+            <a:r>
+              <a:rPr lang="en-US" dirty="0"/>
+              <a:t>Often need longitudinal tracking – e.g. a customer over several transactions. </a:t>
+            </a:r>
+          </a:p>
+          <a:p>
+            <a:r>
+              <a:rPr lang="en-US" dirty="0"/>
+              <a:t>Not causation, only correlation. </a:t>
+            </a:r>
+          </a:p>
+        </p:txBody>
+      </p:sp>
+      <p:pic>
+        <p:nvPicPr>
+          <p:cNvPr id="6146" name="Picture 2" descr="TableauTipTuesday Week 41 – Market Basket Matrix – missdataviz">
+            <a:extLst>
+              <a:ext uri="{FF2B5EF4-FFF2-40B4-BE49-F238E27FC236}">
+                <a16:creationId xmlns:a16="http://schemas.microsoft.com/office/drawing/2014/main" id="{025BBD61-37D1-6503-BB84-D1943E20DE2A}"/>
+              </a:ext>
+            </a:extLst>
+          </p:cNvPr>
+          <p:cNvPicPr>
+            <a:picLocks noChangeAspect="1" noChangeArrowheads="1"/>
+          </p:cNvPicPr>
+          <p:nvPr/>
+        </p:nvPicPr>
+        <p:blipFill>
+          <a:blip r:embed="rId2">
+            <a:extLst>
+              <a:ext uri="{28A0092B-C50C-407E-A947-70E740481C1C}">
+                <a14:useLocalDpi xmlns:a14="http://schemas.microsoft.com/office/drawing/2010/main" val="0"/>
+              </a:ext>
+            </a:extLst>
+          </a:blip>
+          <a:srcRect/>
+          <a:stretch>
+            <a:fillRect/>
+          </a:stretch>
+        </p:blipFill>
+        <p:spPr bwMode="auto">
+          <a:xfrm>
+            <a:off x="0" y="2015732"/>
+            <a:ext cx="6862920" cy="3740649"/>
+          </a:xfrm>
+          <a:prstGeom prst="rect">
+            <a:avLst/>
+          </a:prstGeom>
+          <a:noFill/>
+          <a:extLst>
+            <a:ext uri="{909E8E84-426E-40DD-AFC4-6F175D3DCCD1}">
+              <a14:hiddenFill xmlns:a14="http://schemas.microsoft.com/office/drawing/2010/main">
+                <a:solidFill>
+                  <a:srgbClr val="FFFFFF"/>
+                </a:solidFill>
+              </a14:hiddenFill>
+            </a:ext>
+          </a:extLst>
+        </p:spPr>
+      </p:pic>
+    </p:spTree>
+    <p:extLst>
+      <p:ext uri="{BB962C8B-B14F-4D97-AF65-F5344CB8AC3E}">
+        <p14:creationId xmlns:p14="http://schemas.microsoft.com/office/powerpoint/2010/main" val="451417183"/>
+      </p:ext>
+    </p:extLst>
+  </p:cSld>
+  <p:clrMapOvr>
+    <a:masterClrMapping/>
+  </p:clrMapOvr>
+</p:sld>
+</file>
+
+<file path=ppt/slides/slide39.xml><?xml version="1.0" encoding="utf-8"?>
+<p:sld xmlns:a="http://schemas.openxmlformats.org/drawingml/2006/main" xmlns:r="http://schemas.openxmlformats.org/officeDocument/2006/relationships" xmlns:p="http://schemas.openxmlformats.org/presentationml/2006/main">
+  <p:cSld>
+    <p:spTree>
+      <p:nvGrpSpPr>
+        <p:cNvPr id="1" name=""/>
+        <p:cNvGrpSpPr/>
+        <p:nvPr/>
+      </p:nvGrpSpPr>
+      <p:grpSpPr>
+        <a:xfrm>
+          <a:off x="0" y="0"/>
+          <a:ext cx="0" cy="0"/>
+          <a:chOff x="0" y="0"/>
+          <a:chExt cx="0" cy="0"/>
+        </a:xfrm>
+      </p:grpSpPr>
+      <p:sp>
+        <p:nvSpPr>
+          <p:cNvPr id="2" name="Title 1">
+            <a:extLst>
+              <a:ext uri="{FF2B5EF4-FFF2-40B4-BE49-F238E27FC236}">
+                <a16:creationId xmlns:a16="http://schemas.microsoft.com/office/drawing/2014/main" id="{EB005B41-7F8D-2201-118B-2BBEE65A9AF4}"/>
+              </a:ext>
+            </a:extLst>
+          </p:cNvPr>
+          <p:cNvSpPr>
+            <a:spLocks noGrp="1"/>
+          </p:cNvSpPr>
+          <p:nvPr>
+            <p:ph type="title"/>
+          </p:nvPr>
+        </p:nvSpPr>
+        <p:spPr/>
+        <p:txBody>
+          <a:bodyPr/>
+          <a:lstStyle/>
+          <a:p>
+            <a:r>
+              <a:rPr lang="en-US" dirty="0"/>
+              <a:t>Why Predict?</a:t>
+            </a:r>
+          </a:p>
+        </p:txBody>
+      </p:sp>
+      <p:sp>
+        <p:nvSpPr>
+          <p:cNvPr id="3" name="Content Placeholder 2">
+            <a:extLst>
+              <a:ext uri="{FF2B5EF4-FFF2-40B4-BE49-F238E27FC236}">
+                <a16:creationId xmlns:a16="http://schemas.microsoft.com/office/drawing/2014/main" id="{4F35FC50-4793-56D1-34D2-881050DDA059}"/>
+              </a:ext>
+            </a:extLst>
+          </p:cNvPr>
+          <p:cNvSpPr>
+            <a:spLocks noGrp="1"/>
+          </p:cNvSpPr>
+          <p:nvPr>
+            <p:ph idx="1"/>
+          </p:nvPr>
+        </p:nvSpPr>
+        <p:spPr>
+          <a:xfrm>
+            <a:off x="1451579" y="1913710"/>
+            <a:ext cx="9603275" cy="4139772"/>
+          </a:xfrm>
+        </p:spPr>
+        <p:txBody>
+          <a:bodyPr/>
+          <a:lstStyle/>
+          <a:p>
+            <a:r>
+              <a:rPr lang="en-US" dirty="0"/>
+              <a:t>Prediction models are very common. </a:t>
+            </a:r>
+          </a:p>
+          <a:p>
+            <a:pPr lvl="1"/>
+            <a:r>
+              <a:rPr lang="en-US" dirty="0"/>
+              <a:t>Most common use of machine learning, we want to predict </a:t>
+            </a:r>
+            <a:r>
+              <a:rPr lang="en-US"/>
+              <a:t>some unknown. </a:t>
+            </a:r>
+            <a:endParaRPr lang="en-US" dirty="0"/>
+          </a:p>
+          <a:p>
+            <a:r>
+              <a:rPr lang="en-US" dirty="0"/>
+              <a:t>We can predict what we need from what we have. </a:t>
+            </a:r>
+          </a:p>
+          <a:p>
+            <a:pPr lvl="1"/>
+            <a:r>
+              <a:rPr lang="en-US" dirty="0"/>
+              <a:t>Loan – have applicant info, want to know if they’ll pay. </a:t>
+            </a:r>
+          </a:p>
+          <a:p>
+            <a:pPr lvl="1"/>
+            <a:r>
+              <a:rPr lang="en-US" dirty="0"/>
+              <a:t>Stock levels – we have past sales info, how many jars of pickles will we sell? </a:t>
+            </a:r>
+          </a:p>
+          <a:p>
+            <a:r>
+              <a:rPr lang="en-US" dirty="0"/>
+              <a:t>Since modern business generates data on everything, this can be quite powerful. </a:t>
+            </a:r>
+          </a:p>
+          <a:p>
+            <a:r>
+              <a:rPr lang="en-US" dirty="0"/>
+              <a:t>Many/most AI/ML related things are based on this concept. </a:t>
+            </a:r>
+          </a:p>
+          <a:p>
+            <a:pPr lvl="1"/>
+            <a:r>
+              <a:rPr lang="en-US" dirty="0"/>
+              <a:t>E.g. ChatGPT is (roughly) a stack of a billion linear regressions (kind of, not literally). </a:t>
+            </a:r>
+          </a:p>
+        </p:txBody>
+      </p:sp>
+    </p:spTree>
+    <p:extLst>
+      <p:ext uri="{BB962C8B-B14F-4D97-AF65-F5344CB8AC3E}">
+        <p14:creationId xmlns:p14="http://schemas.microsoft.com/office/powerpoint/2010/main" val="1624478135"/>
+      </p:ext>
+    </p:extLst>
+  </p:cSld>
+  <p:clrMapOvr>
+    <a:masterClrMapping/>
+  </p:clrMapOvr>
+</p:sld>
+</file>
+
+<file path=ppt/slides/slide4.xml><?xml version="1.0" encoding="utf-8"?>
+<p:sld xmlns:a="http://schemas.openxmlformats.org/drawingml/2006/main" xmlns:r="http://schemas.openxmlformats.org/officeDocument/2006/relationships" xmlns:p="http://schemas.openxmlformats.org/presentationml/2006/main">
+  <p:cSld>
+    <p:spTree>
+      <p:nvGrpSpPr>
+        <p:cNvPr id="1" name=""/>
+        <p:cNvGrpSpPr/>
+        <p:nvPr/>
+      </p:nvGrpSpPr>
+      <p:grpSpPr>
+        <a:xfrm>
+          <a:off x="0" y="0"/>
+          <a:ext cx="0" cy="0"/>
+          <a:chOff x="0" y="0"/>
+          <a:chExt cx="0" cy="0"/>
+        </a:xfrm>
+      </p:grpSpPr>
+      <p:sp>
+        <p:nvSpPr>
+          <p:cNvPr id="2" name="Title 1">
+            <a:extLst>
+              <a:ext uri="{FF2B5EF4-FFF2-40B4-BE49-F238E27FC236}">
+                <a16:creationId xmlns:a16="http://schemas.microsoft.com/office/drawing/2014/main" id="{AD0A358F-3029-3B46-8F88-5B7AAD9B2E72}"/>
+              </a:ext>
+            </a:extLst>
+          </p:cNvPr>
+          <p:cNvSpPr>
+            <a:spLocks noGrp="1"/>
+          </p:cNvSpPr>
+          <p:nvPr>
+            <p:ph type="ctrTitle"/>
+          </p:nvPr>
+        </p:nvSpPr>
+        <p:spPr/>
+        <p:txBody>
+          <a:bodyPr>
+            <a:normAutofit fontScale="90000"/>
+          </a:bodyPr>
+          <a:lstStyle/>
+          <a:p>
+            <a:r>
+              <a:rPr lang="en-US" dirty="0"/>
+              <a:t>Regression Models and Time Series Forecasting</a:t>
+            </a:r>
+          </a:p>
+        </p:txBody>
+      </p:sp>
+      <p:sp>
+        <p:nvSpPr>
+          <p:cNvPr id="3" name="Subtitle 2">
+            <a:extLst>
+              <a:ext uri="{FF2B5EF4-FFF2-40B4-BE49-F238E27FC236}">
+                <a16:creationId xmlns:a16="http://schemas.microsoft.com/office/drawing/2014/main" id="{BA00FEBA-B494-5046-9CD2-12082358FE92}"/>
+              </a:ext>
+            </a:extLst>
+          </p:cNvPr>
+          <p:cNvSpPr>
+            <a:spLocks noGrp="1"/>
+          </p:cNvSpPr>
+          <p:nvPr>
+            <p:ph type="subTitle" idx="1"/>
+          </p:nvPr>
+        </p:nvSpPr>
+        <p:spPr/>
+        <p:txBody>
+          <a:bodyPr/>
+          <a:lstStyle/>
+          <a:p>
+            <a:endParaRPr lang="en-US"/>
+          </a:p>
+        </p:txBody>
+      </p:sp>
+    </p:spTree>
+    <p:extLst>
+      <p:ext uri="{BB962C8B-B14F-4D97-AF65-F5344CB8AC3E}">
+        <p14:creationId xmlns:p14="http://schemas.microsoft.com/office/powerpoint/2010/main" val="3614949151"/>
+      </p:ext>
+    </p:extLst>
+  </p:cSld>
+  <p:clrMapOvr>
+    <a:masterClrMapping/>
+  </p:clrMapOvr>
+</p:sld>
+</file>
+
+<file path=ppt/slides/slide5.xml><?xml version="1.0" encoding="utf-8"?>
+<p:sld xmlns:a="http://schemas.openxmlformats.org/drawingml/2006/main" xmlns:r="http://schemas.openxmlformats.org/officeDocument/2006/relationships" xmlns:p="http://schemas.openxmlformats.org/presentationml/2006/main">
+  <p:cSld>
+    <p:spTree>
+      <p:nvGrpSpPr>
+        <p:cNvPr id="1" name=""/>
+        <p:cNvGrpSpPr/>
+        <p:nvPr/>
+      </p:nvGrpSpPr>
+      <p:grpSpPr>
+        <a:xfrm>
+          <a:off x="0" y="0"/>
+          <a:ext cx="0" cy="0"/>
+          <a:chOff x="0" y="0"/>
+          <a:chExt cx="0" cy="0"/>
+        </a:xfrm>
+      </p:grpSpPr>
+      <p:sp>
+        <p:nvSpPr>
+          <p:cNvPr id="2" name="Title 1">
+            <a:extLst>
+              <a:ext uri="{FF2B5EF4-FFF2-40B4-BE49-F238E27FC236}">
                 <a16:creationId xmlns:a16="http://schemas.microsoft.com/office/drawing/2014/main" id="{B6BBB493-8DF2-7D9B-AAF8-D6D0AE1F57F5}"/>
               </a:ext>
             </a:extLst>
@@ -6513,7 +9343,7 @@
 </p:sld>
 </file>
 
-<file path=ppt/slides/slide4.xml><?xml version="1.0" encoding="utf-8"?>
+<file path=ppt/slides/slide6.xml><?xml version="1.0" encoding="utf-8"?>
 <p:sld xmlns:a="http://schemas.openxmlformats.org/drawingml/2006/main" xmlns:r="http://schemas.openxmlformats.org/officeDocument/2006/relationships" xmlns:p="http://schemas.openxmlformats.org/presentationml/2006/main">
   <p:cSld>
     <p:spTree>
@@ -6647,7 +9477,7 @@
 </p:sld>
 </file>
 
-<file path=ppt/slides/slide5.xml><?xml version="1.0" encoding="utf-8"?>
+<file path=ppt/slides/slide7.xml><?xml version="1.0" encoding="utf-8"?>
 <p:sld xmlns:a="http://schemas.openxmlformats.org/drawingml/2006/main" xmlns:r="http://schemas.openxmlformats.org/officeDocument/2006/relationships" xmlns:p="http://schemas.openxmlformats.org/presentationml/2006/main">
   <p:cSld>
     <p:spTree>
@@ -6780,7 +9610,7 @@
 </p:sld>
 </file>
 
-<file path=ppt/slides/slide6.xml><?xml version="1.0" encoding="utf-8"?>
+<file path=ppt/slides/slide8.xml><?xml version="1.0" encoding="utf-8"?>
 <p:sld xmlns:a="http://schemas.openxmlformats.org/drawingml/2006/main" xmlns:r="http://schemas.openxmlformats.org/officeDocument/2006/relationships" xmlns:p="http://schemas.openxmlformats.org/presentationml/2006/main" show="0">
   <p:cSld>
     <p:spTree>
@@ -6907,7 +9737,7 @@
 </p:sld>
 </file>
 
-<file path=ppt/slides/slide7.xml><?xml version="1.0" encoding="utf-8"?>
+<file path=ppt/slides/slide9.xml><?xml version="1.0" encoding="utf-8"?>
 <p:sld xmlns:a="http://schemas.openxmlformats.org/drawingml/2006/main" xmlns:r="http://schemas.openxmlformats.org/officeDocument/2006/relationships" xmlns:p="http://schemas.openxmlformats.org/presentationml/2006/main">
   <p:cSld>
     <p:spTree>
@@ -7074,282 +9904,6 @@
     <p:extLst>
       <p:ext uri="{BB962C8B-B14F-4D97-AF65-F5344CB8AC3E}">
         <p14:creationId xmlns:p14="http://schemas.microsoft.com/office/powerpoint/2010/main" val="1903044234"/>
-      </p:ext>
-    </p:extLst>
-  </p:cSld>
-  <p:clrMapOvr>
-    <a:masterClrMapping/>
-  </p:clrMapOvr>
-</p:sld>
-</file>
-
-<file path=ppt/slides/slide8.xml><?xml version="1.0" encoding="utf-8"?>
-<p:sld xmlns:a="http://schemas.openxmlformats.org/drawingml/2006/main" xmlns:r="http://schemas.openxmlformats.org/officeDocument/2006/relationships" xmlns:p="http://schemas.openxmlformats.org/presentationml/2006/main">
-  <p:cSld>
-    <p:spTree>
-      <p:nvGrpSpPr>
-        <p:cNvPr id="1" name=""/>
-        <p:cNvGrpSpPr/>
-        <p:nvPr/>
-      </p:nvGrpSpPr>
-      <p:grpSpPr>
-        <a:xfrm>
-          <a:off x="0" y="0"/>
-          <a:ext cx="0" cy="0"/>
-          <a:chOff x="0" y="0"/>
-          <a:chExt cx="0" cy="0"/>
-        </a:xfrm>
-      </p:grpSpPr>
-      <p:sp>
-        <p:nvSpPr>
-          <p:cNvPr id="2" name="Title 1">
-            <a:extLst>
-              <a:ext uri="{FF2B5EF4-FFF2-40B4-BE49-F238E27FC236}">
-                <a16:creationId xmlns:a16="http://schemas.microsoft.com/office/drawing/2014/main" id="{5747E6BB-1E1D-AF4C-8CE0-6495F0739AD3}"/>
-              </a:ext>
-            </a:extLst>
-          </p:cNvPr>
-          <p:cNvSpPr>
-            <a:spLocks noGrp="1"/>
-          </p:cNvSpPr>
-          <p:nvPr>
-            <p:ph type="title"/>
-          </p:nvPr>
-        </p:nvSpPr>
-        <p:spPr/>
-        <p:txBody>
-          <a:bodyPr/>
-          <a:lstStyle/>
-          <a:p>
-            <a:r>
-              <a:rPr lang="en-US" dirty="0"/>
-              <a:t>Exponential Smoothing</a:t>
-            </a:r>
-          </a:p>
-        </p:txBody>
-      </p:sp>
-      <p:sp>
-        <p:nvSpPr>
-          <p:cNvPr id="3" name="Content Placeholder 2">
-            <a:extLst>
-              <a:ext uri="{FF2B5EF4-FFF2-40B4-BE49-F238E27FC236}">
-                <a16:creationId xmlns:a16="http://schemas.microsoft.com/office/drawing/2014/main" id="{92510E4B-B5AE-7445-AA7F-16491623F112}"/>
-              </a:ext>
-            </a:extLst>
-          </p:cNvPr>
-          <p:cNvSpPr>
-            <a:spLocks noGrp="1"/>
-          </p:cNvSpPr>
-          <p:nvPr>
-            <p:ph idx="1"/>
-          </p:nvPr>
-        </p:nvSpPr>
-        <p:spPr>
-          <a:xfrm>
-            <a:off x="1451579" y="2015732"/>
-            <a:ext cx="9603275" cy="4037749"/>
-          </a:xfrm>
-        </p:spPr>
-        <p:txBody>
-          <a:bodyPr>
-            <a:normAutofit/>
-          </a:bodyPr>
-          <a:lstStyle/>
-          <a:p>
-            <a:r>
-              <a:rPr lang="en-US" dirty="0"/>
-              <a:t>Exponential smoothing is one of the simplest forms of time series forecasts. </a:t>
-            </a:r>
-          </a:p>
-          <a:p>
-            <a:r>
-              <a:rPr lang="en-US" dirty="0"/>
-              <a:t>Weighted averaging with a smoothing term. </a:t>
-            </a:r>
-          </a:p>
-          <a:p>
-            <a:r>
-              <a:rPr lang="en-US" dirty="0"/>
-              <a:t>Can also incorporate:</a:t>
-            </a:r>
-          </a:p>
-          <a:p>
-            <a:pPr lvl="1"/>
-            <a:r>
-              <a:rPr lang="en-US" dirty="0"/>
-              <a:t>Trends – are we moving up or down over time. </a:t>
-            </a:r>
-          </a:p>
-          <a:p>
-            <a:pPr lvl="1"/>
-            <a:r>
-              <a:rPr lang="en-US" dirty="0"/>
-              <a:t>Cyclicality – are there seasonal patterns. </a:t>
-            </a:r>
-          </a:p>
-          <a:p>
-            <a:r>
-              <a:rPr lang="en-US" dirty="0"/>
-              <a:t>Trends and seasonality can be either Additive or Multiplicative:</a:t>
-            </a:r>
-          </a:p>
-          <a:p>
-            <a:pPr lvl="1"/>
-            <a:r>
-              <a:rPr lang="en-CA" dirty="0"/>
-              <a:t>If every December we sell 10,000 more apartments than we do in November, the seasonality is </a:t>
-            </a:r>
-            <a:r>
-              <a:rPr lang="en-CA" i="1" dirty="0"/>
-              <a:t>additive</a:t>
-            </a:r>
-            <a:r>
-              <a:rPr lang="en-CA" dirty="0"/>
-              <a:t> in nature. However, if we sell 10% more apartments in the summer months than we do in the winter months the seasonality is </a:t>
-            </a:r>
-            <a:r>
-              <a:rPr lang="en-CA" i="1" dirty="0"/>
-              <a:t>multiplicative</a:t>
-            </a:r>
-            <a:r>
-              <a:rPr lang="en-CA" dirty="0"/>
-              <a:t> in nature.</a:t>
-            </a:r>
-            <a:endParaRPr lang="en-US" dirty="0"/>
-          </a:p>
-        </p:txBody>
-      </p:sp>
-    </p:spTree>
-    <p:extLst>
-      <p:ext uri="{BB962C8B-B14F-4D97-AF65-F5344CB8AC3E}">
-        <p14:creationId xmlns:p14="http://schemas.microsoft.com/office/powerpoint/2010/main" val="1578221522"/>
-      </p:ext>
-    </p:extLst>
-  </p:cSld>
-  <p:clrMapOvr>
-    <a:masterClrMapping/>
-  </p:clrMapOvr>
-</p:sld>
-</file>
-
-<file path=ppt/slides/slide9.xml><?xml version="1.0" encoding="utf-8"?>
-<p:sld xmlns:a="http://schemas.openxmlformats.org/drawingml/2006/main" xmlns:r="http://schemas.openxmlformats.org/officeDocument/2006/relationships" xmlns:p="http://schemas.openxmlformats.org/presentationml/2006/main">
-  <p:cSld>
-    <p:spTree>
-      <p:nvGrpSpPr>
-        <p:cNvPr id="1" name=""/>
-        <p:cNvGrpSpPr/>
-        <p:nvPr/>
-      </p:nvGrpSpPr>
-      <p:grpSpPr>
-        <a:xfrm>
-          <a:off x="0" y="0"/>
-          <a:ext cx="0" cy="0"/>
-          <a:chOff x="0" y="0"/>
-          <a:chExt cx="0" cy="0"/>
-        </a:xfrm>
-      </p:grpSpPr>
-      <p:sp>
-        <p:nvSpPr>
-          <p:cNvPr id="2" name="Title 1">
-            <a:extLst>
-              <a:ext uri="{FF2B5EF4-FFF2-40B4-BE49-F238E27FC236}">
-                <a16:creationId xmlns:a16="http://schemas.microsoft.com/office/drawing/2014/main" id="{38C00E31-AF1D-2147-A243-C6D0E066B0F9}"/>
-              </a:ext>
-            </a:extLst>
-          </p:cNvPr>
-          <p:cNvSpPr>
-            <a:spLocks noGrp="1"/>
-          </p:cNvSpPr>
-          <p:nvPr>
-            <p:ph type="title"/>
-          </p:nvPr>
-        </p:nvSpPr>
-        <p:spPr/>
-        <p:txBody>
-          <a:bodyPr/>
-          <a:lstStyle/>
-          <a:p>
-            <a:endParaRPr lang="en-US"/>
-          </a:p>
-        </p:txBody>
-      </p:sp>
-      <p:sp>
-        <p:nvSpPr>
-          <p:cNvPr id="3" name="Content Placeholder 2">
-            <a:extLst>
-              <a:ext uri="{FF2B5EF4-FFF2-40B4-BE49-F238E27FC236}">
-                <a16:creationId xmlns:a16="http://schemas.microsoft.com/office/drawing/2014/main" id="{E1474FC8-4E41-6541-BD02-76EBFABE63CC}"/>
-              </a:ext>
-            </a:extLst>
-          </p:cNvPr>
-          <p:cNvSpPr>
-            <a:spLocks noGrp="1"/>
-          </p:cNvSpPr>
-          <p:nvPr>
-            <p:ph idx="1"/>
-          </p:nvPr>
-        </p:nvSpPr>
-        <p:spPr/>
-        <p:txBody>
-          <a:bodyPr/>
-          <a:lstStyle/>
-          <a:p>
-            <a:endParaRPr lang="en-US"/>
-          </a:p>
-        </p:txBody>
-      </p:sp>
-      <p:pic>
-        <p:nvPicPr>
-          <p:cNvPr id="1026" name="Picture 2" descr="Trend, Seasonality, Moving Average, Auto Regressive Model : My Journey to  Time Series Data with Interactive Code | by Jae Duk Seo | Towards Data  Science">
-            <a:extLst>
-              <a:ext uri="{FF2B5EF4-FFF2-40B4-BE49-F238E27FC236}">
-                <a16:creationId xmlns:a16="http://schemas.microsoft.com/office/drawing/2014/main" id="{81836D80-3AD8-7448-BD2F-386344D86380}"/>
-              </a:ext>
-            </a:extLst>
-          </p:cNvPr>
-          <p:cNvPicPr>
-            <a:picLocks noChangeAspect="1" noChangeArrowheads="1"/>
-          </p:cNvPicPr>
-          <p:nvPr/>
-        </p:nvPicPr>
-        <p:blipFill>
-          <a:blip r:embed="rId2">
-            <a:extLst>
-              <a:ext uri="{28A0092B-C50C-407E-A947-70E740481C1C}">
-                <a14:useLocalDpi xmlns:a14="http://schemas.microsoft.com/office/drawing/2010/main" val="0"/>
-              </a:ext>
-            </a:extLst>
-          </a:blip>
-          <a:srcRect/>
-          <a:stretch>
-            <a:fillRect/>
-          </a:stretch>
-        </p:blipFill>
-        <p:spPr bwMode="auto">
-          <a:xfrm>
-            <a:off x="2473325" y="0"/>
-            <a:ext cx="7245350" cy="6858000"/>
-          </a:xfrm>
-          <a:prstGeom prst="rect">
-            <a:avLst/>
-          </a:prstGeom>
-          <a:noFill/>
-          <a:extLst>
-            <a:ext uri="{909E8E84-426E-40DD-AFC4-6F175D3DCCD1}">
-              <a14:hiddenFill xmlns:a14="http://schemas.microsoft.com/office/drawing/2010/main">
-                <a:solidFill>
-                  <a:srgbClr val="FFFFFF"/>
-                </a:solidFill>
-              </a14:hiddenFill>
-            </a:ext>
-          </a:extLst>
-        </p:spPr>
-      </p:pic>
-    </p:spTree>
-    <p:extLst>
-      <p:ext uri="{BB962C8B-B14F-4D97-AF65-F5344CB8AC3E}">
-        <p14:creationId xmlns:p14="http://schemas.microsoft.com/office/powerpoint/2010/main" val="184144261"/>
       </p:ext>
     </p:extLst>
   </p:cSld>

--- a/slides/TimeSeries.pptx
+++ b/slides/TimeSeries.pptx
@@ -43,7 +43,8 @@
     <p:sldId id="312" r:id="rId37"/>
     <p:sldId id="313" r:id="rId38"/>
     <p:sldId id="314" r:id="rId39"/>
-    <p:sldId id="304" r:id="rId40"/>
+    <p:sldId id="317" r:id="rId40"/>
+    <p:sldId id="304" r:id="rId41"/>
   </p:sldIdLst>
   <p:sldSz cx="12192000" cy="6858000"/>
   <p:notesSz cx="6858000" cy="9144000"/>
@@ -3750,6 +3751,19 @@
               <a:t>Depending on time, market baskets. </a:t>
             </a:r>
           </a:p>
+          <a:p>
+            <a:r>
+              <a:rPr lang="en-US" dirty="0"/>
+              <a:t>Predictive modelling knowledge needs:</a:t>
+            </a:r>
+          </a:p>
+          <a:p>
+            <a:pPr lvl="1"/>
+            <a:r>
+              <a:rPr lang="en-US" dirty="0"/>
+              <a:t>Theory – this is one of the branches of analytics, and we need to understand basics. </a:t>
+            </a:r>
+          </a:p>
         </p:txBody>
       </p:sp>
     </p:spTree>
@@ -8984,7 +8998,7 @@
           <p:cNvPr id="2" name="Title 1">
             <a:extLst>
               <a:ext uri="{FF2B5EF4-FFF2-40B4-BE49-F238E27FC236}">
-                <a16:creationId xmlns:a16="http://schemas.microsoft.com/office/drawing/2014/main" id="{EB005B41-7F8D-2201-118B-2BBEE65A9AF4}"/>
+                <a16:creationId xmlns:a16="http://schemas.microsoft.com/office/drawing/2014/main" id="{B834AA3B-F008-C419-6F35-9D84A51E3DF1}"/>
               </a:ext>
             </a:extLst>
           </p:cNvPr>
@@ -9002,7 +9016,7 @@
           <a:p>
             <a:r>
               <a:rPr lang="en-US" dirty="0"/>
-              <a:t>Why Predict?</a:t>
+              <a:t>I want To Speak to Your Supervisor!</a:t>
             </a:r>
           </a:p>
         </p:txBody>
@@ -9012,7 +9026,7 @@
           <p:cNvPr id="3" name="Content Placeholder 2">
             <a:extLst>
               <a:ext uri="{FF2B5EF4-FFF2-40B4-BE49-F238E27FC236}">
-                <a16:creationId xmlns:a16="http://schemas.microsoft.com/office/drawing/2014/main" id="{4F35FC50-4793-56D1-34D2-881050DDA059}"/>
+                <a16:creationId xmlns:a16="http://schemas.microsoft.com/office/drawing/2014/main" id="{56557D79-3534-C0D4-BD0D-20CBDE7B522F}"/>
               </a:ext>
             </a:extLst>
           </p:cNvPr>
@@ -9025,8 +9039,8 @@
         </p:nvSpPr>
         <p:spPr>
           <a:xfrm>
-            <a:off x="1451579" y="1913710"/>
-            <a:ext cx="9603275" cy="4139772"/>
+            <a:off x="426203" y="2015732"/>
+            <a:ext cx="5669797" cy="4037749"/>
           </a:xfrm>
         </p:spPr>
         <p:txBody>
@@ -9035,66 +9049,124 @@
           <a:p>
             <a:r>
               <a:rPr lang="en-US" dirty="0"/>
-              <a:t>Prediction models are very common. </a:t>
-            </a:r>
-          </a:p>
-          <a:p>
-            <a:pPr lvl="1"/>
-            <a:r>
-              <a:rPr lang="en-US" dirty="0"/>
-              <a:t>Most common use of machine learning, we want to predict </a:t>
+              <a:t>Regression vs association highlights a split.</a:t>
+            </a:r>
+          </a:p>
+          <a:p>
+            <a:r>
+              <a:rPr lang="en-US" dirty="0"/>
+              <a:t>Supervised:</a:t>
+            </a:r>
+          </a:p>
+          <a:p>
+            <a:pPr lvl="1"/>
+            <a:r>
+              <a:rPr lang="en-US" dirty="0"/>
+              <a:t>We know the specific outcomes just not count. </a:t>
+            </a:r>
+          </a:p>
+          <a:p>
+            <a:pPr lvl="1"/>
+            <a:r>
+              <a:rPr lang="en-US" dirty="0"/>
+              <a:t>Customer yes/no, stock price, temperature. </a:t>
+            </a:r>
+          </a:p>
+          <a:p>
+            <a:pPr lvl="1"/>
+            <a:r>
+              <a:rPr lang="en-US" dirty="0"/>
+              <a:t>Regression and classification fall here. </a:t>
+            </a:r>
+          </a:p>
+          <a:p>
+            <a:r>
+              <a:rPr lang="en-US" dirty="0"/>
+              <a:t>Unsupervised:</a:t>
+            </a:r>
+          </a:p>
+          <a:p>
+            <a:pPr lvl="1"/>
+            <a:r>
+              <a:rPr lang="en-US" dirty="0"/>
+              <a:t>We don’t know the specific outcomes. </a:t>
+            </a:r>
+          </a:p>
+          <a:p>
+            <a:pPr lvl="1"/>
+            <a:r>
+              <a:rPr lang="en-US" dirty="0"/>
+              <a:t>We input data and get results, its exploratory. </a:t>
+            </a:r>
+          </a:p>
+          <a:p>
+            <a:pPr lvl="1"/>
+            <a:r>
+              <a:rPr lang="en-US" dirty="0"/>
+              <a:t>Clustering </a:t>
             </a:r>
             <a:r>
               <a:rPr lang="en-US"/>
-              <a:t>some unknown. </a:t>
+              <a:t>and association fall here. </a:t>
             </a:r>
             <a:endParaRPr lang="en-US" dirty="0"/>
           </a:p>
           <a:p>
-            <a:r>
-              <a:rPr lang="en-US" dirty="0"/>
-              <a:t>We can predict what we need from what we have. </a:t>
-            </a:r>
-          </a:p>
-          <a:p>
-            <a:pPr lvl="1"/>
-            <a:r>
-              <a:rPr lang="en-US" dirty="0"/>
-              <a:t>Loan – have applicant info, want to know if they’ll pay. </a:t>
-            </a:r>
-          </a:p>
-          <a:p>
-            <a:pPr lvl="1"/>
-            <a:r>
-              <a:rPr lang="en-US" dirty="0"/>
-              <a:t>Stock levels – we have past sales info, how many jars of pickles will we sell? </a:t>
-            </a:r>
-          </a:p>
-          <a:p>
-            <a:r>
-              <a:rPr lang="en-US" dirty="0"/>
-              <a:t>Since modern business generates data on everything, this can be quite powerful. </a:t>
-            </a:r>
-          </a:p>
-          <a:p>
-            <a:r>
-              <a:rPr lang="en-US" dirty="0"/>
-              <a:t>Many/most AI/ML related things are based on this concept. </a:t>
-            </a:r>
-          </a:p>
-          <a:p>
-            <a:pPr lvl="1"/>
-            <a:r>
-              <a:rPr lang="en-US" dirty="0"/>
-              <a:t>E.g. ChatGPT is (roughly) a stack of a billion linear regressions (kind of, not literally). </a:t>
-            </a:r>
-          </a:p>
-        </p:txBody>
-      </p:sp>
+            <a:endParaRPr lang="en-US" dirty="0"/>
+          </a:p>
+        </p:txBody>
+      </p:sp>
+      <p:pic>
+        <p:nvPicPr>
+          <p:cNvPr id="7170" name="Picture 2" descr="Supervised vs Unsupervised Learning">
+            <a:extLst>
+              <a:ext uri="{FF2B5EF4-FFF2-40B4-BE49-F238E27FC236}">
+                <a16:creationId xmlns:a16="http://schemas.microsoft.com/office/drawing/2014/main" id="{7CE8A57C-17CC-9C80-9B97-6E17FD518675}"/>
+              </a:ext>
+            </a:extLst>
+          </p:cNvPr>
+          <p:cNvPicPr>
+            <a:picLocks noChangeAspect="1" noChangeArrowheads="1"/>
+          </p:cNvPicPr>
+          <p:nvPr/>
+        </p:nvPicPr>
+        <p:blipFill>
+          <a:blip r:embed="rId2">
+            <a:extLst>
+              <a:ext uri="{28A0092B-C50C-407E-A947-70E740481C1C}">
+                <a14:useLocalDpi xmlns:a14="http://schemas.microsoft.com/office/drawing/2010/main" val="0"/>
+              </a:ext>
+            </a:extLst>
+          </a:blip>
+          <a:srcRect/>
+          <a:stretch>
+            <a:fillRect/>
+          </a:stretch>
+        </p:blipFill>
+        <p:spPr bwMode="auto">
+          <a:xfrm>
+            <a:off x="6106332" y="1557025"/>
+            <a:ext cx="6085668" cy="4890269"/>
+          </a:xfrm>
+          <a:prstGeom prst="rect">
+            <a:avLst/>
+          </a:prstGeom>
+          <a:noFill/>
+          <a:extLst>
+            <a:ext uri="{909E8E84-426E-40DD-AFC4-6F175D3DCCD1}">
+              <a14:hiddenFill xmlns:a14="http://schemas.microsoft.com/office/drawing/2010/main">
+                <a:solidFill>
+                  <a:srgbClr val="FFFFFF"/>
+                </a:solidFill>
+              </a14:hiddenFill>
+            </a:ext>
+          </a:extLst>
+        </p:spPr>
+      </p:pic>
     </p:spTree>
     <p:extLst>
       <p:ext uri="{BB962C8B-B14F-4D97-AF65-F5344CB8AC3E}">
-        <p14:creationId xmlns:p14="http://schemas.microsoft.com/office/powerpoint/2010/main" val="1624478135"/>
+        <p14:creationId xmlns:p14="http://schemas.microsoft.com/office/powerpoint/2010/main" val="1788905472"/>
       </p:ext>
     </p:extLst>
   </p:cSld>
@@ -9180,6 +9252,143 @@
     <p:extLst>
       <p:ext uri="{BB962C8B-B14F-4D97-AF65-F5344CB8AC3E}">
         <p14:creationId xmlns:p14="http://schemas.microsoft.com/office/powerpoint/2010/main" val="3614949151"/>
+      </p:ext>
+    </p:extLst>
+  </p:cSld>
+  <p:clrMapOvr>
+    <a:masterClrMapping/>
+  </p:clrMapOvr>
+</p:sld>
+</file>
+
+<file path=ppt/slides/slide40.xml><?xml version="1.0" encoding="utf-8"?>
+<p:sld xmlns:a="http://schemas.openxmlformats.org/drawingml/2006/main" xmlns:r="http://schemas.openxmlformats.org/officeDocument/2006/relationships" xmlns:p="http://schemas.openxmlformats.org/presentationml/2006/main">
+  <p:cSld>
+    <p:spTree>
+      <p:nvGrpSpPr>
+        <p:cNvPr id="1" name=""/>
+        <p:cNvGrpSpPr/>
+        <p:nvPr/>
+      </p:nvGrpSpPr>
+      <p:grpSpPr>
+        <a:xfrm>
+          <a:off x="0" y="0"/>
+          <a:ext cx="0" cy="0"/>
+          <a:chOff x="0" y="0"/>
+          <a:chExt cx="0" cy="0"/>
+        </a:xfrm>
+      </p:grpSpPr>
+      <p:sp>
+        <p:nvSpPr>
+          <p:cNvPr id="2" name="Title 1">
+            <a:extLst>
+              <a:ext uri="{FF2B5EF4-FFF2-40B4-BE49-F238E27FC236}">
+                <a16:creationId xmlns:a16="http://schemas.microsoft.com/office/drawing/2014/main" id="{EB005B41-7F8D-2201-118B-2BBEE65A9AF4}"/>
+              </a:ext>
+            </a:extLst>
+          </p:cNvPr>
+          <p:cNvSpPr>
+            <a:spLocks noGrp="1"/>
+          </p:cNvSpPr>
+          <p:nvPr>
+            <p:ph type="title"/>
+          </p:nvPr>
+        </p:nvSpPr>
+        <p:spPr/>
+        <p:txBody>
+          <a:bodyPr/>
+          <a:lstStyle/>
+          <a:p>
+            <a:r>
+              <a:rPr lang="en-US" dirty="0"/>
+              <a:t>Why Predict?</a:t>
+            </a:r>
+          </a:p>
+        </p:txBody>
+      </p:sp>
+      <p:sp>
+        <p:nvSpPr>
+          <p:cNvPr id="3" name="Content Placeholder 2">
+            <a:extLst>
+              <a:ext uri="{FF2B5EF4-FFF2-40B4-BE49-F238E27FC236}">
+                <a16:creationId xmlns:a16="http://schemas.microsoft.com/office/drawing/2014/main" id="{4F35FC50-4793-56D1-34D2-881050DDA059}"/>
+              </a:ext>
+            </a:extLst>
+          </p:cNvPr>
+          <p:cNvSpPr>
+            <a:spLocks noGrp="1"/>
+          </p:cNvSpPr>
+          <p:nvPr>
+            <p:ph idx="1"/>
+          </p:nvPr>
+        </p:nvSpPr>
+        <p:spPr>
+          <a:xfrm>
+            <a:off x="1451579" y="1913710"/>
+            <a:ext cx="9603275" cy="4139772"/>
+          </a:xfrm>
+        </p:spPr>
+        <p:txBody>
+          <a:bodyPr/>
+          <a:lstStyle/>
+          <a:p>
+            <a:r>
+              <a:rPr lang="en-US" dirty="0"/>
+              <a:t>Prediction models are very common. </a:t>
+            </a:r>
+          </a:p>
+          <a:p>
+            <a:pPr lvl="1"/>
+            <a:r>
+              <a:rPr lang="en-US" dirty="0"/>
+              <a:t>Most common use of machine learning, we want to predict some unknown. </a:t>
+            </a:r>
+          </a:p>
+          <a:p>
+            <a:r>
+              <a:rPr lang="en-US" dirty="0"/>
+              <a:t>We can predict what we need from what we have. </a:t>
+            </a:r>
+          </a:p>
+          <a:p>
+            <a:pPr lvl="1"/>
+            <a:r>
+              <a:rPr lang="en-US" dirty="0"/>
+              <a:t>Loan – have applicant info, want to know if they’ll pay. </a:t>
+            </a:r>
+          </a:p>
+          <a:p>
+            <a:pPr lvl="1"/>
+            <a:r>
+              <a:rPr lang="en-US" dirty="0"/>
+              <a:t>Stock levels – we have past sales info, how many jars of pickles will we sell? </a:t>
+            </a:r>
+          </a:p>
+          <a:p>
+            <a:r>
+              <a:rPr lang="en-US" dirty="0"/>
+              <a:t>Since modern business generates data on everything, this can be quite powerful. </a:t>
+            </a:r>
+          </a:p>
+          <a:p>
+            <a:r>
+              <a:rPr lang="en-US" dirty="0"/>
+              <a:t>Many/most AI/ML related things are based on this concept. </a:t>
+            </a:r>
+          </a:p>
+          <a:p>
+            <a:pPr lvl="1"/>
+            <a:r>
+              <a:rPr lang="en-US" dirty="0"/>
+              <a:t>E.g. ChatGPT is (roughly) a stack of a billion linear regressions (kind of, not literally). </a:t>
+            </a:r>
+          </a:p>
+        </p:txBody>
+      </p:sp>
+    </p:spTree>
+    <p:extLst>
+      <p:ext uri="{BB962C8B-B14F-4D97-AF65-F5344CB8AC3E}">
+        <p14:creationId xmlns:p14="http://schemas.microsoft.com/office/powerpoint/2010/main" val="1624478135"/>
       </p:ext>
     </p:extLst>
   </p:cSld>

--- a/slides/TimeSeries.pptx
+++ b/slides/TimeSeries.pptx
@@ -10,41 +10,43 @@
     <p:sldId id="316" r:id="rId4"/>
     <p:sldId id="256" r:id="rId5"/>
     <p:sldId id="270" r:id="rId6"/>
-    <p:sldId id="297" r:id="rId7"/>
-    <p:sldId id="288" r:id="rId8"/>
-    <p:sldId id="271" r:id="rId9"/>
-    <p:sldId id="272" r:id="rId10"/>
-    <p:sldId id="258" r:id="rId11"/>
-    <p:sldId id="261" r:id="rId12"/>
-    <p:sldId id="298" r:id="rId13"/>
-    <p:sldId id="299" r:id="rId14"/>
-    <p:sldId id="294" r:id="rId15"/>
-    <p:sldId id="262" r:id="rId16"/>
-    <p:sldId id="284" r:id="rId17"/>
-    <p:sldId id="300" r:id="rId18"/>
-    <p:sldId id="257" r:id="rId19"/>
-    <p:sldId id="290" r:id="rId20"/>
-    <p:sldId id="273" r:id="rId21"/>
-    <p:sldId id="274" r:id="rId22"/>
-    <p:sldId id="267" r:id="rId23"/>
-    <p:sldId id="301" r:id="rId24"/>
-    <p:sldId id="276" r:id="rId25"/>
-    <p:sldId id="278" r:id="rId26"/>
-    <p:sldId id="269" r:id="rId27"/>
-    <p:sldId id="302" r:id="rId28"/>
-    <p:sldId id="308" r:id="rId29"/>
-    <p:sldId id="303" r:id="rId30"/>
-    <p:sldId id="305" r:id="rId31"/>
-    <p:sldId id="306" r:id="rId32"/>
-    <p:sldId id="307" r:id="rId33"/>
-    <p:sldId id="309" r:id="rId34"/>
-    <p:sldId id="310" r:id="rId35"/>
-    <p:sldId id="311" r:id="rId36"/>
-    <p:sldId id="312" r:id="rId37"/>
-    <p:sldId id="313" r:id="rId38"/>
-    <p:sldId id="314" r:id="rId39"/>
-    <p:sldId id="317" r:id="rId40"/>
-    <p:sldId id="304" r:id="rId41"/>
+    <p:sldId id="319" r:id="rId7"/>
+    <p:sldId id="297" r:id="rId8"/>
+    <p:sldId id="288" r:id="rId9"/>
+    <p:sldId id="271" r:id="rId10"/>
+    <p:sldId id="272" r:id="rId11"/>
+    <p:sldId id="258" r:id="rId12"/>
+    <p:sldId id="261" r:id="rId13"/>
+    <p:sldId id="298" r:id="rId14"/>
+    <p:sldId id="299" r:id="rId15"/>
+    <p:sldId id="294" r:id="rId16"/>
+    <p:sldId id="262" r:id="rId17"/>
+    <p:sldId id="284" r:id="rId18"/>
+    <p:sldId id="300" r:id="rId19"/>
+    <p:sldId id="257" r:id="rId20"/>
+    <p:sldId id="290" r:id="rId21"/>
+    <p:sldId id="273" r:id="rId22"/>
+    <p:sldId id="274" r:id="rId23"/>
+    <p:sldId id="267" r:id="rId24"/>
+    <p:sldId id="301" r:id="rId25"/>
+    <p:sldId id="276" r:id="rId26"/>
+    <p:sldId id="278" r:id="rId27"/>
+    <p:sldId id="269" r:id="rId28"/>
+    <p:sldId id="302" r:id="rId29"/>
+    <p:sldId id="308" r:id="rId30"/>
+    <p:sldId id="303" r:id="rId31"/>
+    <p:sldId id="305" r:id="rId32"/>
+    <p:sldId id="306" r:id="rId33"/>
+    <p:sldId id="307" r:id="rId34"/>
+    <p:sldId id="309" r:id="rId35"/>
+    <p:sldId id="318" r:id="rId36"/>
+    <p:sldId id="310" r:id="rId37"/>
+    <p:sldId id="311" r:id="rId38"/>
+    <p:sldId id="312" r:id="rId39"/>
+    <p:sldId id="313" r:id="rId40"/>
+    <p:sldId id="314" r:id="rId41"/>
+    <p:sldId id="317" r:id="rId42"/>
+    <p:sldId id="304" r:id="rId43"/>
   </p:sldIdLst>
   <p:sldSz cx="12192000" cy="6858000"/>
   <p:notesSz cx="6858000" cy="9144000"/>
@@ -3727,6 +3729,12 @@
           <a:p>
             <a:r>
               <a:rPr lang="en-US" dirty="0"/>
+              <a:t>You guys seemed to do much better on the quiz than version 1. </a:t>
+            </a:r>
+          </a:p>
+          <a:p>
+            <a:r>
+              <a:rPr lang="en-US" dirty="0"/>
               <a:t>Predictive modelling in Tableau. </a:t>
             </a:r>
           </a:p>
@@ -3752,6 +3760,34 @@
             </a:r>
           </a:p>
           <a:p>
+            <a:pPr lvl="1"/>
+            <a:r>
+              <a:rPr lang="en-US" dirty="0"/>
+              <a:t>Data – from </a:t>
+            </a:r>
+            <a:r>
+              <a:rPr lang="en-US" dirty="0" err="1"/>
+              <a:t>repositotory</a:t>
+            </a:r>
+            <a:r>
+              <a:rPr lang="en-US" dirty="0"/>
+              <a:t>: </a:t>
+            </a:r>
+            <a:r>
+              <a:rPr lang="en-US" dirty="0" err="1"/>
+              <a:t>stock_data.csv</a:t>
+            </a:r>
+            <a:r>
+              <a:rPr lang="en-US" dirty="0"/>
+              <a:t>, </a:t>
+            </a:r>
+            <a:r>
+              <a:rPr lang="en-US" dirty="0" err="1"/>
+              <a:t>bodyfat.csv</a:t>
+            </a:r>
+            <a:endParaRPr lang="en-US" dirty="0"/>
+          </a:p>
+          <a:p>
             <a:r>
               <a:rPr lang="en-US" dirty="0"/>
               <a:t>Predictive modelling knowledge needs:</a:t>
@@ -3762,6 +3798,13 @@
             <a:r>
               <a:rPr lang="en-US" dirty="0"/>
               <a:t>Theory – this is one of the branches of analytics, and we need to understand basics. </a:t>
+            </a:r>
+          </a:p>
+          <a:p>
+            <a:pPr lvl="1"/>
+            <a:r>
+              <a:rPr lang="en-US" dirty="0"/>
+              <a:t>Practice – Tableau has some limited predictive tools, if one makes sense, we can use. </a:t>
             </a:r>
           </a:p>
         </p:txBody>
@@ -3801,6 +3844,182 @@
           <p:cNvPr id="2" name="Title 1">
             <a:extLst>
               <a:ext uri="{FF2B5EF4-FFF2-40B4-BE49-F238E27FC236}">
+                <a16:creationId xmlns:a16="http://schemas.microsoft.com/office/drawing/2014/main" id="{82AE3AE3-61AA-C5C4-4A48-DBE9FABF829F}"/>
+              </a:ext>
+            </a:extLst>
+          </p:cNvPr>
+          <p:cNvSpPr>
+            <a:spLocks noGrp="1"/>
+          </p:cNvSpPr>
+          <p:nvPr>
+            <p:ph type="title"/>
+          </p:nvPr>
+        </p:nvSpPr>
+        <p:spPr>
+          <a:xfrm>
+            <a:off x="145143" y="804519"/>
+            <a:ext cx="4845957" cy="1049235"/>
+          </a:xfrm>
+        </p:spPr>
+        <p:txBody>
+          <a:bodyPr/>
+          <a:lstStyle/>
+          <a:p>
+            <a:r>
+              <a:rPr lang="en-US" dirty="0"/>
+              <a:t>Time Series Components</a:t>
+            </a:r>
+          </a:p>
+        </p:txBody>
+      </p:sp>
+      <p:sp>
+        <p:nvSpPr>
+          <p:cNvPr id="3" name="Content Placeholder 2">
+            <a:extLst>
+              <a:ext uri="{FF2B5EF4-FFF2-40B4-BE49-F238E27FC236}">
+                <a16:creationId xmlns:a16="http://schemas.microsoft.com/office/drawing/2014/main" id="{823CBDEA-9B52-1B56-8C54-684D056D5886}"/>
+              </a:ext>
+            </a:extLst>
+          </p:cNvPr>
+          <p:cNvSpPr>
+            <a:spLocks noGrp="1"/>
+          </p:cNvSpPr>
+          <p:nvPr>
+            <p:ph idx="1"/>
+          </p:nvPr>
+        </p:nvSpPr>
+        <p:spPr>
+          <a:xfrm>
+            <a:off x="145143" y="1853754"/>
+            <a:ext cx="4845957" cy="4199727"/>
+          </a:xfrm>
+        </p:spPr>
+        <p:txBody>
+          <a:bodyPr/>
+          <a:lstStyle/>
+          <a:p>
+            <a:r>
+              <a:rPr lang="en-US" dirty="0"/>
+              <a:t>The basic idea is that if we can extract each component of the time series’ variation, our model can more easily project each. </a:t>
+            </a:r>
+          </a:p>
+          <a:p>
+            <a:r>
+              <a:rPr lang="en-US" dirty="0"/>
+              <a:t>Example plots:</a:t>
+            </a:r>
+          </a:p>
+          <a:p>
+            <a:pPr lvl="1"/>
+            <a:r>
+              <a:rPr lang="en-US" dirty="0"/>
+              <a:t>Trend – linear increase. </a:t>
+            </a:r>
+          </a:p>
+          <a:p>
+            <a:pPr lvl="1"/>
+            <a:r>
+              <a:rPr lang="en-US" dirty="0"/>
+              <a:t>Seasonality – predictable waves. </a:t>
+            </a:r>
+          </a:p>
+          <a:p>
+            <a:pPr lvl="1"/>
+            <a:r>
+              <a:rPr lang="en-US" dirty="0"/>
+              <a:t>Random – “other” variation. </a:t>
+            </a:r>
+          </a:p>
+          <a:p>
+            <a:r>
+              <a:rPr lang="en-US" dirty="0"/>
+              <a:t>Note: different models may capture slightly different components. </a:t>
+            </a:r>
+          </a:p>
+        </p:txBody>
+      </p:sp>
+      <p:pic>
+        <p:nvPicPr>
+          <p:cNvPr id="2050" name="Picture 2" descr="Time series graphs with random, seasonal and trend components in cluster 1  | Download Scientific Diagram">
+            <a:extLst>
+              <a:ext uri="{FF2B5EF4-FFF2-40B4-BE49-F238E27FC236}">
+                <a16:creationId xmlns:a16="http://schemas.microsoft.com/office/drawing/2014/main" id="{245F8238-6B60-6A10-C7A0-A1CBA8A26730}"/>
+              </a:ext>
+            </a:extLst>
+          </p:cNvPr>
+          <p:cNvPicPr>
+            <a:picLocks noChangeAspect="1" noChangeArrowheads="1"/>
+          </p:cNvPicPr>
+          <p:nvPr/>
+        </p:nvPicPr>
+        <p:blipFill>
+          <a:blip r:embed="rId2">
+            <a:extLst>
+              <a:ext uri="{28A0092B-C50C-407E-A947-70E740481C1C}">
+                <a14:useLocalDpi xmlns:a14="http://schemas.microsoft.com/office/drawing/2010/main" val="0"/>
+              </a:ext>
+            </a:extLst>
+          </a:blip>
+          <a:srcRect/>
+          <a:stretch>
+            <a:fillRect/>
+          </a:stretch>
+        </p:blipFill>
+        <p:spPr bwMode="auto">
+          <a:xfrm>
+            <a:off x="4991100" y="196850"/>
+            <a:ext cx="7200900" cy="6464300"/>
+          </a:xfrm>
+          <a:prstGeom prst="rect">
+            <a:avLst/>
+          </a:prstGeom>
+          <a:noFill/>
+          <a:extLst>
+            <a:ext uri="{909E8E84-426E-40DD-AFC4-6F175D3DCCD1}">
+              <a14:hiddenFill xmlns:a14="http://schemas.microsoft.com/office/drawing/2010/main">
+                <a:solidFill>
+                  <a:srgbClr val="FFFFFF"/>
+                </a:solidFill>
+              </a14:hiddenFill>
+            </a:ext>
+          </a:extLst>
+        </p:spPr>
+      </p:pic>
+    </p:spTree>
+    <p:extLst>
+      <p:ext uri="{BB962C8B-B14F-4D97-AF65-F5344CB8AC3E}">
+        <p14:creationId xmlns:p14="http://schemas.microsoft.com/office/powerpoint/2010/main" val="1903044234"/>
+      </p:ext>
+    </p:extLst>
+  </p:cSld>
+  <p:clrMapOvr>
+    <a:masterClrMapping/>
+  </p:clrMapOvr>
+</p:sld>
+</file>
+
+<file path=ppt/slides/slide11.xml><?xml version="1.0" encoding="utf-8"?>
+<p:sld xmlns:a="http://schemas.openxmlformats.org/drawingml/2006/main" xmlns:r="http://schemas.openxmlformats.org/officeDocument/2006/relationships" xmlns:p="http://schemas.openxmlformats.org/presentationml/2006/main">
+  <p:cSld>
+    <p:spTree>
+      <p:nvGrpSpPr>
+        <p:cNvPr id="1" name=""/>
+        <p:cNvGrpSpPr/>
+        <p:nvPr/>
+      </p:nvGrpSpPr>
+      <p:grpSpPr>
+        <a:xfrm>
+          <a:off x="0" y="0"/>
+          <a:ext cx="0" cy="0"/>
+          <a:chOff x="0" y="0"/>
+          <a:chExt cx="0" cy="0"/>
+        </a:xfrm>
+      </p:grpSpPr>
+      <p:sp>
+        <p:nvSpPr>
+          <p:cNvPr id="2" name="Title 1">
+            <a:extLst>
+              <a:ext uri="{FF2B5EF4-FFF2-40B4-BE49-F238E27FC236}">
                 <a16:creationId xmlns:a16="http://schemas.microsoft.com/office/drawing/2014/main" id="{5747E6BB-1E1D-AF4C-8CE0-6495F0739AD3}"/>
               </a:ext>
             </a:extLst>
@@ -3928,7 +4147,7 @@
 </p:sld>
 </file>
 
-<file path=ppt/slides/slide11.xml><?xml version="1.0" encoding="utf-8"?>
+<file path=ppt/slides/slide12.xml><?xml version="1.0" encoding="utf-8"?>
 <p:sld xmlns:a="http://schemas.openxmlformats.org/drawingml/2006/main" xmlns:r="http://schemas.openxmlformats.org/officeDocument/2006/relationships" xmlns:p="http://schemas.openxmlformats.org/presentationml/2006/main">
   <p:cSld>
     <p:spTree>
@@ -4055,7 +4274,7 @@
 </p:sld>
 </file>
 
-<file path=ppt/slides/slide12.xml><?xml version="1.0" encoding="utf-8"?>
+<file path=ppt/slides/slide13.xml><?xml version="1.0" encoding="utf-8"?>
 <p:sld xmlns:a="http://schemas.openxmlformats.org/drawingml/2006/main" xmlns:r="http://schemas.openxmlformats.org/officeDocument/2006/relationships" xmlns:p="http://schemas.openxmlformats.org/presentationml/2006/main">
   <p:cSld>
     <p:spTree>
@@ -4201,7 +4420,7 @@
 </p:sld>
 </file>
 
-<file path=ppt/slides/slide13.xml><?xml version="1.0" encoding="utf-8"?>
+<file path=ppt/slides/slide14.xml><?xml version="1.0" encoding="utf-8"?>
 <p:sld xmlns:a="http://schemas.openxmlformats.org/drawingml/2006/main" xmlns:r="http://schemas.openxmlformats.org/officeDocument/2006/relationships" xmlns:p="http://schemas.openxmlformats.org/presentationml/2006/main">
   <p:cSld>
     <p:spTree>
@@ -4430,7 +4649,7 @@
 </p:sld>
 </file>
 
-<file path=ppt/slides/slide14.xml><?xml version="1.0" encoding="utf-8"?>
+<file path=ppt/slides/slide15.xml><?xml version="1.0" encoding="utf-8"?>
 <p:sld xmlns:a="http://schemas.openxmlformats.org/drawingml/2006/main" xmlns:r="http://schemas.openxmlformats.org/officeDocument/2006/relationships" xmlns:p="http://schemas.openxmlformats.org/presentationml/2006/main">
   <p:cSld>
     <p:spTree>
@@ -4609,8 +4828,8 @@
 </p:sld>
 </file>
 
-<file path=ppt/slides/slide15.xml><?xml version="1.0" encoding="utf-8"?>
-<p:sld xmlns:a="http://schemas.openxmlformats.org/drawingml/2006/main" xmlns:r="http://schemas.openxmlformats.org/officeDocument/2006/relationships" xmlns:p="http://schemas.openxmlformats.org/presentationml/2006/main">
+<file path=ppt/slides/slide16.xml><?xml version="1.0" encoding="utf-8"?>
+<p:sld xmlns:a="http://schemas.openxmlformats.org/drawingml/2006/main" xmlns:r="http://schemas.openxmlformats.org/officeDocument/2006/relationships" xmlns:p="http://schemas.openxmlformats.org/presentationml/2006/main" show="0">
   <p:cSld>
     <p:bg>
       <p:bgPr>
@@ -5053,8 +5272,8 @@
 </p:sld>
 </file>
 
-<file path=ppt/slides/slide16.xml><?xml version="1.0" encoding="utf-8"?>
-<p:sld xmlns:a="http://schemas.openxmlformats.org/drawingml/2006/main" xmlns:r="http://schemas.openxmlformats.org/officeDocument/2006/relationships" xmlns:p="http://schemas.openxmlformats.org/presentationml/2006/main">
+<file path=ppt/slides/slide17.xml><?xml version="1.0" encoding="utf-8"?>
+<p:sld xmlns:a="http://schemas.openxmlformats.org/drawingml/2006/main" xmlns:r="http://schemas.openxmlformats.org/officeDocument/2006/relationships" xmlns:p="http://schemas.openxmlformats.org/presentationml/2006/main" show="0">
   <p:cSld>
     <p:spTree>
       <p:nvGrpSpPr>
@@ -5205,92 +5424,6 @@
 </p:sld>
 </file>
 
-<file path=ppt/slides/slide17.xml><?xml version="1.0" encoding="utf-8"?>
-<p:sld xmlns:a="http://schemas.openxmlformats.org/drawingml/2006/main" xmlns:r="http://schemas.openxmlformats.org/officeDocument/2006/relationships" xmlns:p="http://schemas.openxmlformats.org/presentationml/2006/main">
-  <p:cSld>
-    <p:spTree>
-      <p:nvGrpSpPr>
-        <p:cNvPr id="1" name=""/>
-        <p:cNvGrpSpPr/>
-        <p:nvPr/>
-      </p:nvGrpSpPr>
-      <p:grpSpPr>
-        <a:xfrm>
-          <a:off x="0" y="0"/>
-          <a:ext cx="0" cy="0"/>
-          <a:chOff x="0" y="0"/>
-          <a:chExt cx="0" cy="0"/>
-        </a:xfrm>
-      </p:grpSpPr>
-      <p:sp>
-        <p:nvSpPr>
-          <p:cNvPr id="2" name="Title 1">
-            <a:extLst>
-              <a:ext uri="{FF2B5EF4-FFF2-40B4-BE49-F238E27FC236}">
-                <a16:creationId xmlns:a16="http://schemas.microsoft.com/office/drawing/2014/main" id="{F457508E-ACC1-F5E3-385A-309AD7697D7D}"/>
-              </a:ext>
-            </a:extLst>
-          </p:cNvPr>
-          <p:cNvSpPr>
-            <a:spLocks noGrp="1"/>
-          </p:cNvSpPr>
-          <p:nvPr>
-            <p:ph type="title"/>
-          </p:nvPr>
-        </p:nvSpPr>
-        <p:spPr/>
-        <p:txBody>
-          <a:bodyPr/>
-          <a:lstStyle/>
-          <a:p>
-            <a:r>
-              <a:rPr lang="en-US" dirty="0"/>
-              <a:t>Some Real Life Time-Series Examples</a:t>
-            </a:r>
-          </a:p>
-        </p:txBody>
-      </p:sp>
-      <p:sp>
-        <p:nvSpPr>
-          <p:cNvPr id="3" name="Content Placeholder 2">
-            <a:extLst>
-              <a:ext uri="{FF2B5EF4-FFF2-40B4-BE49-F238E27FC236}">
-                <a16:creationId xmlns:a16="http://schemas.microsoft.com/office/drawing/2014/main" id="{50B3798E-220A-5F03-0558-93C0B0660E53}"/>
-              </a:ext>
-            </a:extLst>
-          </p:cNvPr>
-          <p:cNvSpPr>
-            <a:spLocks noGrp="1"/>
-          </p:cNvSpPr>
-          <p:nvPr>
-            <p:ph idx="1"/>
-          </p:nvPr>
-        </p:nvSpPr>
-        <p:spPr/>
-        <p:txBody>
-          <a:bodyPr/>
-          <a:lstStyle/>
-          <a:p>
-            <a:r>
-              <a:rPr lang="en-US" dirty="0"/>
-              <a:t>We don’t need to know these deeply, just the basic concept. </a:t>
-            </a:r>
-          </a:p>
-        </p:txBody>
-      </p:sp>
-    </p:spTree>
-    <p:extLst>
-      <p:ext uri="{BB962C8B-B14F-4D97-AF65-F5344CB8AC3E}">
-        <p14:creationId xmlns:p14="http://schemas.microsoft.com/office/powerpoint/2010/main" val="1293323489"/>
-      </p:ext>
-    </p:extLst>
-  </p:cSld>
-  <p:clrMapOvr>
-    <a:masterClrMapping/>
-  </p:clrMapOvr>
-</p:sld>
-</file>
-
 <file path=ppt/slides/slide18.xml><?xml version="1.0" encoding="utf-8"?>
 <p:sld xmlns:a="http://schemas.openxmlformats.org/drawingml/2006/main" xmlns:r="http://schemas.openxmlformats.org/officeDocument/2006/relationships" xmlns:p="http://schemas.openxmlformats.org/presentationml/2006/main">
   <p:cSld>
@@ -5313,6 +5446,92 @@
           <p:cNvPr id="2" name="Title 1">
             <a:extLst>
               <a:ext uri="{FF2B5EF4-FFF2-40B4-BE49-F238E27FC236}">
+                <a16:creationId xmlns:a16="http://schemas.microsoft.com/office/drawing/2014/main" id="{F457508E-ACC1-F5E3-385A-309AD7697D7D}"/>
+              </a:ext>
+            </a:extLst>
+          </p:cNvPr>
+          <p:cNvSpPr>
+            <a:spLocks noGrp="1"/>
+          </p:cNvSpPr>
+          <p:nvPr>
+            <p:ph type="title"/>
+          </p:nvPr>
+        </p:nvSpPr>
+        <p:spPr/>
+        <p:txBody>
+          <a:bodyPr/>
+          <a:lstStyle/>
+          <a:p>
+            <a:r>
+              <a:rPr lang="en-US" dirty="0"/>
+              <a:t>Some Real Life Time-Series Examples</a:t>
+            </a:r>
+          </a:p>
+        </p:txBody>
+      </p:sp>
+      <p:sp>
+        <p:nvSpPr>
+          <p:cNvPr id="3" name="Content Placeholder 2">
+            <a:extLst>
+              <a:ext uri="{FF2B5EF4-FFF2-40B4-BE49-F238E27FC236}">
+                <a16:creationId xmlns:a16="http://schemas.microsoft.com/office/drawing/2014/main" id="{50B3798E-220A-5F03-0558-93C0B0660E53}"/>
+              </a:ext>
+            </a:extLst>
+          </p:cNvPr>
+          <p:cNvSpPr>
+            <a:spLocks noGrp="1"/>
+          </p:cNvSpPr>
+          <p:nvPr>
+            <p:ph idx="1"/>
+          </p:nvPr>
+        </p:nvSpPr>
+        <p:spPr/>
+        <p:txBody>
+          <a:bodyPr/>
+          <a:lstStyle/>
+          <a:p>
+            <a:r>
+              <a:rPr lang="en-US" dirty="0"/>
+              <a:t>We don’t need to know these deeply, just the basic concept. </a:t>
+            </a:r>
+          </a:p>
+        </p:txBody>
+      </p:sp>
+    </p:spTree>
+    <p:extLst>
+      <p:ext uri="{BB962C8B-B14F-4D97-AF65-F5344CB8AC3E}">
+        <p14:creationId xmlns:p14="http://schemas.microsoft.com/office/powerpoint/2010/main" val="1293323489"/>
+      </p:ext>
+    </p:extLst>
+  </p:cSld>
+  <p:clrMapOvr>
+    <a:masterClrMapping/>
+  </p:clrMapOvr>
+</p:sld>
+</file>
+
+<file path=ppt/slides/slide19.xml><?xml version="1.0" encoding="utf-8"?>
+<p:sld xmlns:a="http://schemas.openxmlformats.org/drawingml/2006/main" xmlns:r="http://schemas.openxmlformats.org/officeDocument/2006/relationships" xmlns:p="http://schemas.openxmlformats.org/presentationml/2006/main">
+  <p:cSld>
+    <p:spTree>
+      <p:nvGrpSpPr>
+        <p:cNvPr id="1" name=""/>
+        <p:cNvGrpSpPr/>
+        <p:nvPr/>
+      </p:nvGrpSpPr>
+      <p:grpSpPr>
+        <a:xfrm>
+          <a:off x="0" y="0"/>
+          <a:ext cx="0" cy="0"/>
+          <a:chOff x="0" y="0"/>
+          <a:chExt cx="0" cy="0"/>
+        </a:xfrm>
+      </p:grpSpPr>
+      <p:sp>
+        <p:nvSpPr>
+          <p:cNvPr id="2" name="Title 1">
+            <a:extLst>
+              <a:ext uri="{FF2B5EF4-FFF2-40B4-BE49-F238E27FC236}">
                 <a16:creationId xmlns:a16="http://schemas.microsoft.com/office/drawing/2014/main" id="{48D6F2E3-C441-EA45-AFB0-16746E9DB104}"/>
               </a:ext>
             </a:extLst>
@@ -5444,7 +5663,144 @@
 </p:sld>
 </file>
 
-<file path=ppt/slides/slide19.xml><?xml version="1.0" encoding="utf-8"?>
+<file path=ppt/slides/slide2.xml><?xml version="1.0" encoding="utf-8"?>
+<p:sld xmlns:a="http://schemas.openxmlformats.org/drawingml/2006/main" xmlns:r="http://schemas.openxmlformats.org/officeDocument/2006/relationships" xmlns:p="http://schemas.openxmlformats.org/presentationml/2006/main">
+  <p:cSld>
+    <p:spTree>
+      <p:nvGrpSpPr>
+        <p:cNvPr id="1" name=""/>
+        <p:cNvGrpSpPr/>
+        <p:nvPr/>
+      </p:nvGrpSpPr>
+      <p:grpSpPr>
+        <a:xfrm>
+          <a:off x="0" y="0"/>
+          <a:ext cx="0" cy="0"/>
+          <a:chOff x="0" y="0"/>
+          <a:chExt cx="0" cy="0"/>
+        </a:xfrm>
+      </p:grpSpPr>
+      <p:sp>
+        <p:nvSpPr>
+          <p:cNvPr id="2" name="Title 1">
+            <a:extLst>
+              <a:ext uri="{FF2B5EF4-FFF2-40B4-BE49-F238E27FC236}">
+                <a16:creationId xmlns:a16="http://schemas.microsoft.com/office/drawing/2014/main" id="{7AB2EAB8-6A98-25C7-636D-951FD7BDA693}"/>
+              </a:ext>
+            </a:extLst>
+          </p:cNvPr>
+          <p:cNvSpPr>
+            <a:spLocks noGrp="1"/>
+          </p:cNvSpPr>
+          <p:nvPr>
+            <p:ph type="title"/>
+          </p:nvPr>
+        </p:nvSpPr>
+        <p:spPr/>
+        <p:txBody>
+          <a:bodyPr/>
+          <a:lstStyle/>
+          <a:p>
+            <a:r>
+              <a:rPr lang="en-US" dirty="0"/>
+              <a:t>Proposal</a:t>
+            </a:r>
+          </a:p>
+        </p:txBody>
+      </p:sp>
+      <p:sp>
+        <p:nvSpPr>
+          <p:cNvPr id="3" name="Content Placeholder 2">
+            <a:extLst>
+              <a:ext uri="{FF2B5EF4-FFF2-40B4-BE49-F238E27FC236}">
+                <a16:creationId xmlns:a16="http://schemas.microsoft.com/office/drawing/2014/main" id="{BF8ADB35-727C-FA84-D081-FB1BC3236E9C}"/>
+              </a:ext>
+            </a:extLst>
+          </p:cNvPr>
+          <p:cNvSpPr>
+            <a:spLocks noGrp="1"/>
+          </p:cNvSpPr>
+          <p:nvPr>
+            <p:ph idx="1"/>
+          </p:nvPr>
+        </p:nvSpPr>
+        <p:spPr>
+          <a:xfrm>
+            <a:off x="1451579" y="1853754"/>
+            <a:ext cx="9603275" cy="4199727"/>
+          </a:xfrm>
+        </p:spPr>
+        <p:txBody>
+          <a:bodyPr/>
+          <a:lstStyle/>
+          <a:p>
+            <a:r>
+              <a:rPr lang="en-US" dirty="0"/>
+              <a:t>The project proposal is simple, almost free marks, and important. </a:t>
+            </a:r>
+          </a:p>
+          <a:p>
+            <a:r>
+              <a:rPr lang="en-US" dirty="0"/>
+              <a:t>You need to write your plan to do the project. </a:t>
+            </a:r>
+          </a:p>
+          <a:p>
+            <a:pPr lvl="1"/>
+            <a:r>
+              <a:rPr lang="en-US" dirty="0"/>
+              <a:t>I’ll look at it to see if it sounds reasonable and doable – I’m mostly checking to raise concerns on what might not work out going forward.</a:t>
+            </a:r>
+          </a:p>
+          <a:p>
+            <a:pPr lvl="1"/>
+            <a:r>
+              <a:rPr lang="en-US" dirty="0"/>
+              <a:t>Much more importantly, you all need to sketch out and agree on a plan. </a:t>
+            </a:r>
+          </a:p>
+          <a:p>
+            <a:r>
+              <a:rPr lang="en-US" dirty="0"/>
+              <a:t>Consider backup for anything you don’t know works. </a:t>
+            </a:r>
+          </a:p>
+          <a:p>
+            <a:pPr lvl="1"/>
+            <a:r>
+              <a:rPr lang="en-US" dirty="0"/>
+              <a:t>If you plan on making/showing X, make sure you can with the data before settling. </a:t>
+            </a:r>
+          </a:p>
+          <a:p>
+            <a:pPr lvl="1"/>
+            <a:r>
+              <a:rPr lang="en-US" dirty="0"/>
+              <a:t>There may be issues with granularity, data types, etc.. That may require work to solve. </a:t>
+            </a:r>
+          </a:p>
+          <a:p>
+            <a:r>
+              <a:rPr lang="en-US" dirty="0"/>
+              <a:t>Better to start with something that’s a bit too broad and trim if everything works. </a:t>
+            </a:r>
+          </a:p>
+        </p:txBody>
+      </p:sp>
+    </p:spTree>
+    <p:extLst>
+      <p:ext uri="{BB962C8B-B14F-4D97-AF65-F5344CB8AC3E}">
+        <p14:creationId xmlns:p14="http://schemas.microsoft.com/office/powerpoint/2010/main" val="3325367046"/>
+      </p:ext>
+    </p:extLst>
+  </p:cSld>
+  <p:clrMapOvr>
+    <a:masterClrMapping/>
+  </p:clrMapOvr>
+</p:sld>
+</file>
+
+<file path=ppt/slides/slide20.xml><?xml version="1.0" encoding="utf-8"?>
 <p:sld xmlns:a="http://schemas.openxmlformats.org/drawingml/2006/main" xmlns:r="http://schemas.openxmlformats.org/officeDocument/2006/relationships" xmlns:p="http://schemas.openxmlformats.org/presentationml/2006/main">
   <p:cSld>
     <p:bg>
@@ -5614,268 +5970,6 @@
 </p:sld>
 </file>
 
-<file path=ppt/slides/slide2.xml><?xml version="1.0" encoding="utf-8"?>
-<p:sld xmlns:a="http://schemas.openxmlformats.org/drawingml/2006/main" xmlns:r="http://schemas.openxmlformats.org/officeDocument/2006/relationships" xmlns:p="http://schemas.openxmlformats.org/presentationml/2006/main">
-  <p:cSld>
-    <p:spTree>
-      <p:nvGrpSpPr>
-        <p:cNvPr id="1" name=""/>
-        <p:cNvGrpSpPr/>
-        <p:nvPr/>
-      </p:nvGrpSpPr>
-      <p:grpSpPr>
-        <a:xfrm>
-          <a:off x="0" y="0"/>
-          <a:ext cx="0" cy="0"/>
-          <a:chOff x="0" y="0"/>
-          <a:chExt cx="0" cy="0"/>
-        </a:xfrm>
-      </p:grpSpPr>
-      <p:sp>
-        <p:nvSpPr>
-          <p:cNvPr id="2" name="Title 1">
-            <a:extLst>
-              <a:ext uri="{FF2B5EF4-FFF2-40B4-BE49-F238E27FC236}">
-                <a16:creationId xmlns:a16="http://schemas.microsoft.com/office/drawing/2014/main" id="{7AB2EAB8-6A98-25C7-636D-951FD7BDA693}"/>
-              </a:ext>
-            </a:extLst>
-          </p:cNvPr>
-          <p:cNvSpPr>
-            <a:spLocks noGrp="1"/>
-          </p:cNvSpPr>
-          <p:nvPr>
-            <p:ph type="title"/>
-          </p:nvPr>
-        </p:nvSpPr>
-        <p:spPr/>
-        <p:txBody>
-          <a:bodyPr/>
-          <a:lstStyle/>
-          <a:p>
-            <a:r>
-              <a:rPr lang="en-US" dirty="0"/>
-              <a:t>Proposal</a:t>
-            </a:r>
-          </a:p>
-        </p:txBody>
-      </p:sp>
-      <p:sp>
-        <p:nvSpPr>
-          <p:cNvPr id="3" name="Content Placeholder 2">
-            <a:extLst>
-              <a:ext uri="{FF2B5EF4-FFF2-40B4-BE49-F238E27FC236}">
-                <a16:creationId xmlns:a16="http://schemas.microsoft.com/office/drawing/2014/main" id="{BF8ADB35-727C-FA84-D081-FB1BC3236E9C}"/>
-              </a:ext>
-            </a:extLst>
-          </p:cNvPr>
-          <p:cNvSpPr>
-            <a:spLocks noGrp="1"/>
-          </p:cNvSpPr>
-          <p:nvPr>
-            <p:ph idx="1"/>
-          </p:nvPr>
-        </p:nvSpPr>
-        <p:spPr>
-          <a:xfrm>
-            <a:off x="1451579" y="1853754"/>
-            <a:ext cx="9603275" cy="4199727"/>
-          </a:xfrm>
-        </p:spPr>
-        <p:txBody>
-          <a:bodyPr/>
-          <a:lstStyle/>
-          <a:p>
-            <a:r>
-              <a:rPr lang="en-US" dirty="0"/>
-              <a:t>The project proposal is simple, almost free marks, and important. </a:t>
-            </a:r>
-          </a:p>
-          <a:p>
-            <a:r>
-              <a:rPr lang="en-US" dirty="0"/>
-              <a:t>You need to write your plan to do the project. </a:t>
-            </a:r>
-          </a:p>
-          <a:p>
-            <a:pPr lvl="1"/>
-            <a:r>
-              <a:rPr lang="en-US" dirty="0"/>
-              <a:t>I’ll look at it to see if it sounds reasonable and doable – I’m mostly checking to raise concerns on what might not work out going forward.</a:t>
-            </a:r>
-          </a:p>
-          <a:p>
-            <a:pPr lvl="1"/>
-            <a:r>
-              <a:rPr lang="en-US" dirty="0"/>
-              <a:t>Much more importantly, you all need to sketch out and agree on a plan. </a:t>
-            </a:r>
-          </a:p>
-          <a:p>
-            <a:r>
-              <a:rPr lang="en-US" dirty="0"/>
-              <a:t>Consider backup for anything you don’t know works. </a:t>
-            </a:r>
-          </a:p>
-          <a:p>
-            <a:pPr lvl="1"/>
-            <a:r>
-              <a:rPr lang="en-US" dirty="0"/>
-              <a:t>If you plan on making/showing X, make sure you can with the data before settling. </a:t>
-            </a:r>
-          </a:p>
-          <a:p>
-            <a:pPr lvl="1"/>
-            <a:r>
-              <a:rPr lang="en-US" dirty="0"/>
-              <a:t>There may be issues with granularity, data types, etc.. That may require work to solve. </a:t>
-            </a:r>
-          </a:p>
-          <a:p>
-            <a:r>
-              <a:rPr lang="en-US" dirty="0"/>
-              <a:t>Better to start with something that’s a bit too broad and trim if everything works. </a:t>
-            </a:r>
-          </a:p>
-        </p:txBody>
-      </p:sp>
-    </p:spTree>
-    <p:extLst>
-      <p:ext uri="{BB962C8B-B14F-4D97-AF65-F5344CB8AC3E}">
-        <p14:creationId xmlns:p14="http://schemas.microsoft.com/office/powerpoint/2010/main" val="3325367046"/>
-      </p:ext>
-    </p:extLst>
-  </p:cSld>
-  <p:clrMapOvr>
-    <a:masterClrMapping/>
-  </p:clrMapOvr>
-</p:sld>
-</file>
-
-<file path=ppt/slides/slide20.xml><?xml version="1.0" encoding="utf-8"?>
-<p:sld xmlns:a="http://schemas.openxmlformats.org/drawingml/2006/main" xmlns:r="http://schemas.openxmlformats.org/officeDocument/2006/relationships" xmlns:p="http://schemas.openxmlformats.org/presentationml/2006/main">
-  <p:cSld>
-    <p:spTree>
-      <p:nvGrpSpPr>
-        <p:cNvPr id="1" name=""/>
-        <p:cNvGrpSpPr/>
-        <p:nvPr/>
-      </p:nvGrpSpPr>
-      <p:grpSpPr>
-        <a:xfrm>
-          <a:off x="0" y="0"/>
-          <a:ext cx="0" cy="0"/>
-          <a:chOff x="0" y="0"/>
-          <a:chExt cx="0" cy="0"/>
-        </a:xfrm>
-      </p:grpSpPr>
-      <p:sp>
-        <p:nvSpPr>
-          <p:cNvPr id="2" name="Title 1">
-            <a:extLst>
-              <a:ext uri="{FF2B5EF4-FFF2-40B4-BE49-F238E27FC236}">
-                <a16:creationId xmlns:a16="http://schemas.microsoft.com/office/drawing/2014/main" id="{7918DD57-685F-9106-A246-52DA83E487AF}"/>
-              </a:ext>
-            </a:extLst>
-          </p:cNvPr>
-          <p:cNvSpPr>
-            <a:spLocks noGrp="1"/>
-          </p:cNvSpPr>
-          <p:nvPr>
-            <p:ph type="title"/>
-          </p:nvPr>
-        </p:nvSpPr>
-        <p:spPr/>
-        <p:txBody>
-          <a:bodyPr/>
-          <a:lstStyle/>
-          <a:p>
-            <a:r>
-              <a:rPr lang="en-US" dirty="0"/>
-              <a:t>ARIMA-d Up</a:t>
-            </a:r>
-          </a:p>
-        </p:txBody>
-      </p:sp>
-      <p:sp>
-        <p:nvSpPr>
-          <p:cNvPr id="3" name="Content Placeholder 2">
-            <a:extLst>
-              <a:ext uri="{FF2B5EF4-FFF2-40B4-BE49-F238E27FC236}">
-                <a16:creationId xmlns:a16="http://schemas.microsoft.com/office/drawing/2014/main" id="{5DFC05F1-1780-38C0-3A3E-8D342C5F1611}"/>
-              </a:ext>
-            </a:extLst>
-          </p:cNvPr>
-          <p:cNvSpPr>
-            <a:spLocks noGrp="1"/>
-          </p:cNvSpPr>
-          <p:nvPr>
-            <p:ph idx="1"/>
-          </p:nvPr>
-        </p:nvSpPr>
-        <p:spPr>
-          <a:xfrm>
-            <a:off x="1451579" y="1853753"/>
-            <a:ext cx="9603275" cy="4199727"/>
-          </a:xfrm>
-        </p:spPr>
-        <p:txBody>
-          <a:bodyPr>
-            <a:normAutofit/>
-          </a:bodyPr>
-          <a:lstStyle/>
-          <a:p>
-            <a:r>
-              <a:rPr lang="en-US" dirty="0"/>
-              <a:t>The ARIMA model type is a ‘basic’ one – a more elaborate moving average. </a:t>
-            </a:r>
-          </a:p>
-          <a:p>
-            <a:r>
-              <a:rPr lang="en-US" dirty="0"/>
-              <a:t>Pros:</a:t>
-            </a:r>
-          </a:p>
-          <a:p>
-            <a:pPr lvl="1"/>
-            <a:r>
-              <a:rPr lang="en-US" dirty="0"/>
-              <a:t>Simple, transparent.</a:t>
-            </a:r>
-          </a:p>
-          <a:p>
-            <a:r>
-              <a:rPr lang="en-US" dirty="0"/>
-              <a:t>Cons:</a:t>
-            </a:r>
-          </a:p>
-          <a:p>
-            <a:pPr lvl="1"/>
-            <a:r>
-              <a:rPr lang="en-US" dirty="0"/>
-              <a:t>Potentially too simple, not adaptable to complicated scenarios. </a:t>
-            </a:r>
-          </a:p>
-          <a:p>
-            <a:r>
-              <a:rPr lang="en-US" dirty="0"/>
-              <a:t>Note – these simpler models with more bias error may perform best, the future is hard to predict accurately. Too much ability of the model to adjust predictions may harm us. </a:t>
-            </a:r>
-          </a:p>
-        </p:txBody>
-      </p:sp>
-    </p:spTree>
-    <p:extLst>
-      <p:ext uri="{BB962C8B-B14F-4D97-AF65-F5344CB8AC3E}">
-        <p14:creationId xmlns:p14="http://schemas.microsoft.com/office/powerpoint/2010/main" val="2830739107"/>
-      </p:ext>
-    </p:extLst>
-  </p:cSld>
-  <p:clrMapOvr>
-    <a:masterClrMapping/>
-  </p:clrMapOvr>
-</p:sld>
-</file>
-
 <file path=ppt/slides/slide21.xml><?xml version="1.0" encoding="utf-8"?>
 <p:sld xmlns:a="http://schemas.openxmlformats.org/drawingml/2006/main" xmlns:r="http://schemas.openxmlformats.org/officeDocument/2006/relationships" xmlns:p="http://schemas.openxmlformats.org/presentationml/2006/main">
   <p:cSld>
@@ -5898,7 +5992,7 @@
           <p:cNvPr id="2" name="Title 1">
             <a:extLst>
               <a:ext uri="{FF2B5EF4-FFF2-40B4-BE49-F238E27FC236}">
-                <a16:creationId xmlns:a16="http://schemas.microsoft.com/office/drawing/2014/main" id="{DA5678F7-635A-D40C-AD90-AAADEA13E967}"/>
+                <a16:creationId xmlns:a16="http://schemas.microsoft.com/office/drawing/2014/main" id="{7918DD57-685F-9106-A246-52DA83E487AF}"/>
               </a:ext>
             </a:extLst>
           </p:cNvPr>
@@ -5916,7 +6010,7 @@
           <a:p>
             <a:r>
               <a:rPr lang="en-US" dirty="0"/>
-              <a:t>Smarter Time Models</a:t>
+              <a:t>ARIMA-d Up</a:t>
             </a:r>
           </a:p>
         </p:txBody>
@@ -5926,7 +6020,7 @@
           <p:cNvPr id="3" name="Content Placeholder 2">
             <a:extLst>
               <a:ext uri="{FF2B5EF4-FFF2-40B4-BE49-F238E27FC236}">
-                <a16:creationId xmlns:a16="http://schemas.microsoft.com/office/drawing/2014/main" id="{F23B1FF3-C207-9615-B32A-D907854A0D2F}"/>
+                <a16:creationId xmlns:a16="http://schemas.microsoft.com/office/drawing/2014/main" id="{5DFC05F1-1780-38C0-3A3E-8D342C5F1611}"/>
               </a:ext>
             </a:extLst>
           </p:cNvPr>
@@ -5939,58 +6033,51 @@
         </p:nvSpPr>
         <p:spPr>
           <a:xfrm>
-            <a:off x="1137146" y="1853754"/>
-            <a:ext cx="10723927" cy="4199727"/>
+            <a:off x="1451579" y="1853753"/>
+            <a:ext cx="9603275" cy="4199727"/>
           </a:xfrm>
         </p:spPr>
         <p:txBody>
-          <a:bodyPr/>
-          <a:lstStyle/>
-          <a:p>
-            <a:r>
-              <a:rPr lang="en-US" dirty="0"/>
-              <a:t>Modern models have much more capability than a simple ARIMA one. </a:t>
-            </a:r>
-          </a:p>
-          <a:p>
-            <a:r>
-              <a:rPr lang="en-US" dirty="0"/>
-              <a:t>Their capacity to learn is much larger - they have more parameters, can learn complex patterns. </a:t>
-            </a:r>
-          </a:p>
-          <a:p>
-            <a:pPr lvl="1"/>
-            <a:r>
-              <a:rPr lang="en-US" dirty="0"/>
-              <a:t>In ds the number of parameters roughly tells us how complicated of a thing can be predicted. </a:t>
-            </a:r>
-          </a:p>
-          <a:p>
-            <a:pPr lvl="1"/>
-            <a:r>
-              <a:rPr lang="en-US" dirty="0"/>
-              <a:t>E.g. image recognition is more complex than predicting the number of each shoe size needed for NIKE. </a:t>
-            </a:r>
-          </a:p>
-          <a:p>
-            <a:pPr lvl="1"/>
-            <a:r>
-              <a:rPr lang="en-US" dirty="0"/>
-              <a:t>“Regular” simple machine learning models may have 5-100 parameters. </a:t>
-            </a:r>
-          </a:p>
-          <a:p>
-            <a:pPr lvl="1"/>
-            <a:r>
-              <a:rPr lang="en-US" dirty="0"/>
-              <a:t>Neural networks (the models that are ‘AI’) will have millions or more. </a:t>
-            </a:r>
-          </a:p>
-          <a:p>
-            <a:pPr lvl="1"/>
-            <a:r>
-              <a:rPr lang="en-US" dirty="0"/>
-              <a:t>Very smart models like ChatGPT have tens or hundreds of billions, rapidly growing. </a:t>
+          <a:bodyPr>
+            <a:normAutofit/>
+          </a:bodyPr>
+          <a:lstStyle/>
+          <a:p>
+            <a:r>
+              <a:rPr lang="en-US" dirty="0"/>
+              <a:t>The ARIMA model type is a ‘basic’ one – a more elaborate moving average. </a:t>
+            </a:r>
+          </a:p>
+          <a:p>
+            <a:r>
+              <a:rPr lang="en-US" dirty="0"/>
+              <a:t>Pros:</a:t>
+            </a:r>
+          </a:p>
+          <a:p>
+            <a:pPr lvl="1"/>
+            <a:r>
+              <a:rPr lang="en-US" dirty="0"/>
+              <a:t>Simple, transparent.</a:t>
+            </a:r>
+          </a:p>
+          <a:p>
+            <a:r>
+              <a:rPr lang="en-US" dirty="0"/>
+              <a:t>Cons:</a:t>
+            </a:r>
+          </a:p>
+          <a:p>
+            <a:pPr lvl="1"/>
+            <a:r>
+              <a:rPr lang="en-US" dirty="0"/>
+              <a:t>Potentially too simple, not adaptable to complicated scenarios. </a:t>
+            </a:r>
+          </a:p>
+          <a:p>
+            <a:r>
+              <a:rPr lang="en-US" dirty="0"/>
+              <a:t>Note – these simpler models with more bias error may perform best, the future is hard to predict accurately. Too much ability of the model to adjust predictions may harm us. </a:t>
             </a:r>
           </a:p>
         </p:txBody>
@@ -5998,7 +6085,7 @@
     </p:spTree>
     <p:extLst>
       <p:ext uri="{BB962C8B-B14F-4D97-AF65-F5344CB8AC3E}">
-        <p14:creationId xmlns:p14="http://schemas.microsoft.com/office/powerpoint/2010/main" val="2969086212"/>
+        <p14:creationId xmlns:p14="http://schemas.microsoft.com/office/powerpoint/2010/main" val="2830739107"/>
       </p:ext>
     </p:extLst>
   </p:cSld>
@@ -6030,7 +6117,7 @@
           <p:cNvPr id="2" name="Title 1">
             <a:extLst>
               <a:ext uri="{FF2B5EF4-FFF2-40B4-BE49-F238E27FC236}">
-                <a16:creationId xmlns:a16="http://schemas.microsoft.com/office/drawing/2014/main" id="{19192875-568E-E27F-EF8C-0E63853062C2}"/>
+                <a16:creationId xmlns:a16="http://schemas.microsoft.com/office/drawing/2014/main" id="{DA5678F7-635A-D40C-AD90-AAADEA13E967}"/>
               </a:ext>
             </a:extLst>
           </p:cNvPr>
@@ -6048,7 +6135,7 @@
           <a:p>
             <a:r>
               <a:rPr lang="en-US" dirty="0"/>
-              <a:t>Facebook Prophet</a:t>
+              <a:t>Smarter Time Models</a:t>
             </a:r>
           </a:p>
         </p:txBody>
@@ -6058,7 +6145,7 @@
           <p:cNvPr id="3" name="Content Placeholder 2">
             <a:extLst>
               <a:ext uri="{FF2B5EF4-FFF2-40B4-BE49-F238E27FC236}">
-                <a16:creationId xmlns:a16="http://schemas.microsoft.com/office/drawing/2014/main" id="{BBD86F92-A329-D6B9-24F3-6095A7021DE0}"/>
+                <a16:creationId xmlns:a16="http://schemas.microsoft.com/office/drawing/2014/main" id="{F23B1FF3-C207-9615-B32A-D907854A0D2F}"/>
               </a:ext>
             </a:extLst>
           </p:cNvPr>
@@ -6071,68 +6158,58 @@
         </p:nvSpPr>
         <p:spPr>
           <a:xfrm>
-            <a:off x="1451579" y="2015732"/>
-            <a:ext cx="9603275" cy="4037749"/>
+            <a:off x="1137146" y="1853754"/>
+            <a:ext cx="10723927" cy="4199727"/>
           </a:xfrm>
         </p:spPr>
         <p:txBody>
-          <a:bodyPr>
-            <a:normAutofit/>
-          </a:bodyPr>
-          <a:lstStyle/>
-          <a:p>
-            <a:r>
-              <a:rPr lang="en-US" dirty="0"/>
-              <a:t>Facebook Prophet is a library that is well setup to handle common time-series problems:</a:t>
-            </a:r>
-          </a:p>
-          <a:p>
-            <a:pPr lvl="1"/>
-            <a:r>
-              <a:rPr lang="en-US" dirty="0"/>
-              <a:t>Handles events such as holidays, including custom lists. </a:t>
-            </a:r>
-          </a:p>
-          <a:p>
-            <a:pPr lvl="1"/>
-            <a:r>
-              <a:rPr lang="en-US" dirty="0"/>
-              <a:t>Can be set to anticipate change points, e.g. product launches. </a:t>
-            </a:r>
-          </a:p>
-          <a:p>
-            <a:pPr lvl="1"/>
-            <a:r>
-              <a:rPr lang="en-US" dirty="0"/>
-              <a:t>Provides useful things like plotting and cross validation. </a:t>
-            </a:r>
-          </a:p>
-          <a:p>
-            <a:pPr lvl="1"/>
-            <a:r>
-              <a:rPr lang="en-US" dirty="0"/>
-              <a:t>Can handle additional regressors – more variables. </a:t>
-            </a:r>
-          </a:p>
-          <a:p>
-            <a:pPr lvl="2"/>
-            <a:r>
-              <a:rPr lang="en-US" dirty="0"/>
-              <a:t>E.g. can we predict tomorrows gas price with the past prices, as well as temperature, economic metrics, trade numbers, </a:t>
-            </a:r>
-            <a:r>
-              <a:rPr lang="en-US" dirty="0" err="1"/>
-              <a:t>etc</a:t>
-            </a:r>
-            <a:r>
-              <a:rPr lang="en-US" dirty="0"/>
-              <a:t>…</a:t>
-            </a:r>
-          </a:p>
-          <a:p>
-            <a:r>
-              <a:rPr lang="en-US" dirty="0"/>
-              <a:t>Uses a neural network internally to be very smart and able to capture patterns. </a:t>
+          <a:bodyPr/>
+          <a:lstStyle/>
+          <a:p>
+            <a:r>
+              <a:rPr lang="en-US" dirty="0"/>
+              <a:t>Modern models have much more capability than a simple ARIMA one. </a:t>
+            </a:r>
+          </a:p>
+          <a:p>
+            <a:r>
+              <a:rPr lang="en-US" dirty="0"/>
+              <a:t>Their capacity to learn is much larger - they have more parameters, can learn complex patterns. </a:t>
+            </a:r>
+          </a:p>
+          <a:p>
+            <a:pPr lvl="1"/>
+            <a:r>
+              <a:rPr lang="en-US" dirty="0"/>
+              <a:t>In ds the number of parameters roughly tells us how complicated of a thing can be predicted. </a:t>
+            </a:r>
+          </a:p>
+          <a:p>
+            <a:pPr lvl="1"/>
+            <a:r>
+              <a:rPr lang="en-US" dirty="0"/>
+              <a:t>E.g. image recognition is more complex than predicting the number of each shoe size needed for NIKE. </a:t>
+            </a:r>
+          </a:p>
+          <a:p>
+            <a:pPr lvl="1"/>
+            <a:r>
+              <a:rPr lang="en-US" dirty="0"/>
+              <a:t>“Regular” simple machine learning models may have 5-100 parameters. </a:t>
+            </a:r>
+          </a:p>
+          <a:p>
+            <a:pPr lvl="1"/>
+            <a:r>
+              <a:rPr lang="en-US" dirty="0"/>
+              <a:t>Neural networks (the models that are ‘AI’) will have millions or more. </a:t>
+            </a:r>
+          </a:p>
+          <a:p>
+            <a:pPr lvl="1"/>
+            <a:r>
+              <a:rPr lang="en-US" dirty="0"/>
+              <a:t>Very smart models like ChatGPT have tens or hundreds of billions, rapidly growing. </a:t>
             </a:r>
           </a:p>
         </p:txBody>
@@ -6140,7 +6217,7 @@
     </p:spTree>
     <p:extLst>
       <p:ext uri="{BB962C8B-B14F-4D97-AF65-F5344CB8AC3E}">
-        <p14:creationId xmlns:p14="http://schemas.microsoft.com/office/powerpoint/2010/main" val="910616763"/>
+        <p14:creationId xmlns:p14="http://schemas.microsoft.com/office/powerpoint/2010/main" val="2969086212"/>
       </p:ext>
     </p:extLst>
   </p:cSld>
@@ -6172,6 +6249,148 @@
           <p:cNvPr id="2" name="Title 1">
             <a:extLst>
               <a:ext uri="{FF2B5EF4-FFF2-40B4-BE49-F238E27FC236}">
+                <a16:creationId xmlns:a16="http://schemas.microsoft.com/office/drawing/2014/main" id="{19192875-568E-E27F-EF8C-0E63853062C2}"/>
+              </a:ext>
+            </a:extLst>
+          </p:cNvPr>
+          <p:cNvSpPr>
+            <a:spLocks noGrp="1"/>
+          </p:cNvSpPr>
+          <p:nvPr>
+            <p:ph type="title"/>
+          </p:nvPr>
+        </p:nvSpPr>
+        <p:spPr/>
+        <p:txBody>
+          <a:bodyPr/>
+          <a:lstStyle/>
+          <a:p>
+            <a:r>
+              <a:rPr lang="en-US" dirty="0"/>
+              <a:t>Facebook Prophet</a:t>
+            </a:r>
+          </a:p>
+        </p:txBody>
+      </p:sp>
+      <p:sp>
+        <p:nvSpPr>
+          <p:cNvPr id="3" name="Content Placeholder 2">
+            <a:extLst>
+              <a:ext uri="{FF2B5EF4-FFF2-40B4-BE49-F238E27FC236}">
+                <a16:creationId xmlns:a16="http://schemas.microsoft.com/office/drawing/2014/main" id="{BBD86F92-A329-D6B9-24F3-6095A7021DE0}"/>
+              </a:ext>
+            </a:extLst>
+          </p:cNvPr>
+          <p:cNvSpPr>
+            <a:spLocks noGrp="1"/>
+          </p:cNvSpPr>
+          <p:nvPr>
+            <p:ph idx="1"/>
+          </p:nvPr>
+        </p:nvSpPr>
+        <p:spPr>
+          <a:xfrm>
+            <a:off x="1451579" y="2015732"/>
+            <a:ext cx="9603275" cy="4037749"/>
+          </a:xfrm>
+        </p:spPr>
+        <p:txBody>
+          <a:bodyPr>
+            <a:normAutofit/>
+          </a:bodyPr>
+          <a:lstStyle/>
+          <a:p>
+            <a:r>
+              <a:rPr lang="en-US" dirty="0"/>
+              <a:t>Facebook Prophet is a library that is well setup to handle common time-series problems:</a:t>
+            </a:r>
+          </a:p>
+          <a:p>
+            <a:pPr lvl="1"/>
+            <a:r>
+              <a:rPr lang="en-US" dirty="0"/>
+              <a:t>Handles events such as holidays, including custom lists. </a:t>
+            </a:r>
+          </a:p>
+          <a:p>
+            <a:pPr lvl="1"/>
+            <a:r>
+              <a:rPr lang="en-US" dirty="0"/>
+              <a:t>Can be set to anticipate change points, e.g. product launches. </a:t>
+            </a:r>
+          </a:p>
+          <a:p>
+            <a:pPr lvl="1"/>
+            <a:r>
+              <a:rPr lang="en-US" dirty="0"/>
+              <a:t>Provides useful things like plotting and cross validation. </a:t>
+            </a:r>
+          </a:p>
+          <a:p>
+            <a:pPr lvl="1"/>
+            <a:r>
+              <a:rPr lang="en-US" dirty="0"/>
+              <a:t>Can handle additional regressors – more variables. </a:t>
+            </a:r>
+          </a:p>
+          <a:p>
+            <a:pPr lvl="2"/>
+            <a:r>
+              <a:rPr lang="en-US" dirty="0"/>
+              <a:t>E.g. can we predict tomorrows gas price with the past prices, as well as temperature, economic metrics, trade numbers, </a:t>
+            </a:r>
+            <a:r>
+              <a:rPr lang="en-US" dirty="0" err="1"/>
+              <a:t>etc</a:t>
+            </a:r>
+            <a:r>
+              <a:rPr lang="en-US" dirty="0"/>
+              <a:t>…</a:t>
+            </a:r>
+          </a:p>
+          <a:p>
+            <a:r>
+              <a:rPr lang="en-US" dirty="0"/>
+              <a:t>Uses a neural network internally to be very smart and able to capture patterns. </a:t>
+            </a:r>
+          </a:p>
+        </p:txBody>
+      </p:sp>
+    </p:spTree>
+    <p:extLst>
+      <p:ext uri="{BB962C8B-B14F-4D97-AF65-F5344CB8AC3E}">
+        <p14:creationId xmlns:p14="http://schemas.microsoft.com/office/powerpoint/2010/main" val="910616763"/>
+      </p:ext>
+    </p:extLst>
+  </p:cSld>
+  <p:clrMapOvr>
+    <a:masterClrMapping/>
+  </p:clrMapOvr>
+</p:sld>
+</file>
+
+<file path=ppt/slides/slide24.xml><?xml version="1.0" encoding="utf-8"?>
+<p:sld xmlns:a="http://schemas.openxmlformats.org/drawingml/2006/main" xmlns:r="http://schemas.openxmlformats.org/officeDocument/2006/relationships" xmlns:p="http://schemas.openxmlformats.org/presentationml/2006/main">
+  <p:cSld>
+    <p:spTree>
+      <p:nvGrpSpPr>
+        <p:cNvPr id="1" name=""/>
+        <p:cNvGrpSpPr/>
+        <p:nvPr/>
+      </p:nvGrpSpPr>
+      <p:grpSpPr>
+        <a:xfrm>
+          <a:off x="0" y="0"/>
+          <a:ext cx="0" cy="0"/>
+          <a:chOff x="0" y="0"/>
+          <a:chExt cx="0" cy="0"/>
+        </a:xfrm>
+      </p:grpSpPr>
+      <p:sp>
+        <p:nvSpPr>
+          <p:cNvPr id="2" name="Title 1">
+            <a:extLst>
+              <a:ext uri="{FF2B5EF4-FFF2-40B4-BE49-F238E27FC236}">
                 <a16:creationId xmlns:a16="http://schemas.microsoft.com/office/drawing/2014/main" id="{99F908CA-F618-69BD-549B-825B06113F81}"/>
               </a:ext>
             </a:extLst>
@@ -6251,7 +6470,7 @@
 </p:sld>
 </file>
 
-<file path=ppt/slides/slide24.xml><?xml version="1.0" encoding="utf-8"?>
+<file path=ppt/slides/slide25.xml><?xml version="1.0" encoding="utf-8"?>
 <p:sld xmlns:a="http://schemas.openxmlformats.org/drawingml/2006/main" xmlns:r="http://schemas.openxmlformats.org/officeDocument/2006/relationships" xmlns:p="http://schemas.openxmlformats.org/presentationml/2006/main">
   <p:cSld>
     <p:bg>
@@ -6478,7 +6697,7 @@
 </p:sld>
 </file>
 
-<file path=ppt/slides/slide25.xml><?xml version="1.0" encoding="utf-8"?>
+<file path=ppt/slides/slide26.xml><?xml version="1.0" encoding="utf-8"?>
 <p:sld xmlns:a="http://schemas.openxmlformats.org/drawingml/2006/main" xmlns:r="http://schemas.openxmlformats.org/officeDocument/2006/relationships" xmlns:p="http://schemas.openxmlformats.org/presentationml/2006/main">
   <p:cSld>
     <p:spTree>
@@ -6605,143 +6824,6 @@
 </p:sld>
 </file>
 
-<file path=ppt/slides/slide26.xml><?xml version="1.0" encoding="utf-8"?>
-<p:sld xmlns:a="http://schemas.openxmlformats.org/drawingml/2006/main" xmlns:r="http://schemas.openxmlformats.org/officeDocument/2006/relationships" xmlns:p="http://schemas.openxmlformats.org/presentationml/2006/main">
-  <p:cSld>
-    <p:spTree>
-      <p:nvGrpSpPr>
-        <p:cNvPr id="1" name=""/>
-        <p:cNvGrpSpPr/>
-        <p:nvPr/>
-      </p:nvGrpSpPr>
-      <p:grpSpPr>
-        <a:xfrm>
-          <a:off x="0" y="0"/>
-          <a:ext cx="0" cy="0"/>
-          <a:chOff x="0" y="0"/>
-          <a:chExt cx="0" cy="0"/>
-        </a:xfrm>
-      </p:grpSpPr>
-      <p:sp>
-        <p:nvSpPr>
-          <p:cNvPr id="2" name="Title 1">
-            <a:extLst>
-              <a:ext uri="{FF2B5EF4-FFF2-40B4-BE49-F238E27FC236}">
-                <a16:creationId xmlns:a16="http://schemas.microsoft.com/office/drawing/2014/main" id="{C965BD4C-1366-F7CE-BB72-33EBDC782A79}"/>
-              </a:ext>
-            </a:extLst>
-          </p:cNvPr>
-          <p:cNvSpPr>
-            <a:spLocks noGrp="1"/>
-          </p:cNvSpPr>
-          <p:nvPr>
-            <p:ph type="title"/>
-          </p:nvPr>
-        </p:nvSpPr>
-        <p:spPr/>
-        <p:txBody>
-          <a:bodyPr/>
-          <a:lstStyle/>
-          <a:p>
-            <a:r>
-              <a:rPr lang="en-US" dirty="0"/>
-              <a:t>Time Series Conclusion</a:t>
-            </a:r>
-          </a:p>
-        </p:txBody>
-      </p:sp>
-      <p:sp>
-        <p:nvSpPr>
-          <p:cNvPr id="3" name="Content Placeholder 2">
-            <a:extLst>
-              <a:ext uri="{FF2B5EF4-FFF2-40B4-BE49-F238E27FC236}">
-                <a16:creationId xmlns:a16="http://schemas.microsoft.com/office/drawing/2014/main" id="{C6023275-8696-EE31-2C2B-7B9C2E9A520D}"/>
-              </a:ext>
-            </a:extLst>
-          </p:cNvPr>
-          <p:cNvSpPr>
-            <a:spLocks noGrp="1"/>
-          </p:cNvSpPr>
-          <p:nvPr>
-            <p:ph idx="1"/>
-          </p:nvPr>
-        </p:nvSpPr>
-        <p:spPr>
-          <a:xfrm>
-            <a:off x="775252" y="1925904"/>
-            <a:ext cx="10793895" cy="4127577"/>
-          </a:xfrm>
-        </p:spPr>
-        <p:txBody>
-          <a:bodyPr/>
-          <a:lstStyle/>
-          <a:p>
-            <a:r>
-              <a:rPr lang="en-US" dirty="0"/>
-              <a:t>Time series forecasting is one of the most simple types of predictive models. </a:t>
-            </a:r>
-          </a:p>
-          <a:p>
-            <a:pPr lvl="1"/>
-            <a:r>
-              <a:rPr lang="en-US" dirty="0"/>
-              <a:t>Simple ones are just a </a:t>
-            </a:r>
-            <a:r>
-              <a:rPr lang="en-US"/>
-              <a:t>moving average – and </a:t>
-            </a:r>
-            <a:r>
-              <a:rPr lang="en-US" b="1"/>
-              <a:t>we can do them in Tableau!!!!!!</a:t>
-            </a:r>
-            <a:endParaRPr lang="en-US" dirty="0"/>
-          </a:p>
-          <a:p>
-            <a:pPr lvl="1"/>
-            <a:r>
-              <a:rPr lang="en-US" dirty="0"/>
-              <a:t>More complexity can be added to handle more complex scenarios. </a:t>
-            </a:r>
-          </a:p>
-          <a:p>
-            <a:r>
-              <a:rPr lang="en-US" dirty="0"/>
-              <a:t>Models can be compared by calculating and totaling residuals – test error on old data. </a:t>
-            </a:r>
-          </a:p>
-          <a:p>
-            <a:pPr lvl="1"/>
-            <a:r>
-              <a:rPr lang="en-US" dirty="0"/>
-              <a:t>This is generally true for all predictions. </a:t>
-            </a:r>
-          </a:p>
-          <a:p>
-            <a:r>
-              <a:rPr lang="en-US" dirty="0"/>
-              <a:t>We can show the accuracy of our predictions with a confidence interval. </a:t>
-            </a:r>
-          </a:p>
-          <a:p>
-            <a:pPr lvl="1"/>
-            <a:endParaRPr lang="en-US" dirty="0"/>
-          </a:p>
-        </p:txBody>
-      </p:sp>
-    </p:spTree>
-    <p:extLst>
-      <p:ext uri="{BB962C8B-B14F-4D97-AF65-F5344CB8AC3E}">
-        <p14:creationId xmlns:p14="http://schemas.microsoft.com/office/powerpoint/2010/main" val="164357066"/>
-      </p:ext>
-    </p:extLst>
-  </p:cSld>
-  <p:clrMapOvr>
-    <a:masterClrMapping/>
-  </p:clrMapOvr>
-</p:sld>
-</file>
-
 <file path=ppt/slides/slide27.xml><?xml version="1.0" encoding="utf-8"?>
 <p:sld xmlns:a="http://schemas.openxmlformats.org/drawingml/2006/main" xmlns:r="http://schemas.openxmlformats.org/officeDocument/2006/relationships" xmlns:p="http://schemas.openxmlformats.org/presentationml/2006/main">
   <p:cSld>
@@ -6764,6 +6846,143 @@
           <p:cNvPr id="2" name="Title 1">
             <a:extLst>
               <a:ext uri="{FF2B5EF4-FFF2-40B4-BE49-F238E27FC236}">
+                <a16:creationId xmlns:a16="http://schemas.microsoft.com/office/drawing/2014/main" id="{C965BD4C-1366-F7CE-BB72-33EBDC782A79}"/>
+              </a:ext>
+            </a:extLst>
+          </p:cNvPr>
+          <p:cNvSpPr>
+            <a:spLocks noGrp="1"/>
+          </p:cNvSpPr>
+          <p:nvPr>
+            <p:ph type="title"/>
+          </p:nvPr>
+        </p:nvSpPr>
+        <p:spPr/>
+        <p:txBody>
+          <a:bodyPr/>
+          <a:lstStyle/>
+          <a:p>
+            <a:r>
+              <a:rPr lang="en-US" dirty="0"/>
+              <a:t>Time Series Conclusion</a:t>
+            </a:r>
+          </a:p>
+        </p:txBody>
+      </p:sp>
+      <p:sp>
+        <p:nvSpPr>
+          <p:cNvPr id="3" name="Content Placeholder 2">
+            <a:extLst>
+              <a:ext uri="{FF2B5EF4-FFF2-40B4-BE49-F238E27FC236}">
+                <a16:creationId xmlns:a16="http://schemas.microsoft.com/office/drawing/2014/main" id="{C6023275-8696-EE31-2C2B-7B9C2E9A520D}"/>
+              </a:ext>
+            </a:extLst>
+          </p:cNvPr>
+          <p:cNvSpPr>
+            <a:spLocks noGrp="1"/>
+          </p:cNvSpPr>
+          <p:nvPr>
+            <p:ph idx="1"/>
+          </p:nvPr>
+        </p:nvSpPr>
+        <p:spPr>
+          <a:xfrm>
+            <a:off x="775252" y="1925904"/>
+            <a:ext cx="10793895" cy="4127577"/>
+          </a:xfrm>
+        </p:spPr>
+        <p:txBody>
+          <a:bodyPr/>
+          <a:lstStyle/>
+          <a:p>
+            <a:r>
+              <a:rPr lang="en-US" dirty="0"/>
+              <a:t>Time series forecasting is one of the most simple types of predictive models. </a:t>
+            </a:r>
+          </a:p>
+          <a:p>
+            <a:pPr lvl="1"/>
+            <a:r>
+              <a:rPr lang="en-US" dirty="0"/>
+              <a:t>Simple ones are just a </a:t>
+            </a:r>
+            <a:r>
+              <a:rPr lang="en-US"/>
+              <a:t>moving average – and </a:t>
+            </a:r>
+            <a:r>
+              <a:rPr lang="en-US" b="1"/>
+              <a:t>we can do them in Tableau!!!!!!</a:t>
+            </a:r>
+            <a:endParaRPr lang="en-US" dirty="0"/>
+          </a:p>
+          <a:p>
+            <a:pPr lvl="1"/>
+            <a:r>
+              <a:rPr lang="en-US" dirty="0"/>
+              <a:t>More complexity can be added to handle more complex scenarios. </a:t>
+            </a:r>
+          </a:p>
+          <a:p>
+            <a:r>
+              <a:rPr lang="en-US" dirty="0"/>
+              <a:t>Models can be compared by calculating and totaling residuals – test error on old data. </a:t>
+            </a:r>
+          </a:p>
+          <a:p>
+            <a:pPr lvl="1"/>
+            <a:r>
+              <a:rPr lang="en-US" dirty="0"/>
+              <a:t>This is generally true for all predictions. </a:t>
+            </a:r>
+          </a:p>
+          <a:p>
+            <a:r>
+              <a:rPr lang="en-US" dirty="0"/>
+              <a:t>We can show the accuracy of our predictions with a confidence interval. </a:t>
+            </a:r>
+          </a:p>
+          <a:p>
+            <a:pPr lvl="1"/>
+            <a:endParaRPr lang="en-US" dirty="0"/>
+          </a:p>
+        </p:txBody>
+      </p:sp>
+    </p:spTree>
+    <p:extLst>
+      <p:ext uri="{BB962C8B-B14F-4D97-AF65-F5344CB8AC3E}">
+        <p14:creationId xmlns:p14="http://schemas.microsoft.com/office/powerpoint/2010/main" val="164357066"/>
+      </p:ext>
+    </p:extLst>
+  </p:cSld>
+  <p:clrMapOvr>
+    <a:masterClrMapping/>
+  </p:clrMapOvr>
+</p:sld>
+</file>
+
+<file path=ppt/slides/slide28.xml><?xml version="1.0" encoding="utf-8"?>
+<p:sld xmlns:a="http://schemas.openxmlformats.org/drawingml/2006/main" xmlns:r="http://schemas.openxmlformats.org/officeDocument/2006/relationships" xmlns:p="http://schemas.openxmlformats.org/presentationml/2006/main">
+  <p:cSld>
+    <p:spTree>
+      <p:nvGrpSpPr>
+        <p:cNvPr id="1" name=""/>
+        <p:cNvGrpSpPr/>
+        <p:nvPr/>
+      </p:nvGrpSpPr>
+      <p:grpSpPr>
+        <a:xfrm>
+          <a:off x="0" y="0"/>
+          <a:ext cx="0" cy="0"/>
+          <a:chOff x="0" y="0"/>
+          <a:chExt cx="0" cy="0"/>
+        </a:xfrm>
+      </p:grpSpPr>
+      <p:sp>
+        <p:nvSpPr>
+          <p:cNvPr id="2" name="Title 1">
+            <a:extLst>
+              <a:ext uri="{FF2B5EF4-FFF2-40B4-BE49-F238E27FC236}">
                 <a16:creationId xmlns:a16="http://schemas.microsoft.com/office/drawing/2014/main" id="{421C2F85-D865-4762-C073-D95F5BD52750}"/>
               </a:ext>
             </a:extLst>
@@ -6825,7 +7044,7 @@
 </p:sld>
 </file>
 
-<file path=ppt/slides/slide28.xml><?xml version="1.0" encoding="utf-8"?>
+<file path=ppt/slides/slide29.xml><?xml version="1.0" encoding="utf-8"?>
 <p:sld xmlns:a="http://schemas.openxmlformats.org/drawingml/2006/main" xmlns:r="http://schemas.openxmlformats.org/officeDocument/2006/relationships" xmlns:p="http://schemas.openxmlformats.org/presentationml/2006/main">
   <p:cSld>
     <p:spTree>
@@ -6995,7 +7214,154 @@
 </p:sld>
 </file>
 
-<file path=ppt/slides/slide29.xml><?xml version="1.0" encoding="utf-8"?>
+<file path=ppt/slides/slide3.xml><?xml version="1.0" encoding="utf-8"?>
+<p:sld xmlns:a="http://schemas.openxmlformats.org/drawingml/2006/main" xmlns:r="http://schemas.openxmlformats.org/officeDocument/2006/relationships" xmlns:p="http://schemas.openxmlformats.org/presentationml/2006/main">
+  <p:cSld>
+    <p:spTree>
+      <p:nvGrpSpPr>
+        <p:cNvPr id="1" name=""/>
+        <p:cNvGrpSpPr/>
+        <p:nvPr/>
+      </p:nvGrpSpPr>
+      <p:grpSpPr>
+        <a:xfrm>
+          <a:off x="0" y="0"/>
+          <a:ext cx="0" cy="0"/>
+          <a:chOff x="0" y="0"/>
+          <a:chExt cx="0" cy="0"/>
+        </a:xfrm>
+      </p:grpSpPr>
+      <p:sp>
+        <p:nvSpPr>
+          <p:cNvPr id="2" name="Title 1">
+            <a:extLst>
+              <a:ext uri="{FF2B5EF4-FFF2-40B4-BE49-F238E27FC236}">
+                <a16:creationId xmlns:a16="http://schemas.microsoft.com/office/drawing/2014/main" id="{AF1403F0-2E6F-69D3-4864-A86EF4E42364}"/>
+              </a:ext>
+            </a:extLst>
+          </p:cNvPr>
+          <p:cNvSpPr>
+            <a:spLocks noGrp="1"/>
+          </p:cNvSpPr>
+          <p:nvPr>
+            <p:ph type="title"/>
+          </p:nvPr>
+        </p:nvSpPr>
+        <p:spPr/>
+        <p:txBody>
+          <a:bodyPr/>
+          <a:lstStyle/>
+          <a:p>
+            <a:r>
+              <a:rPr lang="en-US" dirty="0"/>
+              <a:t>More Project Details</a:t>
+            </a:r>
+          </a:p>
+        </p:txBody>
+      </p:sp>
+      <p:sp>
+        <p:nvSpPr>
+          <p:cNvPr id="3" name="Content Placeholder 2">
+            <a:extLst>
+              <a:ext uri="{FF2B5EF4-FFF2-40B4-BE49-F238E27FC236}">
+                <a16:creationId xmlns:a16="http://schemas.microsoft.com/office/drawing/2014/main" id="{7C2E0A1A-65EE-AC03-68D1-349619DDCB80}"/>
+              </a:ext>
+            </a:extLst>
+          </p:cNvPr>
+          <p:cNvSpPr>
+            <a:spLocks noGrp="1"/>
+          </p:cNvSpPr>
+          <p:nvPr>
+            <p:ph idx="1"/>
+          </p:nvPr>
+        </p:nvSpPr>
+        <p:spPr>
+          <a:xfrm>
+            <a:off x="1451579" y="1853754"/>
+            <a:ext cx="9603275" cy="4272726"/>
+          </a:xfrm>
+        </p:spPr>
+        <p:txBody>
+          <a:bodyPr>
+            <a:normAutofit lnSpcReduction="10000"/>
+          </a:bodyPr>
+          <a:lstStyle/>
+          <a:p>
+            <a:r>
+              <a:rPr lang="en-US" dirty="0"/>
+              <a:t>There’s a document on Brightspace with some tips on sharing work. </a:t>
+            </a:r>
+          </a:p>
+          <a:p>
+            <a:pPr lvl="1"/>
+            <a:r>
+              <a:rPr lang="en-US" dirty="0"/>
+              <a:t>It isn’t as simple as a google doc or something. </a:t>
+            </a:r>
+          </a:p>
+          <a:p>
+            <a:pPr lvl="1"/>
+            <a:r>
+              <a:rPr lang="en-US" dirty="0"/>
+              <a:t>Easiest is to setup a starting point with all data added, then each person builds their own sheets from that shared starting point. </a:t>
+            </a:r>
+          </a:p>
+          <a:p>
+            <a:pPr lvl="1"/>
+            <a:r>
+              <a:rPr lang="en-US" dirty="0"/>
+              <a:t>At the end someone will need to manually combine the workbooks into one, not super hard, but takes a bit of time as you’ll need to do final layout and such. </a:t>
+            </a:r>
+          </a:p>
+          <a:p>
+            <a:r>
+              <a:rPr lang="en-US" dirty="0"/>
+              <a:t>I can’t ever emphasize how much easier this is if you do stuff early. </a:t>
+            </a:r>
+          </a:p>
+          <a:p>
+            <a:r>
+              <a:rPr lang="en-US" dirty="0"/>
+              <a:t>Remember, you need to communicate something with this visualization. </a:t>
+            </a:r>
+          </a:p>
+          <a:p>
+            <a:pPr lvl="1"/>
+            <a:r>
+              <a:rPr lang="en-US" dirty="0"/>
+              <a:t>There should be some thesis like statement – this story shows/explains this stuff….</a:t>
+            </a:r>
+          </a:p>
+          <a:p>
+            <a:pPr lvl="1"/>
+            <a:r>
+              <a:rPr lang="en-US" dirty="0"/>
+              <a:t>There are multiple aspects that you’ll need to cover, that takes time to organize. </a:t>
+            </a:r>
+          </a:p>
+          <a:p>
+            <a:pPr lvl="1"/>
+            <a:r>
+              <a:rPr lang="en-US" dirty="0"/>
+              <a:t>Refer to the storytelling techniques and visual vocabulary for starting points. </a:t>
+            </a:r>
+          </a:p>
+        </p:txBody>
+      </p:sp>
+    </p:spTree>
+    <p:extLst>
+      <p:ext uri="{BB962C8B-B14F-4D97-AF65-F5344CB8AC3E}">
+        <p14:creationId xmlns:p14="http://schemas.microsoft.com/office/powerpoint/2010/main" val="2334346036"/>
+      </p:ext>
+    </p:extLst>
+  </p:cSld>
+  <p:clrMapOvr>
+    <a:masterClrMapping/>
+  </p:clrMapOvr>
+</p:sld>
+</file>
+
+<file path=ppt/slides/slide30.xml><?xml version="1.0" encoding="utf-8"?>
 <p:sld xmlns:a="http://schemas.openxmlformats.org/drawingml/2006/main" xmlns:r="http://schemas.openxmlformats.org/officeDocument/2006/relationships" xmlns:p="http://schemas.openxmlformats.org/presentationml/2006/main">
   <p:cSld>
     <p:spTree>
@@ -7215,154 +7581,7 @@
 </p:sld>
 </file>
 
-<file path=ppt/slides/slide3.xml><?xml version="1.0" encoding="utf-8"?>
-<p:sld xmlns:a="http://schemas.openxmlformats.org/drawingml/2006/main" xmlns:r="http://schemas.openxmlformats.org/officeDocument/2006/relationships" xmlns:p="http://schemas.openxmlformats.org/presentationml/2006/main">
-  <p:cSld>
-    <p:spTree>
-      <p:nvGrpSpPr>
-        <p:cNvPr id="1" name=""/>
-        <p:cNvGrpSpPr/>
-        <p:nvPr/>
-      </p:nvGrpSpPr>
-      <p:grpSpPr>
-        <a:xfrm>
-          <a:off x="0" y="0"/>
-          <a:ext cx="0" cy="0"/>
-          <a:chOff x="0" y="0"/>
-          <a:chExt cx="0" cy="0"/>
-        </a:xfrm>
-      </p:grpSpPr>
-      <p:sp>
-        <p:nvSpPr>
-          <p:cNvPr id="2" name="Title 1">
-            <a:extLst>
-              <a:ext uri="{FF2B5EF4-FFF2-40B4-BE49-F238E27FC236}">
-                <a16:creationId xmlns:a16="http://schemas.microsoft.com/office/drawing/2014/main" id="{AF1403F0-2E6F-69D3-4864-A86EF4E42364}"/>
-              </a:ext>
-            </a:extLst>
-          </p:cNvPr>
-          <p:cNvSpPr>
-            <a:spLocks noGrp="1"/>
-          </p:cNvSpPr>
-          <p:nvPr>
-            <p:ph type="title"/>
-          </p:nvPr>
-        </p:nvSpPr>
-        <p:spPr/>
-        <p:txBody>
-          <a:bodyPr/>
-          <a:lstStyle/>
-          <a:p>
-            <a:r>
-              <a:rPr lang="en-US" dirty="0"/>
-              <a:t>More Project Details</a:t>
-            </a:r>
-          </a:p>
-        </p:txBody>
-      </p:sp>
-      <p:sp>
-        <p:nvSpPr>
-          <p:cNvPr id="3" name="Content Placeholder 2">
-            <a:extLst>
-              <a:ext uri="{FF2B5EF4-FFF2-40B4-BE49-F238E27FC236}">
-                <a16:creationId xmlns:a16="http://schemas.microsoft.com/office/drawing/2014/main" id="{7C2E0A1A-65EE-AC03-68D1-349619DDCB80}"/>
-              </a:ext>
-            </a:extLst>
-          </p:cNvPr>
-          <p:cNvSpPr>
-            <a:spLocks noGrp="1"/>
-          </p:cNvSpPr>
-          <p:nvPr>
-            <p:ph idx="1"/>
-          </p:nvPr>
-        </p:nvSpPr>
-        <p:spPr>
-          <a:xfrm>
-            <a:off x="1451579" y="1853754"/>
-            <a:ext cx="9603275" cy="4272726"/>
-          </a:xfrm>
-        </p:spPr>
-        <p:txBody>
-          <a:bodyPr>
-            <a:normAutofit lnSpcReduction="10000"/>
-          </a:bodyPr>
-          <a:lstStyle/>
-          <a:p>
-            <a:r>
-              <a:rPr lang="en-US" dirty="0"/>
-              <a:t>There’s a document on Brightspace with some tips on sharing work. </a:t>
-            </a:r>
-          </a:p>
-          <a:p>
-            <a:pPr lvl="1"/>
-            <a:r>
-              <a:rPr lang="en-US" dirty="0"/>
-              <a:t>It isn’t as simple as a google doc or something. </a:t>
-            </a:r>
-          </a:p>
-          <a:p>
-            <a:pPr lvl="1"/>
-            <a:r>
-              <a:rPr lang="en-US" dirty="0"/>
-              <a:t>Easiest is to setup a starting point with all data added, then each person builds their own sheets from that shared starting point. </a:t>
-            </a:r>
-          </a:p>
-          <a:p>
-            <a:pPr lvl="1"/>
-            <a:r>
-              <a:rPr lang="en-US" dirty="0"/>
-              <a:t>At the end someone will need to manually combine the workbooks into one, not super hard, but takes a bit of time as you’ll need to do final layout and such. </a:t>
-            </a:r>
-          </a:p>
-          <a:p>
-            <a:r>
-              <a:rPr lang="en-US" dirty="0"/>
-              <a:t>I can’t ever emphasize how much easier this is if you do stuff early. </a:t>
-            </a:r>
-          </a:p>
-          <a:p>
-            <a:r>
-              <a:rPr lang="en-US" dirty="0"/>
-              <a:t>Remember, you need to communicate something with this visualization. </a:t>
-            </a:r>
-          </a:p>
-          <a:p>
-            <a:pPr lvl="1"/>
-            <a:r>
-              <a:rPr lang="en-US" dirty="0"/>
-              <a:t>There should be some thesis like statement – this story shows/explains this stuff….</a:t>
-            </a:r>
-          </a:p>
-          <a:p>
-            <a:pPr lvl="1"/>
-            <a:r>
-              <a:rPr lang="en-US" dirty="0"/>
-              <a:t>There are multiple aspects that you’ll need to cover, that takes time to organize. </a:t>
-            </a:r>
-          </a:p>
-          <a:p>
-            <a:pPr lvl="1"/>
-            <a:r>
-              <a:rPr lang="en-US" dirty="0"/>
-              <a:t>Refer to the storytelling techniques and visual vocabulary for starting points. </a:t>
-            </a:r>
-          </a:p>
-        </p:txBody>
-      </p:sp>
-    </p:spTree>
-    <p:extLst>
-      <p:ext uri="{BB962C8B-B14F-4D97-AF65-F5344CB8AC3E}">
-        <p14:creationId xmlns:p14="http://schemas.microsoft.com/office/powerpoint/2010/main" val="2334346036"/>
-      </p:ext>
-    </p:extLst>
-  </p:cSld>
-  <p:clrMapOvr>
-    <a:masterClrMapping/>
-  </p:clrMapOvr>
-</p:sld>
-</file>
-
-<file path=ppt/slides/slide30.xml><?xml version="1.0" encoding="utf-8"?>
+<file path=ppt/slides/slide31.xml><?xml version="1.0" encoding="utf-8"?>
 <p:sld xmlns:a="http://schemas.openxmlformats.org/drawingml/2006/main" xmlns:r="http://schemas.openxmlformats.org/officeDocument/2006/relationships" xmlns:p="http://schemas.openxmlformats.org/presentationml/2006/main">
   <p:cSld>
     <p:spTree>
@@ -7563,159 +7782,6 @@
 </p:sld>
 </file>
 
-<file path=ppt/slides/slide31.xml><?xml version="1.0" encoding="utf-8"?>
-<p:sld xmlns:a="http://schemas.openxmlformats.org/drawingml/2006/main" xmlns:r="http://schemas.openxmlformats.org/officeDocument/2006/relationships" xmlns:p="http://schemas.openxmlformats.org/presentationml/2006/main">
-  <p:cSld>
-    <p:spTree>
-      <p:nvGrpSpPr>
-        <p:cNvPr id="1" name=""/>
-        <p:cNvGrpSpPr/>
-        <p:nvPr/>
-      </p:nvGrpSpPr>
-      <p:grpSpPr>
-        <a:xfrm>
-          <a:off x="0" y="0"/>
-          <a:ext cx="0" cy="0"/>
-          <a:chOff x="0" y="0"/>
-          <a:chExt cx="0" cy="0"/>
-        </a:xfrm>
-      </p:grpSpPr>
-      <p:sp>
-        <p:nvSpPr>
-          <p:cNvPr id="2" name="Title 1">
-            <a:extLst>
-              <a:ext uri="{FF2B5EF4-FFF2-40B4-BE49-F238E27FC236}">
-                <a16:creationId xmlns:a16="http://schemas.microsoft.com/office/drawing/2014/main" id="{29939436-0B9B-9E51-A316-C02EF3D3F4E0}"/>
-              </a:ext>
-            </a:extLst>
-          </p:cNvPr>
-          <p:cNvSpPr>
-            <a:spLocks noGrp="1"/>
-          </p:cNvSpPr>
-          <p:nvPr>
-            <p:ph type="title"/>
-          </p:nvPr>
-        </p:nvSpPr>
-        <p:spPr/>
-        <p:txBody>
-          <a:bodyPr/>
-          <a:lstStyle/>
-          <a:p>
-            <a:r>
-              <a:rPr lang="en-US" dirty="0"/>
-              <a:t>Real Life example – Bank Loans. </a:t>
-            </a:r>
-          </a:p>
-        </p:txBody>
-      </p:sp>
-      <p:sp>
-        <p:nvSpPr>
-          <p:cNvPr id="3" name="Content Placeholder 2">
-            <a:extLst>
-              <a:ext uri="{FF2B5EF4-FFF2-40B4-BE49-F238E27FC236}">
-                <a16:creationId xmlns:a16="http://schemas.microsoft.com/office/drawing/2014/main" id="{44A91243-65A2-B7DE-611F-D1E424943027}"/>
-              </a:ext>
-            </a:extLst>
-          </p:cNvPr>
-          <p:cNvSpPr>
-            <a:spLocks noGrp="1"/>
-          </p:cNvSpPr>
-          <p:nvPr>
-            <p:ph idx="1"/>
-          </p:nvPr>
-        </p:nvSpPr>
-        <p:spPr>
-          <a:xfrm>
-            <a:off x="1451579" y="1853754"/>
-            <a:ext cx="9780013" cy="4271001"/>
-          </a:xfrm>
-        </p:spPr>
-        <p:txBody>
-          <a:bodyPr/>
-          <a:lstStyle/>
-          <a:p>
-            <a:r>
-              <a:rPr lang="en-US" dirty="0"/>
-              <a:t>To get a loan at a bank you fill out information (income, age, job, loan amt </a:t>
-            </a:r>
-            <a:r>
-              <a:rPr lang="en-US" dirty="0" err="1"/>
-              <a:t>etc</a:t>
-            </a:r>
-            <a:r>
-              <a:rPr lang="en-US" dirty="0"/>
-              <a:t>…), more info (e.g. credit score) is gathered by the bank, and these are the inputs to decide. </a:t>
-            </a:r>
-          </a:p>
-          <a:p>
-            <a:r>
-              <a:rPr lang="en-US" dirty="0"/>
-              <a:t>Traditionally, this goes to an underwriter (person who evaluates loan risk). </a:t>
-            </a:r>
-          </a:p>
-          <a:p>
-            <a:pPr lvl="1"/>
-            <a:r>
-              <a:rPr lang="en-US" dirty="0"/>
-              <a:t>They make a decision on approval and/or interest rate based on many rules. </a:t>
-            </a:r>
-          </a:p>
-          <a:p>
-            <a:pPr lvl="1"/>
-            <a:r>
-              <a:rPr lang="en-US" dirty="0"/>
-              <a:t>If income is +/-, credit score is +/-, savings amounts….</a:t>
-            </a:r>
-          </a:p>
-          <a:p>
-            <a:pPr lvl="1"/>
-            <a:r>
-              <a:rPr lang="en-US" dirty="0"/>
-              <a:t>It is basically a flow chart of decisions to slot you into a category – how risky are you. </a:t>
-            </a:r>
-          </a:p>
-          <a:p>
-            <a:r>
-              <a:rPr lang="en-US" dirty="0"/>
-              <a:t>The rules used to decide are made by experts, based on experience. </a:t>
-            </a:r>
-          </a:p>
-          <a:p>
-            <a:pPr lvl="1"/>
-            <a:r>
-              <a:rPr lang="en-US" dirty="0"/>
-              <a:t>From all the past loans we gave, what happened? Who paid, who defaulted, what are their stats.</a:t>
-            </a:r>
-          </a:p>
-          <a:p>
-            <a:pPr lvl="1"/>
-            <a:r>
-              <a:rPr lang="en-US" dirty="0"/>
-              <a:t>Experts basically translate history and expectations into a model – inputs to output. </a:t>
-            </a:r>
-          </a:p>
-          <a:p>
-            <a:pPr lvl="1"/>
-            <a:r>
-              <a:rPr lang="en-US" dirty="0"/>
-              <a:t>They need to know/identify what’s associated with good/bad loans. </a:t>
-            </a:r>
-          </a:p>
-        </p:txBody>
-      </p:sp>
-    </p:spTree>
-    <p:extLst>
-      <p:ext uri="{BB962C8B-B14F-4D97-AF65-F5344CB8AC3E}">
-        <p14:creationId xmlns:p14="http://schemas.microsoft.com/office/powerpoint/2010/main" val="1485589604"/>
-      </p:ext>
-    </p:extLst>
-  </p:cSld>
-  <p:clrMapOvr>
-    <a:masterClrMapping/>
-  </p:clrMapOvr>
-</p:sld>
-</file>
-
 <file path=ppt/slides/slide32.xml><?xml version="1.0" encoding="utf-8"?>
 <p:sld xmlns:a="http://schemas.openxmlformats.org/drawingml/2006/main" xmlns:r="http://schemas.openxmlformats.org/officeDocument/2006/relationships" xmlns:p="http://schemas.openxmlformats.org/presentationml/2006/main">
   <p:cSld>
@@ -7738,6 +7804,159 @@
           <p:cNvPr id="2" name="Title 1">
             <a:extLst>
               <a:ext uri="{FF2B5EF4-FFF2-40B4-BE49-F238E27FC236}">
+                <a16:creationId xmlns:a16="http://schemas.microsoft.com/office/drawing/2014/main" id="{29939436-0B9B-9E51-A316-C02EF3D3F4E0}"/>
+              </a:ext>
+            </a:extLst>
+          </p:cNvPr>
+          <p:cNvSpPr>
+            <a:spLocks noGrp="1"/>
+          </p:cNvSpPr>
+          <p:nvPr>
+            <p:ph type="title"/>
+          </p:nvPr>
+        </p:nvSpPr>
+        <p:spPr/>
+        <p:txBody>
+          <a:bodyPr/>
+          <a:lstStyle/>
+          <a:p>
+            <a:r>
+              <a:rPr lang="en-US" dirty="0"/>
+              <a:t>Real Life example – Bank Loans. </a:t>
+            </a:r>
+          </a:p>
+        </p:txBody>
+      </p:sp>
+      <p:sp>
+        <p:nvSpPr>
+          <p:cNvPr id="3" name="Content Placeholder 2">
+            <a:extLst>
+              <a:ext uri="{FF2B5EF4-FFF2-40B4-BE49-F238E27FC236}">
+                <a16:creationId xmlns:a16="http://schemas.microsoft.com/office/drawing/2014/main" id="{44A91243-65A2-B7DE-611F-D1E424943027}"/>
+              </a:ext>
+            </a:extLst>
+          </p:cNvPr>
+          <p:cNvSpPr>
+            <a:spLocks noGrp="1"/>
+          </p:cNvSpPr>
+          <p:nvPr>
+            <p:ph idx="1"/>
+          </p:nvPr>
+        </p:nvSpPr>
+        <p:spPr>
+          <a:xfrm>
+            <a:off x="1451579" y="1853754"/>
+            <a:ext cx="9780013" cy="4271001"/>
+          </a:xfrm>
+        </p:spPr>
+        <p:txBody>
+          <a:bodyPr/>
+          <a:lstStyle/>
+          <a:p>
+            <a:r>
+              <a:rPr lang="en-US" dirty="0"/>
+              <a:t>To get a loan at a bank you fill out information (income, age, job, loan amt </a:t>
+            </a:r>
+            <a:r>
+              <a:rPr lang="en-US" dirty="0" err="1"/>
+              <a:t>etc</a:t>
+            </a:r>
+            <a:r>
+              <a:rPr lang="en-US" dirty="0"/>
+              <a:t>…), more info (e.g. credit score) is gathered by the bank, and these are the inputs to decide. </a:t>
+            </a:r>
+          </a:p>
+          <a:p>
+            <a:r>
+              <a:rPr lang="en-US" dirty="0"/>
+              <a:t>Traditionally, this goes to an underwriter (person who evaluates loan risk). </a:t>
+            </a:r>
+          </a:p>
+          <a:p>
+            <a:pPr lvl="1"/>
+            <a:r>
+              <a:rPr lang="en-US" dirty="0"/>
+              <a:t>They make a decision on approval and/or interest rate based on many rules. </a:t>
+            </a:r>
+          </a:p>
+          <a:p>
+            <a:pPr lvl="1"/>
+            <a:r>
+              <a:rPr lang="en-US" dirty="0"/>
+              <a:t>If income is +/-, credit score is +/-, savings amounts….</a:t>
+            </a:r>
+          </a:p>
+          <a:p>
+            <a:pPr lvl="1"/>
+            <a:r>
+              <a:rPr lang="en-US" dirty="0"/>
+              <a:t>It is basically a flow chart of decisions to slot you into a category – how risky are you. </a:t>
+            </a:r>
+          </a:p>
+          <a:p>
+            <a:r>
+              <a:rPr lang="en-US" dirty="0"/>
+              <a:t>The rules used to decide are made by experts, based on experience. </a:t>
+            </a:r>
+          </a:p>
+          <a:p>
+            <a:pPr lvl="1"/>
+            <a:r>
+              <a:rPr lang="en-US" dirty="0"/>
+              <a:t>From all the past loans we gave, what happened? Who paid, who defaulted, what are their stats.</a:t>
+            </a:r>
+          </a:p>
+          <a:p>
+            <a:pPr lvl="1"/>
+            <a:r>
+              <a:rPr lang="en-US" dirty="0"/>
+              <a:t>Experts basically translate history and expectations into a model – inputs to output. </a:t>
+            </a:r>
+          </a:p>
+          <a:p>
+            <a:pPr lvl="1"/>
+            <a:r>
+              <a:rPr lang="en-US" dirty="0"/>
+              <a:t>They need to know/identify what’s associated with good/bad loans. </a:t>
+            </a:r>
+          </a:p>
+        </p:txBody>
+      </p:sp>
+    </p:spTree>
+    <p:extLst>
+      <p:ext uri="{BB962C8B-B14F-4D97-AF65-F5344CB8AC3E}">
+        <p14:creationId xmlns:p14="http://schemas.microsoft.com/office/powerpoint/2010/main" val="1485589604"/>
+      </p:ext>
+    </p:extLst>
+  </p:cSld>
+  <p:clrMapOvr>
+    <a:masterClrMapping/>
+  </p:clrMapOvr>
+</p:sld>
+</file>
+
+<file path=ppt/slides/slide33.xml><?xml version="1.0" encoding="utf-8"?>
+<p:sld xmlns:a="http://schemas.openxmlformats.org/drawingml/2006/main" xmlns:r="http://schemas.openxmlformats.org/officeDocument/2006/relationships" xmlns:p="http://schemas.openxmlformats.org/presentationml/2006/main">
+  <p:cSld>
+    <p:spTree>
+      <p:nvGrpSpPr>
+        <p:cNvPr id="1" name=""/>
+        <p:cNvGrpSpPr/>
+        <p:nvPr/>
+      </p:nvGrpSpPr>
+      <p:grpSpPr>
+        <a:xfrm>
+          <a:off x="0" y="0"/>
+          <a:ext cx="0" cy="0"/>
+          <a:chOff x="0" y="0"/>
+          <a:chExt cx="0" cy="0"/>
+        </a:xfrm>
+      </p:grpSpPr>
+      <p:sp>
+        <p:nvSpPr>
+          <p:cNvPr id="2" name="Title 1">
+            <a:extLst>
+              <a:ext uri="{FF2B5EF4-FFF2-40B4-BE49-F238E27FC236}">
                 <a16:creationId xmlns:a16="http://schemas.microsoft.com/office/drawing/2014/main" id="{EEB6481B-7DAE-6FF7-16A5-4FEB89D47E1E}"/>
               </a:ext>
             </a:extLst>
@@ -7877,7 +8096,7 @@
 </p:sld>
 </file>
 
-<file path=ppt/slides/slide33.xml><?xml version="1.0" encoding="utf-8"?>
+<file path=ppt/slides/slide34.xml><?xml version="1.0" encoding="utf-8"?>
 <p:sld xmlns:a="http://schemas.openxmlformats.org/drawingml/2006/main" xmlns:r="http://schemas.openxmlformats.org/officeDocument/2006/relationships" xmlns:p="http://schemas.openxmlformats.org/presentationml/2006/main">
   <p:cSld>
     <p:spTree>
@@ -8071,7 +8290,181 @@
 </p:sld>
 </file>
 
-<file path=ppt/slides/slide34.xml><?xml version="1.0" encoding="utf-8"?>
+<file path=ppt/slides/slide35.xml><?xml version="1.0" encoding="utf-8"?>
+<p:sld xmlns:a="http://schemas.openxmlformats.org/drawingml/2006/main" xmlns:r="http://schemas.openxmlformats.org/officeDocument/2006/relationships" xmlns:p="http://schemas.openxmlformats.org/presentationml/2006/main">
+  <p:cSld>
+    <p:spTree>
+      <p:nvGrpSpPr>
+        <p:cNvPr id="1" name=""/>
+        <p:cNvGrpSpPr/>
+        <p:nvPr/>
+      </p:nvGrpSpPr>
+      <p:grpSpPr>
+        <a:xfrm>
+          <a:off x="0" y="0"/>
+          <a:ext cx="0" cy="0"/>
+          <a:chOff x="0" y="0"/>
+          <a:chExt cx="0" cy="0"/>
+        </a:xfrm>
+      </p:grpSpPr>
+      <p:sp>
+        <p:nvSpPr>
+          <p:cNvPr id="2" name="Title 1">
+            <a:extLst>
+              <a:ext uri="{FF2B5EF4-FFF2-40B4-BE49-F238E27FC236}">
+                <a16:creationId xmlns:a16="http://schemas.microsoft.com/office/drawing/2014/main" id="{38C84442-0D43-4784-E74A-C5F169762C08}"/>
+              </a:ext>
+            </a:extLst>
+          </p:cNvPr>
+          <p:cNvSpPr>
+            <a:spLocks noGrp="1"/>
+          </p:cNvSpPr>
+          <p:nvPr>
+            <p:ph type="title"/>
+          </p:nvPr>
+        </p:nvSpPr>
+        <p:spPr/>
+        <p:txBody>
+          <a:bodyPr/>
+          <a:lstStyle/>
+          <a:p>
+            <a:r>
+              <a:rPr lang="en-US" dirty="0"/>
+              <a:t>In Tableau…</a:t>
+            </a:r>
+          </a:p>
+        </p:txBody>
+      </p:sp>
+      <p:sp>
+        <p:nvSpPr>
+          <p:cNvPr id="3" name="Content Placeholder 2">
+            <a:extLst>
+              <a:ext uri="{FF2B5EF4-FFF2-40B4-BE49-F238E27FC236}">
+                <a16:creationId xmlns:a16="http://schemas.microsoft.com/office/drawing/2014/main" id="{494DFFB8-8162-6FB5-E375-D8D7E345BB5A}"/>
+              </a:ext>
+            </a:extLst>
+          </p:cNvPr>
+          <p:cNvSpPr>
+            <a:spLocks noGrp="1"/>
+          </p:cNvSpPr>
+          <p:nvPr>
+            <p:ph idx="1"/>
+          </p:nvPr>
+        </p:nvSpPr>
+        <p:spPr>
+          <a:xfrm>
+            <a:off x="1451579" y="1853754"/>
+            <a:ext cx="9603275" cy="4199727"/>
+          </a:xfrm>
+        </p:spPr>
+        <p:txBody>
+          <a:bodyPr/>
+          <a:lstStyle/>
+          <a:p>
+            <a:r>
+              <a:rPr lang="en-US" dirty="0"/>
+              <a:t>In Tableau we can make some simple models. </a:t>
+            </a:r>
+          </a:p>
+          <a:p>
+            <a:r>
+              <a:rPr lang="en-US" dirty="0"/>
+              <a:t>Model quintile:</a:t>
+            </a:r>
+          </a:p>
+          <a:p>
+            <a:pPr lvl="1"/>
+            <a:r>
+              <a:rPr lang="en-US" dirty="0"/>
+              <a:t>Can use to predict the expected value of K percentile, e.g. .5 predicts median. </a:t>
+            </a:r>
+          </a:p>
+          <a:p>
+            <a:r>
+              <a:rPr lang="en-US" dirty="0"/>
+              <a:t>Model percentile:</a:t>
+            </a:r>
+          </a:p>
+          <a:p>
+            <a:pPr lvl="1"/>
+            <a:r>
+              <a:rPr lang="en-US" dirty="0"/>
+              <a:t>Based on the expected distribution, where does this value lie.</a:t>
+            </a:r>
+          </a:p>
+          <a:p>
+            <a:pPr lvl="1"/>
+            <a:r>
+              <a:rPr lang="en-US" dirty="0"/>
+              <a:t>I.e. is it at the top end of what we’d expect, the bottom, or in line with expectations. </a:t>
+            </a:r>
+          </a:p>
+          <a:p>
+            <a:r>
+              <a:rPr lang="en-US" dirty="0"/>
+              <a:t>Both of these are with respect to some inputs (features, x values):</a:t>
+            </a:r>
+          </a:p>
+          <a:p>
+            <a:pPr lvl="1"/>
+            <a:r>
+              <a:rPr lang="en-US" dirty="0"/>
+              <a:t>We provide what we want to predict (target) as well as what data to use to do it. </a:t>
+            </a:r>
+          </a:p>
+          <a:p>
+            <a:pPr lvl="1"/>
+            <a:r>
+              <a:rPr lang="en-US" dirty="0"/>
+              <a:t>Machine figures out how to translate from in-&gt;out by doing some math. </a:t>
+            </a:r>
+          </a:p>
+        </p:txBody>
+      </p:sp>
+      <p:pic>
+        <p:nvPicPr>
+          <p:cNvPr id="4" name="Picture 3">
+            <a:extLst>
+              <a:ext uri="{FF2B5EF4-FFF2-40B4-BE49-F238E27FC236}">
+                <a16:creationId xmlns:a16="http://schemas.microsoft.com/office/drawing/2014/main" id="{1F15AD2D-81EE-232F-2F10-AA82B702D92C}"/>
+              </a:ext>
+            </a:extLst>
+          </p:cNvPr>
+          <p:cNvPicPr>
+            <a:picLocks noChangeAspect="1"/>
+          </p:cNvPicPr>
+          <p:nvPr/>
+        </p:nvPicPr>
+        <p:blipFill>
+          <a:blip r:embed="rId2"/>
+          <a:stretch>
+            <a:fillRect/>
+          </a:stretch>
+        </p:blipFill>
+        <p:spPr>
+          <a:xfrm>
+            <a:off x="7402286" y="0"/>
+            <a:ext cx="4789714" cy="2718163"/>
+          </a:xfrm>
+          <a:prstGeom prst="rect">
+            <a:avLst/>
+          </a:prstGeom>
+        </p:spPr>
+      </p:pic>
+    </p:spTree>
+    <p:extLst>
+      <p:ext uri="{BB962C8B-B14F-4D97-AF65-F5344CB8AC3E}">
+        <p14:creationId xmlns:p14="http://schemas.microsoft.com/office/powerpoint/2010/main" val="1407505856"/>
+      </p:ext>
+    </p:extLst>
+  </p:cSld>
+  <p:clrMapOvr>
+    <a:masterClrMapping/>
+  </p:clrMapOvr>
+</p:sld>
+</file>
+
+<file path=ppt/slides/slide36.xml><?xml version="1.0" encoding="utf-8"?>
 <p:sld xmlns:a="http://schemas.openxmlformats.org/drawingml/2006/main" xmlns:r="http://schemas.openxmlformats.org/officeDocument/2006/relationships" xmlns:p="http://schemas.openxmlformats.org/presentationml/2006/main">
   <p:cSld>
     <p:spTree>
@@ -8256,7 +8649,7 @@
 </p:sld>
 </file>
 
-<file path=ppt/slides/slide35.xml><?xml version="1.0" encoding="utf-8"?>
+<file path=ppt/slides/slide37.xml><?xml version="1.0" encoding="utf-8"?>
 <p:sld xmlns:a="http://schemas.openxmlformats.org/drawingml/2006/main" xmlns:r="http://schemas.openxmlformats.org/officeDocument/2006/relationships" xmlns:p="http://schemas.openxmlformats.org/presentationml/2006/main">
   <p:cSld>
     <p:spTree>
@@ -8401,7 +8794,7 @@
 </p:sld>
 </file>
 
-<file path=ppt/slides/slide36.xml><?xml version="1.0" encoding="utf-8"?>
+<file path=ppt/slides/slide38.xml><?xml version="1.0" encoding="utf-8"?>
 <p:sld xmlns:a="http://schemas.openxmlformats.org/drawingml/2006/main" xmlns:r="http://schemas.openxmlformats.org/officeDocument/2006/relationships" xmlns:p="http://schemas.openxmlformats.org/presentationml/2006/main">
   <p:cSld>
     <p:spTree>
@@ -8628,7 +9021,7 @@
 </p:sld>
 </file>
 
-<file path=ppt/slides/slide37.xml><?xml version="1.0" encoding="utf-8"?>
+<file path=ppt/slides/slide39.xml><?xml version="1.0" encoding="utf-8"?>
 <p:sld xmlns:a="http://schemas.openxmlformats.org/drawingml/2006/main" xmlns:r="http://schemas.openxmlformats.org/officeDocument/2006/relationships" xmlns:p="http://schemas.openxmlformats.org/presentationml/2006/main">
   <p:cSld>
     <p:spTree>
@@ -8813,7 +9206,92 @@
 </p:sld>
 </file>
 
-<file path=ppt/slides/slide38.xml><?xml version="1.0" encoding="utf-8"?>
+<file path=ppt/slides/slide4.xml><?xml version="1.0" encoding="utf-8"?>
+<p:sld xmlns:a="http://schemas.openxmlformats.org/drawingml/2006/main" xmlns:r="http://schemas.openxmlformats.org/officeDocument/2006/relationships" xmlns:p="http://schemas.openxmlformats.org/presentationml/2006/main">
+  <p:cSld>
+    <p:spTree>
+      <p:nvGrpSpPr>
+        <p:cNvPr id="1" name=""/>
+        <p:cNvGrpSpPr/>
+        <p:nvPr/>
+      </p:nvGrpSpPr>
+      <p:grpSpPr>
+        <a:xfrm>
+          <a:off x="0" y="0"/>
+          <a:ext cx="0" cy="0"/>
+          <a:chOff x="0" y="0"/>
+          <a:chExt cx="0" cy="0"/>
+        </a:xfrm>
+      </p:grpSpPr>
+      <p:sp>
+        <p:nvSpPr>
+          <p:cNvPr id="2" name="Title 1">
+            <a:extLst>
+              <a:ext uri="{FF2B5EF4-FFF2-40B4-BE49-F238E27FC236}">
+                <a16:creationId xmlns:a16="http://schemas.microsoft.com/office/drawing/2014/main" id="{AD0A358F-3029-3B46-8F88-5B7AAD9B2E72}"/>
+              </a:ext>
+            </a:extLst>
+          </p:cNvPr>
+          <p:cNvSpPr>
+            <a:spLocks noGrp="1"/>
+          </p:cNvSpPr>
+          <p:nvPr>
+            <p:ph type="ctrTitle"/>
+          </p:nvPr>
+        </p:nvSpPr>
+        <p:spPr/>
+        <p:txBody>
+          <a:bodyPr>
+            <a:normAutofit fontScale="90000"/>
+          </a:bodyPr>
+          <a:lstStyle/>
+          <a:p>
+            <a:r>
+              <a:rPr lang="en-US" dirty="0"/>
+              <a:t>Regression Models and Time Series Forecasting</a:t>
+            </a:r>
+          </a:p>
+        </p:txBody>
+      </p:sp>
+      <p:sp>
+        <p:nvSpPr>
+          <p:cNvPr id="3" name="Subtitle 2">
+            <a:extLst>
+              <a:ext uri="{FF2B5EF4-FFF2-40B4-BE49-F238E27FC236}">
+                <a16:creationId xmlns:a16="http://schemas.microsoft.com/office/drawing/2014/main" id="{BA00FEBA-B494-5046-9CD2-12082358FE92}"/>
+              </a:ext>
+            </a:extLst>
+          </p:cNvPr>
+          <p:cNvSpPr>
+            <a:spLocks noGrp="1"/>
+          </p:cNvSpPr>
+          <p:nvPr>
+            <p:ph type="subTitle" idx="1"/>
+          </p:nvPr>
+        </p:nvSpPr>
+        <p:spPr/>
+        <p:txBody>
+          <a:bodyPr/>
+          <a:lstStyle/>
+          <a:p>
+            <a:endParaRPr lang="en-US"/>
+          </a:p>
+        </p:txBody>
+      </p:sp>
+    </p:spTree>
+    <p:extLst>
+      <p:ext uri="{BB962C8B-B14F-4D97-AF65-F5344CB8AC3E}">
+        <p14:creationId xmlns:p14="http://schemas.microsoft.com/office/powerpoint/2010/main" val="3614949151"/>
+      </p:ext>
+    </p:extLst>
+  </p:cSld>
+  <p:clrMapOvr>
+    <a:masterClrMapping/>
+  </p:clrMapOvr>
+</p:sld>
+</file>
+
+<file path=ppt/slides/slide40.xml><?xml version="1.0" encoding="utf-8"?>
 <p:sld xmlns:a="http://schemas.openxmlformats.org/drawingml/2006/main" xmlns:r="http://schemas.openxmlformats.org/officeDocument/2006/relationships" xmlns:p="http://schemas.openxmlformats.org/presentationml/2006/main">
   <p:cSld>
     <p:spTree>
@@ -8976,7 +9454,7 @@
 </p:sld>
 </file>
 
-<file path=ppt/slides/slide39.xml><?xml version="1.0" encoding="utf-8"?>
+<file path=ppt/slides/slide41.xml><?xml version="1.0" encoding="utf-8"?>
 <p:sld xmlns:a="http://schemas.openxmlformats.org/drawingml/2006/main" xmlns:r="http://schemas.openxmlformats.org/officeDocument/2006/relationships" xmlns:p="http://schemas.openxmlformats.org/presentationml/2006/main">
   <p:cSld>
     <p:spTree>
@@ -9039,8 +9517,8 @@
         </p:nvSpPr>
         <p:spPr>
           <a:xfrm>
-            <a:off x="426203" y="2015732"/>
-            <a:ext cx="5669797" cy="4037749"/>
+            <a:off x="426203" y="1913710"/>
+            <a:ext cx="5669797" cy="4139772"/>
           </a:xfrm>
         </p:spPr>
         <p:txBody>
@@ -9055,7 +9533,7 @@
           <a:p>
             <a:r>
               <a:rPr lang="en-US" dirty="0"/>
-              <a:t>Supervised:</a:t>
+              <a:t>Supervised learning models:</a:t>
             </a:r>
           </a:p>
           <a:p>
@@ -9082,7 +9560,7 @@
           <a:p>
             <a:r>
               <a:rPr lang="en-US" dirty="0"/>
-              <a:t>Unsupervised:</a:t>
+              <a:t>Unsupervised learning models:</a:t>
             </a:r>
           </a:p>
           <a:p>
@@ -9096,20 +9574,15 @@
             <a:pPr lvl="1"/>
             <a:r>
               <a:rPr lang="en-US" dirty="0"/>
-              <a:t>We input data and get results, its exploratory. </a:t>
-            </a:r>
-          </a:p>
-          <a:p>
-            <a:pPr lvl="1"/>
-            <a:r>
-              <a:rPr lang="en-US" dirty="0"/>
-              <a:t>Clustering </a:t>
-            </a:r>
-            <a:r>
-              <a:rPr lang="en-US"/>
-              <a:t>and association fall here. </a:t>
-            </a:r>
-            <a:endParaRPr lang="en-US" dirty="0"/>
+              <a:t>Finds relationships within data. </a:t>
+            </a:r>
+          </a:p>
+          <a:p>
+            <a:pPr lvl="1"/>
+            <a:r>
+              <a:rPr lang="en-US" dirty="0"/>
+              <a:t>Clustering and association fall here. </a:t>
+            </a:r>
           </a:p>
           <a:p>
             <a:endParaRPr lang="en-US" dirty="0"/>
@@ -9176,92 +9649,7 @@
 </p:sld>
 </file>
 
-<file path=ppt/slides/slide4.xml><?xml version="1.0" encoding="utf-8"?>
-<p:sld xmlns:a="http://schemas.openxmlformats.org/drawingml/2006/main" xmlns:r="http://schemas.openxmlformats.org/officeDocument/2006/relationships" xmlns:p="http://schemas.openxmlformats.org/presentationml/2006/main">
-  <p:cSld>
-    <p:spTree>
-      <p:nvGrpSpPr>
-        <p:cNvPr id="1" name=""/>
-        <p:cNvGrpSpPr/>
-        <p:nvPr/>
-      </p:nvGrpSpPr>
-      <p:grpSpPr>
-        <a:xfrm>
-          <a:off x="0" y="0"/>
-          <a:ext cx="0" cy="0"/>
-          <a:chOff x="0" y="0"/>
-          <a:chExt cx="0" cy="0"/>
-        </a:xfrm>
-      </p:grpSpPr>
-      <p:sp>
-        <p:nvSpPr>
-          <p:cNvPr id="2" name="Title 1">
-            <a:extLst>
-              <a:ext uri="{FF2B5EF4-FFF2-40B4-BE49-F238E27FC236}">
-                <a16:creationId xmlns:a16="http://schemas.microsoft.com/office/drawing/2014/main" id="{AD0A358F-3029-3B46-8F88-5B7AAD9B2E72}"/>
-              </a:ext>
-            </a:extLst>
-          </p:cNvPr>
-          <p:cNvSpPr>
-            <a:spLocks noGrp="1"/>
-          </p:cNvSpPr>
-          <p:nvPr>
-            <p:ph type="ctrTitle"/>
-          </p:nvPr>
-        </p:nvSpPr>
-        <p:spPr/>
-        <p:txBody>
-          <a:bodyPr>
-            <a:normAutofit fontScale="90000"/>
-          </a:bodyPr>
-          <a:lstStyle/>
-          <a:p>
-            <a:r>
-              <a:rPr lang="en-US" dirty="0"/>
-              <a:t>Regression Models and Time Series Forecasting</a:t>
-            </a:r>
-          </a:p>
-        </p:txBody>
-      </p:sp>
-      <p:sp>
-        <p:nvSpPr>
-          <p:cNvPr id="3" name="Subtitle 2">
-            <a:extLst>
-              <a:ext uri="{FF2B5EF4-FFF2-40B4-BE49-F238E27FC236}">
-                <a16:creationId xmlns:a16="http://schemas.microsoft.com/office/drawing/2014/main" id="{BA00FEBA-B494-5046-9CD2-12082358FE92}"/>
-              </a:ext>
-            </a:extLst>
-          </p:cNvPr>
-          <p:cNvSpPr>
-            <a:spLocks noGrp="1"/>
-          </p:cNvSpPr>
-          <p:nvPr>
-            <p:ph type="subTitle" idx="1"/>
-          </p:nvPr>
-        </p:nvSpPr>
-        <p:spPr/>
-        <p:txBody>
-          <a:bodyPr/>
-          <a:lstStyle/>
-          <a:p>
-            <a:endParaRPr lang="en-US"/>
-          </a:p>
-        </p:txBody>
-      </p:sp>
-    </p:spTree>
-    <p:extLst>
-      <p:ext uri="{BB962C8B-B14F-4D97-AF65-F5344CB8AC3E}">
-        <p14:creationId xmlns:p14="http://schemas.microsoft.com/office/powerpoint/2010/main" val="3614949151"/>
-      </p:ext>
-    </p:extLst>
-  </p:cSld>
-  <p:clrMapOvr>
-    <a:masterClrMapping/>
-  </p:clrMapOvr>
-</p:sld>
-</file>
-
-<file path=ppt/slides/slide40.xml><?xml version="1.0" encoding="utf-8"?>
+<file path=ppt/slides/slide42.xml><?xml version="1.0" encoding="utf-8"?>
 <p:sld xmlns:a="http://schemas.openxmlformats.org/drawingml/2006/main" xmlns:r="http://schemas.openxmlformats.org/officeDocument/2006/relationships" xmlns:p="http://schemas.openxmlformats.org/presentationml/2006/main">
   <p:cSld>
     <p:spTree>
@@ -9553,6 +9941,180 @@
 </file>
 
 <file path=ppt/slides/slide6.xml><?xml version="1.0" encoding="utf-8"?>
+<p:sld xmlns:a="http://schemas.openxmlformats.org/drawingml/2006/main" xmlns:r="http://schemas.openxmlformats.org/officeDocument/2006/relationships" xmlns:p="http://schemas.openxmlformats.org/presentationml/2006/main">
+  <p:cSld>
+    <p:spTree>
+      <p:nvGrpSpPr>
+        <p:cNvPr id="1" name=""/>
+        <p:cNvGrpSpPr/>
+        <p:nvPr/>
+      </p:nvGrpSpPr>
+      <p:grpSpPr>
+        <a:xfrm>
+          <a:off x="0" y="0"/>
+          <a:ext cx="0" cy="0"/>
+          <a:chOff x="0" y="0"/>
+          <a:chExt cx="0" cy="0"/>
+        </a:xfrm>
+      </p:grpSpPr>
+      <p:sp>
+        <p:nvSpPr>
+          <p:cNvPr id="2" name="Title 1">
+            <a:extLst>
+              <a:ext uri="{FF2B5EF4-FFF2-40B4-BE49-F238E27FC236}">
+                <a16:creationId xmlns:a16="http://schemas.microsoft.com/office/drawing/2014/main" id="{65CC8B26-7F85-3A49-4071-D42121716ABF}"/>
+              </a:ext>
+            </a:extLst>
+          </p:cNvPr>
+          <p:cNvSpPr>
+            <a:spLocks noGrp="1"/>
+          </p:cNvSpPr>
+          <p:nvPr>
+            <p:ph type="title"/>
+          </p:nvPr>
+        </p:nvSpPr>
+        <p:spPr/>
+        <p:txBody>
+          <a:bodyPr/>
+          <a:lstStyle/>
+          <a:p>
+            <a:endParaRPr lang="en-US"/>
+          </a:p>
+        </p:txBody>
+      </p:sp>
+      <p:sp>
+        <p:nvSpPr>
+          <p:cNvPr id="3" name="Content Placeholder 2">
+            <a:extLst>
+              <a:ext uri="{FF2B5EF4-FFF2-40B4-BE49-F238E27FC236}">
+                <a16:creationId xmlns:a16="http://schemas.microsoft.com/office/drawing/2014/main" id="{2DAA9270-5840-85DF-C290-3F3ED66E2894}"/>
+              </a:ext>
+            </a:extLst>
+          </p:cNvPr>
+          <p:cNvSpPr>
+            <a:spLocks noGrp="1"/>
+          </p:cNvSpPr>
+          <p:nvPr>
+            <p:ph idx="1"/>
+          </p:nvPr>
+        </p:nvSpPr>
+        <p:spPr/>
+        <p:txBody>
+          <a:bodyPr/>
+          <a:lstStyle/>
+          <a:p>
+            <a:endParaRPr lang="en-US"/>
+          </a:p>
+        </p:txBody>
+      </p:sp>
+      <p:pic>
+        <p:nvPicPr>
+          <p:cNvPr id="8194" name="Picture 2" descr="Time Series Analysis in R: How to Read and Understand Time Series Data">
+            <a:extLst>
+              <a:ext uri="{FF2B5EF4-FFF2-40B4-BE49-F238E27FC236}">
+                <a16:creationId xmlns:a16="http://schemas.microsoft.com/office/drawing/2014/main" id="{84956C65-7D21-5D7F-5DEE-1936C634C100}"/>
+              </a:ext>
+            </a:extLst>
+          </p:cNvPr>
+          <p:cNvPicPr>
+            <a:picLocks noChangeAspect="1" noChangeArrowheads="1"/>
+          </p:cNvPicPr>
+          <p:nvPr/>
+        </p:nvPicPr>
+        <p:blipFill rotWithShape="1">
+          <a:blip r:embed="rId2">
+            <a:extLst>
+              <a:ext uri="{28A0092B-C50C-407E-A947-70E740481C1C}">
+                <a14:useLocalDpi xmlns:a14="http://schemas.microsoft.com/office/drawing/2010/main" val="0"/>
+              </a:ext>
+            </a:extLst>
+          </a:blip>
+          <a:srcRect r="55300"/>
+          <a:stretch>
+            <a:fillRect/>
+          </a:stretch>
+        </p:blipFill>
+        <p:spPr bwMode="auto">
+          <a:xfrm>
+            <a:off x="777421" y="0"/>
+            <a:ext cx="4774293" cy="6858000"/>
+          </a:xfrm>
+          <a:prstGeom prst="rect">
+            <a:avLst/>
+          </a:prstGeom>
+          <a:noFill/>
+          <a:extLst>
+            <a:ext uri="{909E8E84-426E-40DD-AFC4-6F175D3DCCD1}">
+              <a14:hiddenFill xmlns:a14="http://schemas.microsoft.com/office/drawing/2010/main">
+                <a:solidFill>
+                  <a:srgbClr val="FFFFFF"/>
+                </a:solidFill>
+              </a14:hiddenFill>
+            </a:ext>
+          </a:extLst>
+        </p:spPr>
+      </p:pic>
+      <p:pic>
+        <p:nvPicPr>
+          <p:cNvPr id="8196" name="Picture 4" descr="The air passengers time series data | Download Scientific Diagram">
+            <a:extLst>
+              <a:ext uri="{FF2B5EF4-FFF2-40B4-BE49-F238E27FC236}">
+                <a16:creationId xmlns:a16="http://schemas.microsoft.com/office/drawing/2014/main" id="{EFD17C5A-5E3F-9914-5EF0-82B0EA2A112E}"/>
+              </a:ext>
+            </a:extLst>
+          </p:cNvPr>
+          <p:cNvPicPr>
+            <a:picLocks noChangeAspect="1" noChangeArrowheads="1"/>
+          </p:cNvPicPr>
+          <p:nvPr/>
+        </p:nvPicPr>
+        <p:blipFill>
+          <a:blip r:embed="rId3">
+            <a:extLst>
+              <a:ext uri="{28A0092B-C50C-407E-A947-70E740481C1C}">
+                <a14:useLocalDpi xmlns:a14="http://schemas.microsoft.com/office/drawing/2010/main" val="0"/>
+              </a:ext>
+            </a:extLst>
+          </a:blip>
+          <a:srcRect/>
+          <a:stretch>
+            <a:fillRect/>
+          </a:stretch>
+        </p:blipFill>
+        <p:spPr bwMode="auto">
+          <a:xfrm>
+            <a:off x="5551714" y="1730829"/>
+            <a:ext cx="6531505" cy="4357026"/>
+          </a:xfrm>
+          <a:prstGeom prst="rect">
+            <a:avLst/>
+          </a:prstGeom>
+          <a:noFill/>
+          <a:extLst>
+            <a:ext uri="{909E8E84-426E-40DD-AFC4-6F175D3DCCD1}">
+              <a14:hiddenFill xmlns:a14="http://schemas.microsoft.com/office/drawing/2010/main">
+                <a:solidFill>
+                  <a:srgbClr val="FFFFFF"/>
+                </a:solidFill>
+              </a14:hiddenFill>
+            </a:ext>
+          </a:extLst>
+        </p:spPr>
+      </p:pic>
+    </p:spTree>
+    <p:extLst>
+      <p:ext uri="{BB962C8B-B14F-4D97-AF65-F5344CB8AC3E}">
+        <p14:creationId xmlns:p14="http://schemas.microsoft.com/office/powerpoint/2010/main" val="2085373519"/>
+      </p:ext>
+    </p:extLst>
+  </p:cSld>
+  <p:clrMapOvr>
+    <a:masterClrMapping/>
+  </p:clrMapOvr>
+</p:sld>
+</file>
+
+<file path=ppt/slides/slide7.xml><?xml version="1.0" encoding="utf-8"?>
 <p:sld xmlns:a="http://schemas.openxmlformats.org/drawingml/2006/main" xmlns:r="http://schemas.openxmlformats.org/officeDocument/2006/relationships" xmlns:p="http://schemas.openxmlformats.org/presentationml/2006/main">
   <p:cSld>
     <p:spTree>
@@ -9686,7 +10248,7 @@
 </p:sld>
 </file>
 
-<file path=ppt/slides/slide7.xml><?xml version="1.0" encoding="utf-8"?>
+<file path=ppt/slides/slide8.xml><?xml version="1.0" encoding="utf-8"?>
 <p:sld xmlns:a="http://schemas.openxmlformats.org/drawingml/2006/main" xmlns:r="http://schemas.openxmlformats.org/officeDocument/2006/relationships" xmlns:p="http://schemas.openxmlformats.org/presentationml/2006/main">
   <p:cSld>
     <p:spTree>
@@ -9819,7 +10381,7 @@
 </p:sld>
 </file>
 
-<file path=ppt/slides/slide8.xml><?xml version="1.0" encoding="utf-8"?>
+<file path=ppt/slides/slide9.xml><?xml version="1.0" encoding="utf-8"?>
 <p:sld xmlns:a="http://schemas.openxmlformats.org/drawingml/2006/main" xmlns:r="http://schemas.openxmlformats.org/officeDocument/2006/relationships" xmlns:p="http://schemas.openxmlformats.org/presentationml/2006/main" show="0">
   <p:cSld>
     <p:spTree>
@@ -9937,182 +10499,6 @@
     <p:extLst>
       <p:ext uri="{BB962C8B-B14F-4D97-AF65-F5344CB8AC3E}">
         <p14:creationId xmlns:p14="http://schemas.microsoft.com/office/powerpoint/2010/main" val="2949466179"/>
-      </p:ext>
-    </p:extLst>
-  </p:cSld>
-  <p:clrMapOvr>
-    <a:masterClrMapping/>
-  </p:clrMapOvr>
-</p:sld>
-</file>
-
-<file path=ppt/slides/slide9.xml><?xml version="1.0" encoding="utf-8"?>
-<p:sld xmlns:a="http://schemas.openxmlformats.org/drawingml/2006/main" xmlns:r="http://schemas.openxmlformats.org/officeDocument/2006/relationships" xmlns:p="http://schemas.openxmlformats.org/presentationml/2006/main">
-  <p:cSld>
-    <p:spTree>
-      <p:nvGrpSpPr>
-        <p:cNvPr id="1" name=""/>
-        <p:cNvGrpSpPr/>
-        <p:nvPr/>
-      </p:nvGrpSpPr>
-      <p:grpSpPr>
-        <a:xfrm>
-          <a:off x="0" y="0"/>
-          <a:ext cx="0" cy="0"/>
-          <a:chOff x="0" y="0"/>
-          <a:chExt cx="0" cy="0"/>
-        </a:xfrm>
-      </p:grpSpPr>
-      <p:sp>
-        <p:nvSpPr>
-          <p:cNvPr id="2" name="Title 1">
-            <a:extLst>
-              <a:ext uri="{FF2B5EF4-FFF2-40B4-BE49-F238E27FC236}">
-                <a16:creationId xmlns:a16="http://schemas.microsoft.com/office/drawing/2014/main" id="{82AE3AE3-61AA-C5C4-4A48-DBE9FABF829F}"/>
-              </a:ext>
-            </a:extLst>
-          </p:cNvPr>
-          <p:cNvSpPr>
-            <a:spLocks noGrp="1"/>
-          </p:cNvSpPr>
-          <p:nvPr>
-            <p:ph type="title"/>
-          </p:nvPr>
-        </p:nvSpPr>
-        <p:spPr>
-          <a:xfrm>
-            <a:off x="145143" y="804519"/>
-            <a:ext cx="4845957" cy="1049235"/>
-          </a:xfrm>
-        </p:spPr>
-        <p:txBody>
-          <a:bodyPr/>
-          <a:lstStyle/>
-          <a:p>
-            <a:r>
-              <a:rPr lang="en-US" dirty="0"/>
-              <a:t>Time Series Components</a:t>
-            </a:r>
-          </a:p>
-        </p:txBody>
-      </p:sp>
-      <p:sp>
-        <p:nvSpPr>
-          <p:cNvPr id="3" name="Content Placeholder 2">
-            <a:extLst>
-              <a:ext uri="{FF2B5EF4-FFF2-40B4-BE49-F238E27FC236}">
-                <a16:creationId xmlns:a16="http://schemas.microsoft.com/office/drawing/2014/main" id="{823CBDEA-9B52-1B56-8C54-684D056D5886}"/>
-              </a:ext>
-            </a:extLst>
-          </p:cNvPr>
-          <p:cNvSpPr>
-            <a:spLocks noGrp="1"/>
-          </p:cNvSpPr>
-          <p:nvPr>
-            <p:ph idx="1"/>
-          </p:nvPr>
-        </p:nvSpPr>
-        <p:spPr>
-          <a:xfrm>
-            <a:off x="145143" y="1853754"/>
-            <a:ext cx="4845957" cy="4199727"/>
-          </a:xfrm>
-        </p:spPr>
-        <p:txBody>
-          <a:bodyPr/>
-          <a:lstStyle/>
-          <a:p>
-            <a:r>
-              <a:rPr lang="en-US" dirty="0"/>
-              <a:t>The basic idea is that if we can extract each component of the time series’ variation, our model can more easily project each. </a:t>
-            </a:r>
-          </a:p>
-          <a:p>
-            <a:r>
-              <a:rPr lang="en-US" dirty="0"/>
-              <a:t>Example plots:</a:t>
-            </a:r>
-          </a:p>
-          <a:p>
-            <a:pPr lvl="1"/>
-            <a:r>
-              <a:rPr lang="en-US" dirty="0"/>
-              <a:t>Trend – linear increase. </a:t>
-            </a:r>
-          </a:p>
-          <a:p>
-            <a:pPr lvl="1"/>
-            <a:r>
-              <a:rPr lang="en-US" dirty="0"/>
-              <a:t>Seasonality – predictable waves. </a:t>
-            </a:r>
-          </a:p>
-          <a:p>
-            <a:pPr lvl="1"/>
-            <a:r>
-              <a:rPr lang="en-US" dirty="0"/>
-              <a:t>Random – “other” variation. </a:t>
-            </a:r>
-          </a:p>
-          <a:p>
-            <a:r>
-              <a:rPr lang="en-US" dirty="0"/>
-              <a:t>Note: different models may capture slightly different components. </a:t>
-            </a:r>
-          </a:p>
-        </p:txBody>
-      </p:sp>
-      <p:pic>
-        <p:nvPicPr>
-          <p:cNvPr id="2050" name="Picture 2" descr="Time series graphs with random, seasonal and trend components in cluster 1  | Download Scientific Diagram">
-            <a:extLst>
-              <a:ext uri="{FF2B5EF4-FFF2-40B4-BE49-F238E27FC236}">
-                <a16:creationId xmlns:a16="http://schemas.microsoft.com/office/drawing/2014/main" id="{245F8238-6B60-6A10-C7A0-A1CBA8A26730}"/>
-              </a:ext>
-            </a:extLst>
-          </p:cNvPr>
-          <p:cNvPicPr>
-            <a:picLocks noChangeAspect="1" noChangeArrowheads="1"/>
-          </p:cNvPicPr>
-          <p:nvPr/>
-        </p:nvPicPr>
-        <p:blipFill>
-          <a:blip r:embed="rId2">
-            <a:extLst>
-              <a:ext uri="{28A0092B-C50C-407E-A947-70E740481C1C}">
-                <a14:useLocalDpi xmlns:a14="http://schemas.microsoft.com/office/drawing/2010/main" val="0"/>
-              </a:ext>
-            </a:extLst>
-          </a:blip>
-          <a:srcRect/>
-          <a:stretch>
-            <a:fillRect/>
-          </a:stretch>
-        </p:blipFill>
-        <p:spPr bwMode="auto">
-          <a:xfrm>
-            <a:off x="4991100" y="196850"/>
-            <a:ext cx="7200900" cy="6464300"/>
-          </a:xfrm>
-          <a:prstGeom prst="rect">
-            <a:avLst/>
-          </a:prstGeom>
-          <a:noFill/>
-          <a:extLst>
-            <a:ext uri="{909E8E84-426E-40DD-AFC4-6F175D3DCCD1}">
-              <a14:hiddenFill xmlns:a14="http://schemas.microsoft.com/office/drawing/2010/main">
-                <a:solidFill>
-                  <a:srgbClr val="FFFFFF"/>
-                </a:solidFill>
-              </a14:hiddenFill>
-            </a:ext>
-          </a:extLst>
-        </p:spPr>
-      </p:pic>
-    </p:spTree>
-    <p:extLst>
-      <p:ext uri="{BB962C8B-B14F-4D97-AF65-F5344CB8AC3E}">
-        <p14:creationId xmlns:p14="http://schemas.microsoft.com/office/powerpoint/2010/main" val="1903044234"/>
       </p:ext>
     </p:extLst>
   </p:cSld>
